--- a/hearts-and-minds/journey-decks/hm-journey-mark-v1.pptx
+++ b/hearts-and-minds/journey-decks/hm-journey-mark-v1.pptx
@@ -1846,7 +1846,7 @@
       </p:sp>
       <p:pic>
         <p:nvPicPr>
-          <p:cNvPr id="10" name="Image 1" descr="/sessions/quirky-zen-galileo/mnt/outputs/hmdecks/img/mark-portrait.jpg">    </p:cNvPr>
+          <p:cNvPr id="10" name="Image 1" descr="/sessions/quirky-zen-galileo/mnt/outputs/hmdecks5/img/mark-portrait.jpg">    </p:cNvPr>
           <p:cNvPicPr>
             <a:picLocks noChangeAspect="1"/>
           </p:cNvPicPr>
@@ -4034,7 +4034,7 @@
       </p:sp>
       <p:pic>
         <p:nvPicPr>
-          <p:cNvPr id="13" name="Image 1" descr="/sessions/quirky-zen-galileo/mnt/outputs/hmdecks/img/mark-stage1.jpg">    </p:cNvPr>
+          <p:cNvPr id="13" name="Image 1" descr="/sessions/quirky-zen-galileo/mnt/outputs/hmdecks5/img/mark-stage1.jpg">    </p:cNvPr>
           <p:cNvPicPr>
             <a:picLocks noChangeAspect="1"/>
           </p:cNvPicPr>
@@ -4953,7 +4953,7 @@
       </p:sp>
       <p:pic>
         <p:nvPicPr>
-          <p:cNvPr id="13" name="Image 1" descr="/sessions/quirky-zen-galileo/mnt/outputs/hmdecks/img/mark-stage2.jpg">    </p:cNvPr>
+          <p:cNvPr id="13" name="Image 1" descr="/sessions/quirky-zen-galileo/mnt/outputs/hmdecks5/img/mark-stage2.jpg">    </p:cNvPr>
           <p:cNvPicPr>
             <a:picLocks noChangeAspect="1"/>
           </p:cNvPicPr>
@@ -5872,7 +5872,7 @@
       </p:sp>
       <p:pic>
         <p:nvPicPr>
-          <p:cNvPr id="13" name="Image 1" descr="/sessions/quirky-zen-galileo/mnt/outputs/hmdecks/img/mark-stage3.jpg">    </p:cNvPr>
+          <p:cNvPr id="13" name="Image 1" descr="/sessions/quirky-zen-galileo/mnt/outputs/hmdecks5/img/mark-stage3.jpg">    </p:cNvPr>
           <p:cNvPicPr>
             <a:picLocks noChangeAspect="1"/>
           </p:cNvPicPr>
@@ -6791,7 +6791,7 @@
       </p:sp>
       <p:pic>
         <p:nvPicPr>
-          <p:cNvPr id="13" name="Image 1" descr="/sessions/quirky-zen-galileo/mnt/outputs/hmdecks/img/mark-stage4.jpg">    </p:cNvPr>
+          <p:cNvPr id="13" name="Image 1" descr="/sessions/quirky-zen-galileo/mnt/outputs/hmdecks5/img/mark-stage4.jpg">    </p:cNvPr>
           <p:cNvPicPr>
             <a:picLocks noChangeAspect="1"/>
           </p:cNvPicPr>
@@ -7710,7 +7710,7 @@
       </p:sp>
       <p:pic>
         <p:nvPicPr>
-          <p:cNvPr id="13" name="Image 1" descr="/sessions/quirky-zen-galileo/mnt/outputs/hmdecks/img/mark-stage5.jpg">    </p:cNvPr>
+          <p:cNvPr id="13" name="Image 1" descr="/sessions/quirky-zen-galileo/mnt/outputs/hmdecks5/img/mark-stage5.jpg">    </p:cNvPr>
           <p:cNvPicPr>
             <a:picLocks noChangeAspect="1"/>
           </p:cNvPicPr>
@@ -8656,7 +8656,7 @@
                 <a:ea typeface="Arial" pitchFamily="34" charset="-122"/>
                 <a:cs typeface="Arial" pitchFamily="34" charset="-120"/>
               </a:rPr>
-              <a:t>Nobody invoices Mark for staying at home. Each surveillance test is bought at a set price per activity by the ICB that funds his pathway, paid direct to the supplier that processes it. The hospital loses nothing when he stops travelling in: the money follows the completed test, not the building, and the phlebotomy slot he used four times a year goes to a patient who needs an in-person appointment. His consultant's review is unchanged, and still where the clinical value sits.</a:t>
+              <a:t>Nobody invoices Mark for staying at home. Each surveillance test is bought at a cost per activity by the ICB that funds his pathway, paid direct to the supplier that processes it. The hospital loses nothing when he stops travelling in: the money follows the completed test, not the building, and the phlebotomy slot he used four times a year goes to a patient who needs an in-person appointment. His consultant's review is unchanged, and still where the clinical value sits.</a:t>
             </a:r>
             <a:endParaRPr lang="en-US" sz="1150" dirty="0"/>
           </a:p>

--- a/hearts-and-minds/journey-decks/hm-journey-mark-v1.pptx
+++ b/hearts-and-minds/journey-decks/hm-journey-mark-v1.pptx
@@ -1502,13 +1502,6 @@
 <file path=ppt/slides/slide1.xml><?xml version="1.0" encoding="utf-8"?>
 <p:sld xmlns:a="http://schemas.openxmlformats.org/drawingml/2006/main" xmlns:r="http://schemas.openxmlformats.org/officeDocument/2006/relationships" xmlns:p="http://schemas.openxmlformats.org/presentationml/2006/main">
   <p:cSld name="Slide 1">
-    <p:bg>
-      <p:bgPr>
-        <a:solidFill>
-          <a:srgbClr val="003087"/>
-        </a:solidFill>
-      </p:bgPr>
-    </p:bg>
     <p:spTree>
       <p:nvGrpSpPr>
         <p:cNvPr id="1" name=""/>
@@ -1525,7 +1518,7 @@
       </p:grpSpPr>
       <p:pic>
         <p:nvPicPr>
-          <p:cNvPr id="2" name="Image 0" descr="/sessions/quirky-zen-galileo/mnt/outputs/deckbuild/nhs_logo.png">    </p:cNvPr>
+          <p:cNvPr id="2" name="Image 0" descr="/sessions/quirky-zen-galileo/mnt/NHS/07 Sites &amp; Repos/dtx-ecosystem/hearts-and-minds/_generators/assets/bg-hero.jpg">    </p:cNvPr>
           <p:cNvPicPr>
             <a:picLocks noChangeAspect="1"/>
           </p:cNvPicPr>
@@ -1539,8 +1532,8 @@
         </p:blipFill>
         <p:spPr>
           <a:xfrm>
-            <a:off x="10591495" y="365760"/>
-            <a:ext cx="1143000" cy="466344"/>
+            <a:off x="0" y="0"/>
+            <a:ext cx="12191695" cy="6858000"/>
           </a:xfrm>
           <a:prstGeom prst="rect">
             <a:avLst/>
@@ -1549,14 +1542,65 @@
       </p:pic>
       <p:sp>
         <p:nvSpPr>
-          <p:cNvPr id="3" name="Text 0"/>
-          <p:cNvSpPr/>
-          <p:nvPr/>
-        </p:nvSpPr>
-        <p:spPr>
-          <a:xfrm>
-            <a:off x="640080" y="502920"/>
-            <a:ext cx="9326880" cy="274320"/>
+          <p:cNvPr id="3" name="Shape 0"/>
+          <p:cNvSpPr/>
+          <p:nvPr/>
+        </p:nvSpPr>
+        <p:spPr>
+          <a:xfrm>
+            <a:off x="10782523" y="457200"/>
+            <a:ext cx="860532" cy="658368"/>
+          </a:xfrm>
+          <a:prstGeom prst="roundRect">
+            <a:avLst>
+              <a:gd name="adj" fmla="val 11111"/>
+            </a:avLst>
+          </a:prstGeom>
+          <a:solidFill>
+            <a:srgbClr val="FFFFFF"/>
+          </a:solidFill>
+          <a:ln w="12700">
+            <a:solidFill>
+              <a:srgbClr val="FFFFFF"/>
+            </a:solidFill>
+            <a:prstDash val="solid"/>
+          </a:ln>
+        </p:spPr>
+      </p:sp>
+      <p:pic>
+        <p:nvPicPr>
+          <p:cNvPr id="4" name="Image 1" descr="/sessions/quirky-zen-galileo/mnt/NHS/07 Sites &amp; Repos/dtx-ecosystem/hearts-and-minds/_generators/assets/nhs-logo.png">    </p:cNvPr>
+          <p:cNvPicPr>
+            <a:picLocks noChangeAspect="1"/>
+          </p:cNvPicPr>
+          <p:nvPr/>
+        </p:nvPicPr>
+        <p:blipFill>
+          <a:blip r:embed="rId2"/>
+          <a:stretch>
+            <a:fillRect/>
+          </a:stretch>
+        </p:blipFill>
+        <p:spPr>
+          <a:xfrm>
+            <a:off x="10919683" y="557784"/>
+            <a:ext cx="586212" cy="457200"/>
+          </a:xfrm>
+          <a:prstGeom prst="rect">
+            <a:avLst/>
+          </a:prstGeom>
+        </p:spPr>
+      </p:pic>
+      <p:sp>
+        <p:nvSpPr>
+          <p:cNvPr id="5" name="Text 1"/>
+          <p:cNvSpPr/>
+          <p:nvPr/>
+        </p:nvSpPr>
+        <p:spPr>
+          <a:xfrm>
+            <a:off x="685800" y="566928"/>
+            <a:ext cx="8778240" cy="274320"/>
           </a:xfrm>
           <a:prstGeom prst="rect">
             <a:avLst/>
@@ -1572,32 +1616,265 @@
               <a:buNone/>
             </a:pPr>
             <a:r>
-              <a:rPr lang="en-US" sz="1050" b="1" spc="300" kern="0" dirty="0">
-                <a:solidFill>
-                  <a:srgbClr val="7EC8E3"/>
-                </a:solidFill>
-                <a:latin typeface="Arial" pitchFamily="34" charset="0"/>
-                <a:ea typeface="Arial" pitchFamily="34" charset="-122"/>
-                <a:cs typeface="Arial" pitchFamily="34" charset="-120"/>
+              <a:rPr lang="en-US" sz="1000" b="1" spc="280" kern="0" dirty="0">
+                <a:solidFill>
+                  <a:srgbClr val="FFD66B"/>
+                </a:solidFill>
+                <a:latin typeface="Segoe UI" pitchFamily="34" charset="0"/>
+                <a:ea typeface="Segoe UI" pitchFamily="34" charset="-122"/>
+                <a:cs typeface="Segoe UI" pitchFamily="34" charset="-120"/>
               </a:rPr>
               <a:t>HEARTS AND MINDS  ·  HOMETEST OPERATING MODEL  ·  PATIENT JOURNEY</a:t>
             </a:r>
+            <a:endParaRPr lang="en-US" sz="1000" dirty="0"/>
+          </a:p>
+        </p:txBody>
+      </p:sp>
+      <p:sp>
+        <p:nvSpPr>
+          <p:cNvPr id="6" name="Shape 2"/>
+          <p:cNvSpPr/>
+          <p:nvPr/>
+        </p:nvSpPr>
+        <p:spPr>
+          <a:xfrm>
+            <a:off x="685800" y="969264"/>
+            <a:ext cx="822960" cy="50292"/>
+          </a:xfrm>
+          <a:prstGeom prst="rect">
+            <a:avLst/>
+          </a:prstGeom>
+          <a:solidFill>
+            <a:srgbClr val="FFD66B"/>
+          </a:solidFill>
+          <a:ln w="12700">
+            <a:solidFill>
+              <a:srgbClr val="FFD66B"/>
+            </a:solidFill>
+            <a:prstDash val="solid"/>
+          </a:ln>
+        </p:spPr>
+      </p:sp>
+      <p:sp>
+        <p:nvSpPr>
+          <p:cNvPr id="7" name="Text 3"/>
+          <p:cNvSpPr/>
+          <p:nvPr/>
+        </p:nvSpPr>
+        <p:spPr>
+          <a:xfrm>
+            <a:off x="685800" y="1133856"/>
+            <a:ext cx="7132320" cy="960120"/>
+          </a:xfrm>
+          <a:prstGeom prst="rect">
+            <a:avLst/>
+          </a:prstGeom>
+          <a:noFill/>
+          <a:ln/>
+        </p:spPr>
+        <p:txBody>
+          <a:bodyPr wrap="square" lIns="0" tIns="0" rIns="0" bIns="0" rtlCol="0" anchor="ctr"/>
+          <a:lstStyle/>
+          <a:p>
+            <a:pPr indent="0" marL="0">
+              <a:buNone/>
+            </a:pPr>
+            <a:r>
+              <a:rPr lang="en-US" sz="5600" b="1" spc="-120" kern="0" dirty="0">
+                <a:solidFill>
+                  <a:srgbClr val="FFFFFF"/>
+                </a:solidFill>
+                <a:latin typeface="Segoe UI" pitchFamily="34" charset="0"/>
+                <a:ea typeface="Segoe UI" pitchFamily="34" charset="-122"/>
+                <a:cs typeface="Segoe UI" pitchFamily="34" charset="-120"/>
+              </a:rPr>
+              <a:t>Mark.</a:t>
+            </a:r>
+            <a:endParaRPr lang="en-US" sz="5600" dirty="0"/>
+          </a:p>
+        </p:txBody>
+      </p:sp>
+      <p:sp>
+        <p:nvSpPr>
+          <p:cNvPr id="8" name="Text 4"/>
+          <p:cNvSpPr/>
+          <p:nvPr/>
+        </p:nvSpPr>
+        <p:spPr>
+          <a:xfrm>
+            <a:off x="685800" y="2139696"/>
+            <a:ext cx="6858000" cy="1225296"/>
+          </a:xfrm>
+          <a:prstGeom prst="rect">
+            <a:avLst/>
+          </a:prstGeom>
+          <a:noFill/>
+          <a:ln/>
+        </p:spPr>
+        <p:txBody>
+          <a:bodyPr wrap="square" lIns="0" tIns="0" rIns="0" bIns="0" rtlCol="0" anchor="t">
+            <a:normAutofit/>
+          </a:bodyPr>
+          <a:lstStyle/>
+          <a:p>
+            <a:pPr indent="0" marL="0">
+              <a:buNone/>
+            </a:pPr>
+            <a:r>
+              <a:rPr lang="en-US" sz="2400" dirty="0">
+                <a:solidFill>
+                  <a:srgbClr val="FFFFFF"/>
+                </a:solidFill>
+                <a:latin typeface="Segoe UI" pitchFamily="34" charset="0"/>
+                <a:ea typeface="Segoe UI" pitchFamily="34" charset="-122"/>
+                <a:cs typeface="Segoe UI" pitchFamily="34" charset="-120"/>
+              </a:rPr>
+              <a:t>His consultant</a:t>
+            </a:r>
+            <a:endParaRPr lang="en-US" sz="2400" dirty="0"/>
+          </a:p>
+          <a:p>
+            <a:pPr indent="0" marL="0">
+              <a:buNone/>
+            </a:pPr>
+            <a:r>
+              <a:rPr lang="en-US" sz="2400" dirty="0">
+                <a:solidFill>
+                  <a:srgbClr val="FFFFFF"/>
+                </a:solidFill>
+                <a:latin typeface="Segoe UI" pitchFamily="34" charset="0"/>
+                <a:ea typeface="Segoe UI" pitchFamily="34" charset="-122"/>
+                <a:cs typeface="Segoe UI" pitchFamily="34" charset="-120"/>
+              </a:rPr>
+              <a:t>still reads</a:t>
+            </a:r>
+            <a:endParaRPr lang="en-US" sz="2400" dirty="0"/>
+          </a:p>
+          <a:p>
+            <a:pPr indent="0" marL="0">
+              <a:buNone/>
+            </a:pPr>
+            <a:r>
+              <a:rPr lang="en-US" sz="2400" dirty="0">
+                <a:solidFill>
+                  <a:srgbClr val="FFFFFF"/>
+                </a:solidFill>
+                <a:latin typeface="Segoe UI" pitchFamily="34" charset="0"/>
+                <a:ea typeface="Segoe UI" pitchFamily="34" charset="-122"/>
+                <a:cs typeface="Segoe UI" pitchFamily="34" charset="-120"/>
+              </a:rPr>
+              <a:t>the trend.</a:t>
+            </a:r>
+            <a:endParaRPr lang="en-US" sz="2400" dirty="0"/>
+          </a:p>
+        </p:txBody>
+      </p:sp>
+      <p:sp>
+        <p:nvSpPr>
+          <p:cNvPr id="9" name="Text 5"/>
+          <p:cNvSpPr/>
+          <p:nvPr/>
+        </p:nvSpPr>
+        <p:spPr>
+          <a:xfrm>
+            <a:off x="685800" y="3621024"/>
+            <a:ext cx="6858000" cy="847344"/>
+          </a:xfrm>
+          <a:prstGeom prst="rect">
+            <a:avLst/>
+          </a:prstGeom>
+          <a:noFill/>
+          <a:ln/>
+        </p:spPr>
+        <p:txBody>
+          <a:bodyPr wrap="square" lIns="0" tIns="0" rIns="0" bIns="0" rtlCol="0" anchor="t">
+            <a:normAutofit/>
+          </a:bodyPr>
+          <a:lstStyle/>
+          <a:p>
+            <a:pPr indent="0" marL="0">
+              <a:buNone/>
+            </a:pPr>
+            <a:r>
+              <a:rPr lang="en-US" sz="1200" dirty="0">
+                <a:solidFill>
+                  <a:srgbClr val="DCE7F0"/>
+                </a:solidFill>
+                <a:latin typeface="Segoe UI" pitchFamily="34" charset="0"/>
+                <a:ea typeface="Segoe UI" pitchFamily="34" charset="-122"/>
+                <a:cs typeface="Segoe UI" pitchFamily="34" charset="-120"/>
+              </a:rPr>
+              <a:t>Mark is 65. Diagnosed with low-risk prostate cancer and placed on active surveillance under Adam at the local trust. The quarterly PSA is supposed to be routine. The clinic trip to get it is anything but. </a:t>
+            </a:r>
+            <a:pPr indent="0" marL="0">
+              <a:buNone/>
+            </a:pPr>
+            <a:r>
+              <a:rPr lang="en-US" sz="1200" b="1" dirty="0">
+                <a:solidFill>
+                  <a:srgbClr val="DCE7F0"/>
+                </a:solidFill>
+                <a:latin typeface="Segoe UI" pitchFamily="34" charset="0"/>
+                <a:ea typeface="Segoe UI" pitchFamily="34" charset="-122"/>
+                <a:cs typeface="Segoe UI" pitchFamily="34" charset="-120"/>
+              </a:rPr>
+              <a:t>This is the story of how the surveillance happens at home and the clinical accountability stays in clinic.</a:t>
+            </a:r>
+            <a:endParaRPr lang="en-US" sz="1200" dirty="0"/>
+          </a:p>
+        </p:txBody>
+      </p:sp>
+      <p:sp>
+        <p:nvSpPr>
+          <p:cNvPr id="10" name="Text 6"/>
+          <p:cNvSpPr/>
+          <p:nvPr/>
+        </p:nvSpPr>
+        <p:spPr>
+          <a:xfrm>
+            <a:off x="685800" y="4614672"/>
+            <a:ext cx="6858000" cy="384048"/>
+          </a:xfrm>
+          <a:prstGeom prst="rect">
+            <a:avLst/>
+          </a:prstGeom>
+          <a:noFill/>
+          <a:ln/>
+        </p:spPr>
+        <p:txBody>
+          <a:bodyPr wrap="square" lIns="0" tIns="0" rIns="0" bIns="0" rtlCol="0" anchor="t"/>
+          <a:lstStyle/>
+          <a:p>
+            <a:pPr indent="0" marL="0">
+              <a:buNone/>
+            </a:pPr>
+            <a:r>
+              <a:rPr lang="en-US" sz="1050" i="1" dirty="0">
+                <a:solidFill>
+                  <a:srgbClr val="9FC2E8"/>
+                </a:solidFill>
+                <a:latin typeface="Segoe UI" pitchFamily="34" charset="0"/>
+                <a:ea typeface="Segoe UI" pitchFamily="34" charset="-122"/>
+                <a:cs typeface="Segoe UI" pitchFamily="34" charset="-120"/>
+              </a:rPr>
+              <a:t>A patient's story through the operating model</a:t>
+            </a:r>
             <a:endParaRPr lang="en-US" sz="1050" dirty="0"/>
           </a:p>
         </p:txBody>
       </p:sp>
       <p:sp>
         <p:nvSpPr>
-          <p:cNvPr id="4" name="Shape 1"/>
-          <p:cNvSpPr/>
-          <p:nvPr/>
-        </p:nvSpPr>
-        <p:spPr>
-          <a:xfrm>
-            <a:off x="640080" y="914400"/>
-            <a:ext cx="822960" cy="54864"/>
-          </a:xfrm>
-          <a:prstGeom prst="rect">
+          <p:cNvPr id="11" name="Shape 7"/>
+          <p:cNvSpPr/>
+          <p:nvPr/>
+        </p:nvSpPr>
+        <p:spPr>
+          <a:xfrm>
+            <a:off x="8618220" y="1412748"/>
+            <a:ext cx="2788920" cy="2788920"/>
+          </a:xfrm>
+          <a:prstGeom prst="ellipse">
             <a:avLst/>
           </a:prstGeom>
           <a:solidFill>
@@ -1611,16 +1888,39 @@
           </a:ln>
         </p:spPr>
       </p:sp>
-      <p:sp>
-        <p:nvSpPr>
-          <p:cNvPr id="5" name="Text 2"/>
-          <p:cNvSpPr/>
-          <p:nvPr/>
-        </p:nvSpPr>
-        <p:spPr>
-          <a:xfrm>
-            <a:off x="640080" y="1097280"/>
-            <a:ext cx="7315200" cy="1005840"/>
+      <p:pic>
+        <p:nvPicPr>
+          <p:cNvPr id="12" name="Image 2" descr="/sessions/quirky-zen-galileo/mnt/outputs/jd/img/mark-portrait.jpg">    </p:cNvPr>
+          <p:cNvPicPr>
+            <a:picLocks noChangeAspect="1"/>
+          </p:cNvPicPr>
+          <p:nvPr/>
+        </p:nvPicPr>
+        <p:blipFill>
+          <a:blip r:embed="rId3"/>
+          <a:srcRect l="0" r="0" t="0" b="0"/>
+          <a:stretch/>
+        </p:blipFill>
+        <p:spPr>
+          <a:xfrm>
+            <a:off x="8686800" y="1481328"/>
+            <a:ext cx="2651760" cy="2651760"/>
+          </a:xfrm>
+          <a:prstGeom prst="ellipse">
+            <a:avLst/>
+          </a:prstGeom>
+        </p:spPr>
+      </p:pic>
+      <p:sp>
+        <p:nvSpPr>
+          <p:cNvPr id="13" name="Text 8"/>
+          <p:cNvSpPr/>
+          <p:nvPr/>
+        </p:nvSpPr>
+        <p:spPr>
+          <a:xfrm>
+            <a:off x="8183880" y="4352544"/>
+            <a:ext cx="3657600" cy="402336"/>
           </a:xfrm>
           <a:prstGeom prst="rect">
             <a:avLst/>
@@ -1632,34 +1932,34 @@
           <a:bodyPr wrap="square" lIns="0" tIns="0" rIns="0" bIns="0" rtlCol="0" anchor="ctr"/>
           <a:lstStyle/>
           <a:p>
-            <a:pPr indent="0" marL="0">
-              <a:buNone/>
-            </a:pPr>
-            <a:r>
-              <a:rPr lang="en-US" sz="6000" b="1" dirty="0">
+            <a:pPr algn="ctr" indent="0" marL="0">
+              <a:buNone/>
+            </a:pPr>
+            <a:r>
+              <a:rPr lang="en-US" sz="1900" b="1" dirty="0">
                 <a:solidFill>
                   <a:srgbClr val="FFFFFF"/>
                 </a:solidFill>
-                <a:latin typeface="Arial" pitchFamily="34" charset="0"/>
-                <a:ea typeface="Arial" pitchFamily="34" charset="-122"/>
-                <a:cs typeface="Arial" pitchFamily="34" charset="-120"/>
-              </a:rPr>
-              <a:t>Mark.</a:t>
-            </a:r>
-            <a:endParaRPr lang="en-US" sz="6000" dirty="0"/>
-          </a:p>
-        </p:txBody>
-      </p:sp>
-      <p:sp>
-        <p:nvSpPr>
-          <p:cNvPr id="6" name="Text 3"/>
-          <p:cNvSpPr/>
-          <p:nvPr/>
-        </p:nvSpPr>
-        <p:spPr>
-          <a:xfrm>
-            <a:off x="640080" y="2148840"/>
-            <a:ext cx="6949440" cy="1207008"/>
+                <a:latin typeface="Segoe UI" pitchFamily="34" charset="0"/>
+                <a:ea typeface="Segoe UI" pitchFamily="34" charset="-122"/>
+                <a:cs typeface="Segoe UI" pitchFamily="34" charset="-120"/>
+              </a:rPr>
+              <a:t>Mark</a:t>
+            </a:r>
+            <a:endParaRPr lang="en-US" sz="1900" dirty="0"/>
+          </a:p>
+        </p:txBody>
+      </p:sp>
+      <p:sp>
+        <p:nvSpPr>
+          <p:cNvPr id="14" name="Text 9"/>
+          <p:cNvSpPr/>
+          <p:nvPr/>
+        </p:nvSpPr>
+        <p:spPr>
+          <a:xfrm>
+            <a:off x="7955280" y="4754880"/>
+            <a:ext cx="4114800" cy="658368"/>
           </a:xfrm>
           <a:prstGeom prst="rect">
             <a:avLst/>
@@ -1673,123 +1973,34 @@
           </a:bodyPr>
           <a:lstStyle/>
           <a:p>
-            <a:pPr indent="0" marL="0">
-              <a:buNone/>
-            </a:pPr>
-            <a:r>
-              <a:rPr lang="en-US" sz="2400" dirty="0">
-                <a:solidFill>
-                  <a:srgbClr val="FFFFFF"/>
-                </a:solidFill>
-                <a:latin typeface="Arial" pitchFamily="34" charset="0"/>
-                <a:ea typeface="Arial" pitchFamily="34" charset="-122"/>
-                <a:cs typeface="Arial" pitchFamily="34" charset="-120"/>
-              </a:rPr>
-              <a:t>His consultant</a:t>
-            </a:r>
-            <a:endParaRPr lang="en-US" sz="2400" dirty="0"/>
-          </a:p>
-          <a:p>
-            <a:pPr indent="0" marL="0">
-              <a:buNone/>
-            </a:pPr>
-            <a:r>
-              <a:rPr lang="en-US" sz="2400" dirty="0">
-                <a:solidFill>
-                  <a:srgbClr val="FFFFFF"/>
-                </a:solidFill>
-                <a:latin typeface="Arial" pitchFamily="34" charset="0"/>
-                <a:ea typeface="Arial" pitchFamily="34" charset="-122"/>
-                <a:cs typeface="Arial" pitchFamily="34" charset="-120"/>
-              </a:rPr>
-              <a:t>still reads</a:t>
-            </a:r>
-            <a:endParaRPr lang="en-US" sz="2400" dirty="0"/>
-          </a:p>
-          <a:p>
-            <a:pPr indent="0" marL="0">
-              <a:buNone/>
-            </a:pPr>
-            <a:r>
-              <a:rPr lang="en-US" sz="2400" dirty="0">
-                <a:solidFill>
-                  <a:srgbClr val="FFFFFF"/>
-                </a:solidFill>
-                <a:latin typeface="Arial" pitchFamily="34" charset="0"/>
-                <a:ea typeface="Arial" pitchFamily="34" charset="-122"/>
-                <a:cs typeface="Arial" pitchFamily="34" charset="-120"/>
-              </a:rPr>
-              <a:t>the trend.</a:t>
-            </a:r>
-            <a:endParaRPr lang="en-US" sz="2400" dirty="0"/>
-          </a:p>
-        </p:txBody>
-      </p:sp>
-      <p:sp>
-        <p:nvSpPr>
-          <p:cNvPr id="7" name="Text 4"/>
-          <p:cNvSpPr/>
-          <p:nvPr/>
-        </p:nvSpPr>
-        <p:spPr>
-          <a:xfrm>
-            <a:off x="640080" y="3630168"/>
-            <a:ext cx="6949440" cy="835152"/>
-          </a:xfrm>
-          <a:prstGeom prst="rect">
-            <a:avLst/>
-          </a:prstGeom>
-          <a:noFill/>
-          <a:ln/>
-        </p:spPr>
-        <p:txBody>
-          <a:bodyPr wrap="square" lIns="0" tIns="0" rIns="0" bIns="0" rtlCol="0" anchor="t">
-            <a:normAutofit/>
-          </a:bodyPr>
-          <a:lstStyle/>
-          <a:p>
-            <a:pPr indent="0" marL="0">
-              <a:buNone/>
-            </a:pPr>
-            <a:r>
-              <a:rPr lang="en-US" sz="1200" dirty="0">
-                <a:solidFill>
-                  <a:srgbClr val="DCE7F0"/>
-                </a:solidFill>
-                <a:latin typeface="Arial" pitchFamily="34" charset="0"/>
-                <a:ea typeface="Arial" pitchFamily="34" charset="-122"/>
-                <a:cs typeface="Arial" pitchFamily="34" charset="-120"/>
-              </a:rPr>
-              <a:t>Mark is 65. Diagnosed with low-risk prostate cancer and placed on active surveillance under Adam at the local trust. The quarterly PSA is supposed to be routine. The clinic trip to get it is anything but. </a:t>
-            </a:r>
-            <a:pPr indent="0" marL="0">
-              <a:buNone/>
-            </a:pPr>
-            <a:r>
-              <a:rPr lang="en-US" sz="1200" b="1" dirty="0">
-                <a:solidFill>
-                  <a:srgbClr val="DCE7F0"/>
-                </a:solidFill>
-                <a:latin typeface="Arial" pitchFamily="34" charset="0"/>
-                <a:ea typeface="Arial" pitchFamily="34" charset="-122"/>
-                <a:cs typeface="Arial" pitchFamily="34" charset="-120"/>
-              </a:rPr>
-              <a:t>This is the story of how the surveillance happens at home and the clinical accountability stays in clinic.</a:t>
-            </a:r>
-            <a:endParaRPr lang="en-US" sz="1200" dirty="0"/>
-          </a:p>
-        </p:txBody>
-      </p:sp>
-      <p:sp>
-        <p:nvSpPr>
-          <p:cNvPr id="8" name="Text 5"/>
-          <p:cNvSpPr/>
-          <p:nvPr/>
-        </p:nvSpPr>
-        <p:spPr>
-          <a:xfrm>
-            <a:off x="640080" y="4602480"/>
-            <a:ext cx="6949440" cy="365760"/>
+            <a:pPr algn="ctr" indent="0" marL="0">
+              <a:buNone/>
+            </a:pPr>
+            <a:r>
+              <a:rPr lang="en-US" sz="1050" spc="60" kern="0" dirty="0">
+                <a:solidFill>
+                  <a:srgbClr val="FFD66B"/>
+                </a:solidFill>
+                <a:latin typeface="Segoe UI" pitchFamily="34" charset="0"/>
+                <a:ea typeface="Segoe UI" pitchFamily="34" charset="-122"/>
+                <a:cs typeface="Segoe UI" pitchFamily="34" charset="-120"/>
+              </a:rPr>
+              <a:t>Patient on active surveillance · PSA-AS cohort</a:t>
+            </a:r>
+            <a:endParaRPr lang="en-US" sz="1050" dirty="0"/>
+          </a:p>
+        </p:txBody>
+      </p:sp>
+      <p:sp>
+        <p:nvSpPr>
+          <p:cNvPr id="15" name="Text 10"/>
+          <p:cNvSpPr/>
+          <p:nvPr/>
+        </p:nvSpPr>
+        <p:spPr>
+          <a:xfrm>
+            <a:off x="457200" y="6455664"/>
+            <a:ext cx="4206240" cy="274320"/>
           </a:xfrm>
           <a:prstGeom prst="rect">
             <a:avLst/>
@@ -1805,78 +2016,30 @@
               <a:buNone/>
             </a:pPr>
             <a:r>
-              <a:rPr lang="en-US" sz="1050" i="1" dirty="0">
-                <a:solidFill>
-                  <a:srgbClr val="7EC8E3"/>
-                </a:solidFill>
-                <a:latin typeface="Arial" pitchFamily="34" charset="0"/>
-                <a:ea typeface="Arial" pitchFamily="34" charset="-122"/>
-                <a:cs typeface="Arial" pitchFamily="34" charset="-120"/>
-              </a:rPr>
-              <a:t>A patient's story through the operating model</a:t>
-            </a:r>
-            <a:endParaRPr lang="en-US" sz="1050" dirty="0"/>
-          </a:p>
-        </p:txBody>
-      </p:sp>
-      <p:sp>
-        <p:nvSpPr>
-          <p:cNvPr id="9" name="Shape 6"/>
-          <p:cNvSpPr/>
-          <p:nvPr/>
-        </p:nvSpPr>
-        <p:spPr>
-          <a:xfrm>
-            <a:off x="8476488" y="1344168"/>
-            <a:ext cx="2889504" cy="2889504"/>
-          </a:xfrm>
-          <a:prstGeom prst="ellipse">
-            <a:avLst/>
-          </a:prstGeom>
-          <a:solidFill>
-            <a:srgbClr val="FFB91D"/>
-          </a:solidFill>
-          <a:ln w="12700">
-            <a:solidFill>
-              <a:srgbClr val="FFB91D"/>
-            </a:solidFill>
-            <a:prstDash val="solid"/>
-          </a:ln>
-        </p:spPr>
-      </p:sp>
-      <p:pic>
-        <p:nvPicPr>
-          <p:cNvPr id="10" name="Image 1" descr="/sessions/quirky-zen-galileo/mnt/outputs/hmdecks5/img/mark-portrait.jpg">    </p:cNvPr>
-          <p:cNvPicPr>
-            <a:picLocks noChangeAspect="1"/>
-          </p:cNvPicPr>
-          <p:nvPr/>
-        </p:nvPicPr>
-        <p:blipFill>
-          <a:blip r:embed="rId2"/>
-          <a:srcRect l="0" r="0" t="0" b="0"/>
-          <a:stretch/>
-        </p:blipFill>
-        <p:spPr>
-          <a:xfrm>
-            <a:off x="8549640" y="1417320"/>
-            <a:ext cx="2743200" cy="2743200"/>
-          </a:xfrm>
-          <a:prstGeom prst="ellipse">
-            <a:avLst/>
-          </a:prstGeom>
-        </p:spPr>
-      </p:pic>
-      <p:sp>
-        <p:nvSpPr>
-          <p:cNvPr id="11" name="Text 7"/>
-          <p:cNvSpPr/>
-          <p:nvPr/>
-        </p:nvSpPr>
-        <p:spPr>
-          <a:xfrm>
-            <a:off x="8138160" y="4343400"/>
-            <a:ext cx="3566160" cy="411480"/>
+              <a:rPr lang="en-US" sz="850" dirty="0">
+                <a:solidFill>
+                  <a:srgbClr val="9FC2E8"/>
+                </a:solidFill>
+                <a:latin typeface="Segoe UI" pitchFamily="34" charset="0"/>
+                <a:ea typeface="Segoe UI" pitchFamily="34" charset="-122"/>
+                <a:cs typeface="Segoe UI" pitchFamily="34" charset="-120"/>
+              </a:rPr>
+              <a:t>HomeTest Operating Model  ·  Hearts and Minds</a:t>
+            </a:r>
+            <a:endParaRPr lang="en-US" sz="850" dirty="0"/>
+          </a:p>
+        </p:txBody>
+      </p:sp>
+      <p:sp>
+        <p:nvSpPr>
+          <p:cNvPr id="16" name="Text 11"/>
+          <p:cNvSpPr/>
+          <p:nvPr/>
+        </p:nvSpPr>
+        <p:spPr>
+          <a:xfrm>
+            <a:off x="4754880" y="6455664"/>
+            <a:ext cx="6430975" cy="274320"/>
           </a:xfrm>
           <a:prstGeom prst="rect">
             <a:avLst/>
@@ -1888,134 +2051,17 @@
           <a:bodyPr wrap="square" lIns="0" tIns="0" rIns="0" bIns="0" rtlCol="0" anchor="ctr"/>
           <a:lstStyle/>
           <a:p>
-            <a:pPr algn="ctr" indent="0" marL="0">
-              <a:buNone/>
-            </a:pPr>
-            <a:r>
-              <a:rPr lang="en-US" sz="2000" b="1" dirty="0">
-                <a:solidFill>
-                  <a:srgbClr val="FFFFFF"/>
-                </a:solidFill>
-                <a:latin typeface="Arial" pitchFamily="34" charset="0"/>
-                <a:ea typeface="Arial" pitchFamily="34" charset="-122"/>
-                <a:cs typeface="Arial" pitchFamily="34" charset="-120"/>
-              </a:rPr>
-              <a:t>Mark</a:t>
-            </a:r>
-            <a:endParaRPr lang="en-US" sz="2000" dirty="0"/>
-          </a:p>
-        </p:txBody>
-      </p:sp>
-      <p:sp>
-        <p:nvSpPr>
-          <p:cNvPr id="12" name="Text 8"/>
-          <p:cNvSpPr/>
-          <p:nvPr/>
-        </p:nvSpPr>
-        <p:spPr>
-          <a:xfrm>
-            <a:off x="7955280" y="4754880"/>
-            <a:ext cx="3931920" cy="640080"/>
-          </a:xfrm>
-          <a:prstGeom prst="rect">
-            <a:avLst/>
-          </a:prstGeom>
-          <a:noFill/>
-          <a:ln/>
-        </p:spPr>
-        <p:txBody>
-          <a:bodyPr wrap="square" lIns="0" tIns="0" rIns="0" bIns="0" rtlCol="0" anchor="t"/>
-          <a:lstStyle/>
-          <a:p>
-            <a:pPr algn="ctr" indent="0" marL="0">
-              <a:buNone/>
-            </a:pPr>
-            <a:r>
-              <a:rPr lang="en-US" sz="1100" dirty="0">
-                <a:solidFill>
-                  <a:srgbClr val="FFB91D"/>
-                </a:solidFill>
-                <a:latin typeface="Arial" pitchFamily="34" charset="0"/>
-                <a:ea typeface="Arial" pitchFamily="34" charset="-122"/>
-                <a:cs typeface="Arial" pitchFamily="34" charset="-120"/>
-              </a:rPr>
-              <a:t>Patient on active surveillance · PSA-AS cohort</a:t>
-            </a:r>
-            <a:endParaRPr lang="en-US" sz="1100" dirty="0"/>
-          </a:p>
-        </p:txBody>
-      </p:sp>
-      <p:sp>
-        <p:nvSpPr>
-          <p:cNvPr id="13" name="Text 9"/>
-          <p:cNvSpPr/>
-          <p:nvPr/>
-        </p:nvSpPr>
-        <p:spPr>
-          <a:xfrm>
-            <a:off x="457200" y="6473952"/>
-            <a:ext cx="3108960" cy="274320"/>
-          </a:xfrm>
-          <a:prstGeom prst="rect">
-            <a:avLst/>
-          </a:prstGeom>
-          <a:noFill/>
-          <a:ln/>
-        </p:spPr>
-        <p:txBody>
-          <a:bodyPr wrap="square" lIns="0" tIns="0" rIns="0" bIns="0" rtlCol="0" anchor="ctr"/>
-          <a:lstStyle/>
-          <a:p>
-            <a:pPr indent="0" marL="0">
-              <a:buNone/>
-            </a:pPr>
-            <a:r>
-              <a:rPr lang="en-US" sz="850" dirty="0">
-                <a:solidFill>
-                  <a:srgbClr val="7EC8E3"/>
-                </a:solidFill>
-                <a:latin typeface="Arial" pitchFamily="34" charset="0"/>
-                <a:ea typeface="Arial" pitchFamily="34" charset="-122"/>
-                <a:cs typeface="Arial" pitchFamily="34" charset="-120"/>
-              </a:rPr>
-              <a:t>HomeTest Operating Model  ·  Hearts and Minds</a:t>
-            </a:r>
-            <a:endParaRPr lang="en-US" sz="850" dirty="0"/>
-          </a:p>
-        </p:txBody>
-      </p:sp>
-      <p:sp>
-        <p:nvSpPr>
-          <p:cNvPr id="14" name="Text 10"/>
-          <p:cNvSpPr/>
-          <p:nvPr/>
-        </p:nvSpPr>
-        <p:spPr>
-          <a:xfrm>
-            <a:off x="3657600" y="6473952"/>
-            <a:ext cx="7528255" cy="274320"/>
-          </a:xfrm>
-          <a:prstGeom prst="rect">
-            <a:avLst/>
-          </a:prstGeom>
-          <a:noFill/>
-          <a:ln/>
-        </p:spPr>
-        <p:txBody>
-          <a:bodyPr wrap="square" lIns="0" tIns="0" rIns="0" bIns="0" rtlCol="0" anchor="ctr"/>
-          <a:lstStyle/>
-          <a:p>
             <a:pPr algn="r" indent="0" marL="0">
               <a:buNone/>
             </a:pPr>
             <a:r>
               <a:rPr lang="en-US" sz="800" dirty="0">
                 <a:solidFill>
-                  <a:srgbClr val="7EC8E3"/>
-                </a:solidFill>
-                <a:latin typeface="Arial" pitchFamily="34" charset="0"/>
-                <a:ea typeface="Arial" pitchFamily="34" charset="-122"/>
-                <a:cs typeface="Arial" pitchFamily="34" charset="-120"/>
+                  <a:srgbClr val="9FC2E8"/>
+                </a:solidFill>
+                <a:latin typeface="Segoe UI" pitchFamily="34" charset="0"/>
+                <a:ea typeface="Segoe UI" pitchFamily="34" charset="-122"/>
+                <a:cs typeface="Segoe UI" pitchFamily="34" charset="-120"/>
               </a:rPr>
               <a:t>Commercial positions are agreed in principle and remain subject to the live procurement.</a:t>
             </a:r>
@@ -2055,137 +2101,9 @@
           <a:chExt cx="0" cy="0"/>
         </a:xfrm>
       </p:grpSpPr>
-      <p:sp>
-        <p:nvSpPr>
-          <p:cNvPr id="2" name="Shape 0"/>
-          <p:cNvSpPr/>
-          <p:nvPr/>
-        </p:nvSpPr>
-        <p:spPr>
-          <a:xfrm>
-            <a:off x="0" y="0"/>
-            <a:ext cx="12191695" cy="868680"/>
-          </a:xfrm>
-          <a:prstGeom prst="rect">
-            <a:avLst/>
-          </a:prstGeom>
-          <a:solidFill>
-            <a:srgbClr val="003087"/>
-          </a:solidFill>
-          <a:ln w="12700">
-            <a:solidFill>
-              <a:srgbClr val="003087"/>
-            </a:solidFill>
-            <a:prstDash val="solid"/>
-          </a:ln>
-        </p:spPr>
-      </p:sp>
-      <p:sp>
-        <p:nvSpPr>
-          <p:cNvPr id="3" name="Shape 1"/>
-          <p:cNvSpPr/>
-          <p:nvPr/>
-        </p:nvSpPr>
-        <p:spPr>
-          <a:xfrm>
-            <a:off x="0" y="868680"/>
-            <a:ext cx="12191695" cy="54864"/>
-          </a:xfrm>
-          <a:prstGeom prst="rect">
-            <a:avLst/>
-          </a:prstGeom>
-          <a:solidFill>
-            <a:srgbClr val="FFB91D"/>
-          </a:solidFill>
-          <a:ln w="12700">
-            <a:solidFill>
-              <a:srgbClr val="FFB91D"/>
-            </a:solidFill>
-            <a:prstDash val="solid"/>
-          </a:ln>
-        </p:spPr>
-      </p:sp>
-      <p:sp>
-        <p:nvSpPr>
-          <p:cNvPr id="4" name="Text 2"/>
-          <p:cNvSpPr/>
-          <p:nvPr/>
-        </p:nvSpPr>
-        <p:spPr>
-          <a:xfrm>
-            <a:off x="457200" y="128016"/>
-            <a:ext cx="8686800" cy="256032"/>
-          </a:xfrm>
-          <a:prstGeom prst="rect">
-            <a:avLst/>
-          </a:prstGeom>
-          <a:noFill/>
-          <a:ln/>
-        </p:spPr>
-        <p:txBody>
-          <a:bodyPr wrap="square" lIns="0" tIns="0" rIns="0" bIns="0" rtlCol="0" anchor="ctr"/>
-          <a:lstStyle/>
-          <a:p>
-            <a:pPr indent="0" marL="0">
-              <a:buNone/>
-            </a:pPr>
-            <a:r>
-              <a:rPr lang="en-US" sz="950" b="1" spc="200" kern="0" dirty="0">
-                <a:solidFill>
-                  <a:srgbClr val="7EC8E3"/>
-                </a:solidFill>
-                <a:latin typeface="Arial" pitchFamily="34" charset="0"/>
-                <a:ea typeface="Arial" pitchFamily="34" charset="-122"/>
-                <a:cs typeface="Arial" pitchFamily="34" charset="-120"/>
-              </a:rPr>
-              <a:t>HEARTS AND MINDS  ·  PATIENT JOURNEY</a:t>
-            </a:r>
-            <a:endParaRPr lang="en-US" sz="950" dirty="0"/>
-          </a:p>
-        </p:txBody>
-      </p:sp>
-      <p:sp>
-        <p:nvSpPr>
-          <p:cNvPr id="5" name="Text 3"/>
-          <p:cNvSpPr/>
-          <p:nvPr/>
-        </p:nvSpPr>
-        <p:spPr>
-          <a:xfrm>
-            <a:off x="457200" y="384048"/>
-            <a:ext cx="9601200" cy="411480"/>
-          </a:xfrm>
-          <a:prstGeom prst="rect">
-            <a:avLst/>
-          </a:prstGeom>
-          <a:noFill/>
-          <a:ln/>
-        </p:spPr>
-        <p:txBody>
-          <a:bodyPr wrap="square" lIns="0" tIns="0" rIns="0" bIns="0" rtlCol="0" anchor="ctr"/>
-          <a:lstStyle/>
-          <a:p>
-            <a:pPr indent="0" marL="0">
-              <a:buNone/>
-            </a:pPr>
-            <a:r>
-              <a:rPr lang="en-US" sz="2000" b="1" dirty="0">
-                <a:solidFill>
-                  <a:srgbClr val="FFFFFF"/>
-                </a:solidFill>
-                <a:latin typeface="Arial" pitchFamily="34" charset="0"/>
-                <a:ea typeface="Arial" pitchFamily="34" charset="-122"/>
-                <a:cs typeface="Arial" pitchFamily="34" charset="-120"/>
-              </a:rPr>
-              <a:t>Mark's journey at a glance</a:t>
-            </a:r>
-            <a:endParaRPr lang="en-US" sz="2000" dirty="0"/>
-          </a:p>
-        </p:txBody>
-      </p:sp>
       <p:pic>
         <p:nvPicPr>
-          <p:cNvPr id="6" name="Image 0" descr="/sessions/quirky-zen-galileo/mnt/outputs/deckbuild/nhs_logo.png">    </p:cNvPr>
+          <p:cNvPr id="2" name="Image 0" descr="/sessions/quirky-zen-galileo/mnt/NHS/07 Sites &amp; Repos/dtx-ecosystem/hearts-and-minds/_generators/assets/bg-band.jpg">    </p:cNvPr>
           <p:cNvPicPr>
             <a:picLocks noChangeAspect="1"/>
           </p:cNvPicPr>
@@ -2199,8 +2117,8 @@
         </p:blipFill>
         <p:spPr>
           <a:xfrm>
-            <a:off x="10774375" y="201168"/>
-            <a:ext cx="960120" cy="393192"/>
+            <a:off x="0" y="0"/>
+            <a:ext cx="12191695" cy="932688"/>
           </a:xfrm>
           <a:prstGeom prst="rect">
             <a:avLst/>
@@ -2209,41 +2127,14 @@
       </p:pic>
       <p:sp>
         <p:nvSpPr>
-          <p:cNvPr id="7" name="Shape 4"/>
-          <p:cNvSpPr/>
-          <p:nvPr/>
-        </p:nvSpPr>
-        <p:spPr>
-          <a:xfrm>
-            <a:off x="457200" y="1234440"/>
-            <a:ext cx="2167677" cy="1234440"/>
-          </a:xfrm>
-          <a:prstGeom prst="roundRect">
-            <a:avLst>
-              <a:gd name="adj" fmla="val 5926"/>
-            </a:avLst>
-          </a:prstGeom>
-          <a:solidFill>
-            <a:srgbClr val="F0F4F5"/>
-          </a:solidFill>
-          <a:ln w="9525">
-            <a:solidFill>
-              <a:srgbClr val="DDE3E8"/>
-            </a:solidFill>
-            <a:prstDash val="solid"/>
-          </a:ln>
-        </p:spPr>
-      </p:sp>
-      <p:sp>
-        <p:nvSpPr>
-          <p:cNvPr id="8" name="Shape 5"/>
-          <p:cNvSpPr/>
-          <p:nvPr/>
-        </p:nvSpPr>
-        <p:spPr>
-          <a:xfrm>
-            <a:off x="457200" y="1234440"/>
-            <a:ext cx="2167677" cy="54864"/>
+          <p:cNvPr id="3" name="Shape 0"/>
+          <p:cNvSpPr/>
+          <p:nvPr/>
+        </p:nvSpPr>
+        <p:spPr>
+          <a:xfrm>
+            <a:off x="0" y="932688"/>
+            <a:ext cx="12191695" cy="50292"/>
           </a:xfrm>
           <a:prstGeom prst="rect">
             <a:avLst/>
@@ -2261,13 +2152,196 @@
       </p:sp>
       <p:sp>
         <p:nvSpPr>
-          <p:cNvPr id="9" name="Shape 6"/>
-          <p:cNvSpPr/>
-          <p:nvPr/>
-        </p:nvSpPr>
-        <p:spPr>
-          <a:xfrm>
-            <a:off x="585216" y="1417320"/>
+          <p:cNvPr id="4" name="Text 1"/>
+          <p:cNvSpPr/>
+          <p:nvPr/>
+        </p:nvSpPr>
+        <p:spPr>
+          <a:xfrm>
+            <a:off x="502920" y="137160"/>
+            <a:ext cx="8595360" cy="256032"/>
+          </a:xfrm>
+          <a:prstGeom prst="rect">
+            <a:avLst/>
+          </a:prstGeom>
+          <a:noFill/>
+          <a:ln/>
+        </p:spPr>
+        <p:txBody>
+          <a:bodyPr wrap="square" lIns="0" tIns="0" rIns="0" bIns="0" rtlCol="0" anchor="ctr"/>
+          <a:lstStyle/>
+          <a:p>
+            <a:pPr indent="0" marL="0">
+              <a:buNone/>
+            </a:pPr>
+            <a:r>
+              <a:rPr lang="en-US" sz="950" b="1" spc="240" kern="0" dirty="0">
+                <a:solidFill>
+                  <a:srgbClr val="FFD66B"/>
+                </a:solidFill>
+                <a:latin typeface="Segoe UI" pitchFamily="34" charset="0"/>
+                <a:ea typeface="Segoe UI" pitchFamily="34" charset="-122"/>
+                <a:cs typeface="Segoe UI" pitchFamily="34" charset="-120"/>
+              </a:rPr>
+              <a:t>HEARTS AND MINDS  ·  PATIENT JOURNEY</a:t>
+            </a:r>
+            <a:endParaRPr lang="en-US" sz="950" dirty="0"/>
+          </a:p>
+        </p:txBody>
+      </p:sp>
+      <p:sp>
+        <p:nvSpPr>
+          <p:cNvPr id="5" name="Text 2"/>
+          <p:cNvSpPr/>
+          <p:nvPr/>
+        </p:nvSpPr>
+        <p:spPr>
+          <a:xfrm>
+            <a:off x="502920" y="402336"/>
+            <a:ext cx="9509760" cy="457200"/>
+          </a:xfrm>
+          <a:prstGeom prst="rect">
+            <a:avLst/>
+          </a:prstGeom>
+          <a:noFill/>
+          <a:ln/>
+        </p:spPr>
+        <p:txBody>
+          <a:bodyPr wrap="square" lIns="0" tIns="0" rIns="0" bIns="0" rtlCol="0" anchor="ctr">
+            <a:normAutofit/>
+          </a:bodyPr>
+          <a:lstStyle/>
+          <a:p>
+            <a:pPr indent="0" marL="0">
+              <a:buNone/>
+            </a:pPr>
+            <a:r>
+              <a:rPr lang="en-US" sz="2100" b="1" dirty="0">
+                <a:solidFill>
+                  <a:srgbClr val="FFFFFF"/>
+                </a:solidFill>
+                <a:latin typeface="Segoe UI" pitchFamily="34" charset="0"/>
+                <a:ea typeface="Segoe UI" pitchFamily="34" charset="-122"/>
+                <a:cs typeface="Segoe UI" pitchFamily="34" charset="-120"/>
+              </a:rPr>
+              <a:t>Mark’s journey at a glance</a:t>
+            </a:r>
+            <a:endParaRPr lang="en-US" sz="2100" dirty="0"/>
+          </a:p>
+        </p:txBody>
+      </p:sp>
+      <p:sp>
+        <p:nvSpPr>
+          <p:cNvPr id="6" name="Shape 3"/>
+          <p:cNvSpPr/>
+          <p:nvPr/>
+        </p:nvSpPr>
+        <p:spPr>
+          <a:xfrm>
+            <a:off x="10942806" y="173736"/>
+            <a:ext cx="791689" cy="605699"/>
+          </a:xfrm>
+          <a:prstGeom prst="roundRect">
+            <a:avLst>
+              <a:gd name="adj" fmla="val 12077"/>
+            </a:avLst>
+          </a:prstGeom>
+          <a:solidFill>
+            <a:srgbClr val="FFFFFF"/>
+          </a:solidFill>
+          <a:ln w="12700">
+            <a:solidFill>
+              <a:srgbClr val="FFFFFF"/>
+            </a:solidFill>
+            <a:prstDash val="solid"/>
+          </a:ln>
+        </p:spPr>
+      </p:sp>
+      <p:pic>
+        <p:nvPicPr>
+          <p:cNvPr id="7" name="Image 1" descr="/sessions/quirky-zen-galileo/mnt/NHS/07 Sites &amp; Repos/dtx-ecosystem/hearts-and-minds/_generators/assets/nhs-logo.png">    </p:cNvPr>
+          <p:cNvPicPr>
+            <a:picLocks noChangeAspect="1"/>
+          </p:cNvPicPr>
+          <p:nvPr/>
+        </p:nvPicPr>
+        <p:blipFill>
+          <a:blip r:embed="rId2"/>
+          <a:stretch>
+            <a:fillRect/>
+          </a:stretch>
+        </p:blipFill>
+        <p:spPr>
+          <a:xfrm>
+            <a:off x="11068993" y="266273"/>
+            <a:ext cx="539315" cy="420624"/>
+          </a:xfrm>
+          <a:prstGeom prst="rect">
+            <a:avLst/>
+          </a:prstGeom>
+        </p:spPr>
+      </p:pic>
+      <p:sp>
+        <p:nvSpPr>
+          <p:cNvPr id="8" name="Shape 4"/>
+          <p:cNvSpPr/>
+          <p:nvPr/>
+        </p:nvSpPr>
+        <p:spPr>
+          <a:xfrm>
+            <a:off x="457200" y="1239012"/>
+            <a:ext cx="2167677" cy="1243584"/>
+          </a:xfrm>
+          <a:prstGeom prst="roundRect">
+            <a:avLst>
+              <a:gd name="adj" fmla="val 7353"/>
+            </a:avLst>
+          </a:prstGeom>
+          <a:solidFill>
+            <a:srgbClr val="F8FAFC"/>
+          </a:solidFill>
+          <a:ln w="9525">
+            <a:solidFill>
+              <a:srgbClr val="EBEEF1"/>
+            </a:solidFill>
+            <a:prstDash val="solid"/>
+          </a:ln>
+        </p:spPr>
+      </p:sp>
+      <p:sp>
+        <p:nvSpPr>
+          <p:cNvPr id="9" name="Shape 5"/>
+          <p:cNvSpPr/>
+          <p:nvPr/>
+        </p:nvSpPr>
+        <p:spPr>
+          <a:xfrm>
+            <a:off x="457200" y="1239012"/>
+            <a:ext cx="2167677" cy="64008"/>
+          </a:xfrm>
+          <a:prstGeom prst="rect">
+            <a:avLst/>
+          </a:prstGeom>
+          <a:solidFill>
+            <a:srgbClr val="FFB91D"/>
+          </a:solidFill>
+          <a:ln w="12700">
+            <a:solidFill>
+              <a:srgbClr val="FFB91D"/>
+            </a:solidFill>
+            <a:prstDash val="solid"/>
+          </a:ln>
+        </p:spPr>
+      </p:sp>
+      <p:sp>
+        <p:nvSpPr>
+          <p:cNvPr id="10" name="Shape 6"/>
+          <p:cNvSpPr/>
+          <p:nvPr/>
+        </p:nvSpPr>
+        <p:spPr>
+          <a:xfrm>
+            <a:off x="594360" y="1440180"/>
             <a:ext cx="347472" cy="347472"/>
           </a:xfrm>
           <a:prstGeom prst="ellipse">
@@ -2286,13 +2360,13 @@
       </p:sp>
       <p:sp>
         <p:nvSpPr>
-          <p:cNvPr id="10" name="Text 7"/>
-          <p:cNvSpPr/>
-          <p:nvPr/>
-        </p:nvSpPr>
-        <p:spPr>
-          <a:xfrm>
-            <a:off x="585216" y="1417320"/>
+          <p:cNvPr id="11" name="Text 7"/>
+          <p:cNvSpPr/>
+          <p:nvPr/>
+        </p:nvSpPr>
+        <p:spPr>
+          <a:xfrm>
+            <a:off x="594360" y="1440180"/>
             <a:ext cx="347472" cy="347472"/>
           </a:xfrm>
           <a:prstGeom prst="rect">
@@ -2313,9 +2387,9 @@
                 <a:solidFill>
                   <a:srgbClr val="FFFFFF"/>
                 </a:solidFill>
-                <a:latin typeface="Arial" pitchFamily="34" charset="0"/>
-                <a:ea typeface="Arial" pitchFamily="34" charset="-122"/>
-                <a:cs typeface="Arial" pitchFamily="34" charset="-120"/>
+                <a:latin typeface="Segoe UI" pitchFamily="34" charset="0"/>
+                <a:ea typeface="Segoe UI" pitchFamily="34" charset="-122"/>
+                <a:cs typeface="Segoe UI" pitchFamily="34" charset="-120"/>
               </a:rPr>
               <a:t>1</a:t>
             </a:r>
@@ -2325,14 +2399,14 @@
       </p:sp>
       <p:sp>
         <p:nvSpPr>
-          <p:cNvPr id="11" name="Text 8"/>
-          <p:cNvSpPr/>
-          <p:nvPr/>
-        </p:nvSpPr>
-        <p:spPr>
-          <a:xfrm>
-            <a:off x="1005840" y="1380744"/>
-            <a:ext cx="1527597" cy="420624"/>
+          <p:cNvPr id="12" name="Text 8"/>
+          <p:cNvSpPr/>
+          <p:nvPr/>
+        </p:nvSpPr>
+        <p:spPr>
+          <a:xfrm>
+            <a:off x="1005840" y="1403604"/>
+            <a:ext cx="1491021" cy="420624"/>
           </a:xfrm>
           <a:prstGeom prst="rect">
             <a:avLst/>
@@ -2354,9 +2428,9 @@
                 <a:solidFill>
                   <a:srgbClr val="003087"/>
                 </a:solidFill>
-                <a:latin typeface="Arial" pitchFamily="34" charset="0"/>
-                <a:ea typeface="Arial" pitchFamily="34" charset="-122"/>
-                <a:cs typeface="Arial" pitchFamily="34" charset="-120"/>
+                <a:latin typeface="Segoe UI" pitchFamily="34" charset="0"/>
+                <a:ea typeface="Segoe UI" pitchFamily="34" charset="-122"/>
+                <a:cs typeface="Segoe UI" pitchFamily="34" charset="-120"/>
               </a:rPr>
               <a:t>Stratification</a:t>
             </a:r>
@@ -2366,14 +2440,14 @@
       </p:sp>
       <p:sp>
         <p:nvSpPr>
-          <p:cNvPr id="12" name="Text 9"/>
-          <p:cNvSpPr/>
-          <p:nvPr/>
-        </p:nvSpPr>
-        <p:spPr>
-          <a:xfrm>
-            <a:off x="585216" y="1856232"/>
-            <a:ext cx="1911645" cy="539496"/>
+          <p:cNvPr id="13" name="Text 9"/>
+          <p:cNvSpPr/>
+          <p:nvPr/>
+        </p:nvSpPr>
+        <p:spPr>
+          <a:xfrm>
+            <a:off x="594360" y="1879092"/>
+            <a:ext cx="1893357" cy="493776"/>
           </a:xfrm>
           <a:prstGeom prst="rect">
             <a:avLst/>
@@ -2395,9 +2469,9 @@
                 <a:solidFill>
                   <a:srgbClr val="4C6272"/>
                 </a:solidFill>
-                <a:latin typeface="Arial" pitchFamily="34" charset="0"/>
-                <a:ea typeface="Arial" pitchFamily="34" charset="-122"/>
-                <a:cs typeface="Arial" pitchFamily="34" charset="-120"/>
+                <a:latin typeface="Segoe UI" pitchFamily="34" charset="0"/>
+                <a:ea typeface="Segoe UI" pitchFamily="34" charset="-122"/>
+                <a:cs typeface="Segoe UI" pitchFamily="34" charset="-120"/>
               </a:rPr>
               <a:t>the cohort eligible for active surveillance</a:t>
             </a:r>
@@ -2407,26 +2481,26 @@
       </p:sp>
       <p:sp>
         <p:nvSpPr>
-          <p:cNvPr id="13" name="Shape 10"/>
-          <p:cNvSpPr/>
-          <p:nvPr/>
-        </p:nvSpPr>
-        <p:spPr>
-          <a:xfrm>
-            <a:off x="2734605" y="1234440"/>
-            <a:ext cx="2167677" cy="1234440"/>
+          <p:cNvPr id="14" name="Shape 10"/>
+          <p:cNvSpPr/>
+          <p:nvPr/>
+        </p:nvSpPr>
+        <p:spPr>
+          <a:xfrm>
+            <a:off x="2734605" y="1239012"/>
+            <a:ext cx="2167677" cy="1243584"/>
           </a:xfrm>
           <a:prstGeom prst="roundRect">
             <a:avLst>
-              <a:gd name="adj" fmla="val 5926"/>
+              <a:gd name="adj" fmla="val 7353"/>
             </a:avLst>
           </a:prstGeom>
           <a:solidFill>
-            <a:srgbClr val="F0F4F5"/>
+            <a:srgbClr val="F8FAFC"/>
           </a:solidFill>
           <a:ln w="9525">
             <a:solidFill>
-              <a:srgbClr val="DDE3E8"/>
+              <a:srgbClr val="EBEEF1"/>
             </a:solidFill>
             <a:prstDash val="solid"/>
           </a:ln>
@@ -2434,14 +2508,14 @@
       </p:sp>
       <p:sp>
         <p:nvSpPr>
-          <p:cNvPr id="14" name="Shape 11"/>
-          <p:cNvSpPr/>
-          <p:nvPr/>
-        </p:nvSpPr>
-        <p:spPr>
-          <a:xfrm>
-            <a:off x="2734605" y="1234440"/>
-            <a:ext cx="2167677" cy="54864"/>
+          <p:cNvPr id="15" name="Shape 11"/>
+          <p:cNvSpPr/>
+          <p:nvPr/>
+        </p:nvSpPr>
+        <p:spPr>
+          <a:xfrm>
+            <a:off x="2734605" y="1239012"/>
+            <a:ext cx="2167677" cy="64008"/>
           </a:xfrm>
           <a:prstGeom prst="rect">
             <a:avLst/>
@@ -2459,13 +2533,13 @@
       </p:sp>
       <p:sp>
         <p:nvSpPr>
-          <p:cNvPr id="15" name="Shape 12"/>
-          <p:cNvSpPr/>
-          <p:nvPr/>
-        </p:nvSpPr>
-        <p:spPr>
-          <a:xfrm>
-            <a:off x="2862621" y="1417320"/>
+          <p:cNvPr id="16" name="Shape 12"/>
+          <p:cNvSpPr/>
+          <p:nvPr/>
+        </p:nvSpPr>
+        <p:spPr>
+          <a:xfrm>
+            <a:off x="2871765" y="1440180"/>
             <a:ext cx="347472" cy="347472"/>
           </a:xfrm>
           <a:prstGeom prst="ellipse">
@@ -2484,13 +2558,13 @@
       </p:sp>
       <p:sp>
         <p:nvSpPr>
-          <p:cNvPr id="16" name="Text 13"/>
-          <p:cNvSpPr/>
-          <p:nvPr/>
-        </p:nvSpPr>
-        <p:spPr>
-          <a:xfrm>
-            <a:off x="2862621" y="1417320"/>
+          <p:cNvPr id="17" name="Text 13"/>
+          <p:cNvSpPr/>
+          <p:nvPr/>
+        </p:nvSpPr>
+        <p:spPr>
+          <a:xfrm>
+            <a:off x="2871765" y="1440180"/>
             <a:ext cx="347472" cy="347472"/>
           </a:xfrm>
           <a:prstGeom prst="rect">
@@ -2511,9 +2585,9 @@
                 <a:solidFill>
                   <a:srgbClr val="FFFFFF"/>
                 </a:solidFill>
-                <a:latin typeface="Arial" pitchFamily="34" charset="0"/>
-                <a:ea typeface="Arial" pitchFamily="34" charset="-122"/>
-                <a:cs typeface="Arial" pitchFamily="34" charset="-120"/>
+                <a:latin typeface="Segoe UI" pitchFamily="34" charset="0"/>
+                <a:ea typeface="Segoe UI" pitchFamily="34" charset="-122"/>
+                <a:cs typeface="Segoe UI" pitchFamily="34" charset="-120"/>
               </a:rPr>
               <a:t>2</a:t>
             </a:r>
@@ -2523,14 +2597,14 @@
       </p:sp>
       <p:sp>
         <p:nvSpPr>
-          <p:cNvPr id="17" name="Text 14"/>
-          <p:cNvSpPr/>
-          <p:nvPr/>
-        </p:nvSpPr>
-        <p:spPr>
-          <a:xfrm>
-            <a:off x="3283245" y="1380744"/>
-            <a:ext cx="1527597" cy="420624"/>
+          <p:cNvPr id="18" name="Text 14"/>
+          <p:cNvSpPr/>
+          <p:nvPr/>
+        </p:nvSpPr>
+        <p:spPr>
+          <a:xfrm>
+            <a:off x="3283245" y="1403604"/>
+            <a:ext cx="1491021" cy="420624"/>
           </a:xfrm>
           <a:prstGeom prst="rect">
             <a:avLst/>
@@ -2552,9 +2626,9 @@
                 <a:solidFill>
                   <a:srgbClr val="003087"/>
                 </a:solidFill>
-                <a:latin typeface="Arial" pitchFamily="34" charset="0"/>
-                <a:ea typeface="Arial" pitchFamily="34" charset="-122"/>
-                <a:cs typeface="Arial" pitchFamily="34" charset="-120"/>
+                <a:latin typeface="Segoe UI" pitchFamily="34" charset="0"/>
+                <a:ea typeface="Segoe UI" pitchFamily="34" charset="-122"/>
+                <a:cs typeface="Segoe UI" pitchFamily="34" charset="-120"/>
               </a:rPr>
               <a:t>Identification</a:t>
             </a:r>
@@ -2564,14 +2638,14 @@
       </p:sp>
       <p:sp>
         <p:nvSpPr>
-          <p:cNvPr id="18" name="Text 15"/>
-          <p:cNvSpPr/>
-          <p:nvPr/>
-        </p:nvSpPr>
-        <p:spPr>
-          <a:xfrm>
-            <a:off x="2862621" y="1856232"/>
-            <a:ext cx="1911645" cy="539496"/>
+          <p:cNvPr id="19" name="Text 15"/>
+          <p:cNvSpPr/>
+          <p:nvPr/>
+        </p:nvSpPr>
+        <p:spPr>
+          <a:xfrm>
+            <a:off x="2871765" y="1879092"/>
+            <a:ext cx="1893357" cy="493776"/>
           </a:xfrm>
           <a:prstGeom prst="rect">
             <a:avLst/>
@@ -2593,9 +2667,9 @@
                 <a:solidFill>
                   <a:srgbClr val="4C6272"/>
                 </a:solidFill>
-                <a:latin typeface="Arial" pitchFamily="34" charset="0"/>
-                <a:ea typeface="Arial" pitchFamily="34" charset="-122"/>
-                <a:cs typeface="Arial" pitchFamily="34" charset="-120"/>
+                <a:latin typeface="Segoe UI" pitchFamily="34" charset="0"/>
+                <a:ea typeface="Segoe UI" pitchFamily="34" charset="-122"/>
+                <a:cs typeface="Segoe UI" pitchFamily="34" charset="-120"/>
               </a:rPr>
               <a:t>Adam's clinic shortlists him</a:t>
             </a:r>
@@ -2605,26 +2679,26 @@
       </p:sp>
       <p:sp>
         <p:nvSpPr>
-          <p:cNvPr id="19" name="Shape 16"/>
-          <p:cNvSpPr/>
-          <p:nvPr/>
-        </p:nvSpPr>
-        <p:spPr>
-          <a:xfrm>
-            <a:off x="5012009" y="1234440"/>
-            <a:ext cx="2167677" cy="1234440"/>
+          <p:cNvPr id="20" name="Shape 16"/>
+          <p:cNvSpPr/>
+          <p:nvPr/>
+        </p:nvSpPr>
+        <p:spPr>
+          <a:xfrm>
+            <a:off x="5012009" y="1239012"/>
+            <a:ext cx="2167677" cy="1243584"/>
           </a:xfrm>
           <a:prstGeom prst="roundRect">
             <a:avLst>
-              <a:gd name="adj" fmla="val 5926"/>
+              <a:gd name="adj" fmla="val 7353"/>
             </a:avLst>
           </a:prstGeom>
           <a:solidFill>
-            <a:srgbClr val="F0F4F5"/>
+            <a:srgbClr val="F8FAFC"/>
           </a:solidFill>
           <a:ln w="9525">
             <a:solidFill>
-              <a:srgbClr val="DDE3E8"/>
+              <a:srgbClr val="EBEEF1"/>
             </a:solidFill>
             <a:prstDash val="solid"/>
           </a:ln>
@@ -2632,14 +2706,14 @@
       </p:sp>
       <p:sp>
         <p:nvSpPr>
-          <p:cNvPr id="20" name="Shape 17"/>
-          <p:cNvSpPr/>
-          <p:nvPr/>
-        </p:nvSpPr>
-        <p:spPr>
-          <a:xfrm>
-            <a:off x="5012009" y="1234440"/>
-            <a:ext cx="2167677" cy="54864"/>
+          <p:cNvPr id="21" name="Shape 17"/>
+          <p:cNvSpPr/>
+          <p:nvPr/>
+        </p:nvSpPr>
+        <p:spPr>
+          <a:xfrm>
+            <a:off x="5012009" y="1239012"/>
+            <a:ext cx="2167677" cy="64008"/>
           </a:xfrm>
           <a:prstGeom prst="rect">
             <a:avLst/>
@@ -2657,13 +2731,13 @@
       </p:sp>
       <p:sp>
         <p:nvSpPr>
-          <p:cNvPr id="21" name="Shape 18"/>
-          <p:cNvSpPr/>
-          <p:nvPr/>
-        </p:nvSpPr>
-        <p:spPr>
-          <a:xfrm>
-            <a:off x="5140025" y="1417320"/>
+          <p:cNvPr id="22" name="Shape 18"/>
+          <p:cNvSpPr/>
+          <p:nvPr/>
+        </p:nvSpPr>
+        <p:spPr>
+          <a:xfrm>
+            <a:off x="5149169" y="1440180"/>
             <a:ext cx="347472" cy="347472"/>
           </a:xfrm>
           <a:prstGeom prst="ellipse">
@@ -2682,13 +2756,13 @@
       </p:sp>
       <p:sp>
         <p:nvSpPr>
-          <p:cNvPr id="22" name="Text 19"/>
-          <p:cNvSpPr/>
-          <p:nvPr/>
-        </p:nvSpPr>
-        <p:spPr>
-          <a:xfrm>
-            <a:off x="5140025" y="1417320"/>
+          <p:cNvPr id="23" name="Text 19"/>
+          <p:cNvSpPr/>
+          <p:nvPr/>
+        </p:nvSpPr>
+        <p:spPr>
+          <a:xfrm>
+            <a:off x="5149169" y="1440180"/>
             <a:ext cx="347472" cy="347472"/>
           </a:xfrm>
           <a:prstGeom prst="rect">
@@ -2709,9 +2783,9 @@
                 <a:solidFill>
                   <a:srgbClr val="FFFFFF"/>
                 </a:solidFill>
-                <a:latin typeface="Arial" pitchFamily="34" charset="0"/>
-                <a:ea typeface="Arial" pitchFamily="34" charset="-122"/>
-                <a:cs typeface="Arial" pitchFamily="34" charset="-120"/>
+                <a:latin typeface="Segoe UI" pitchFamily="34" charset="0"/>
+                <a:ea typeface="Segoe UI" pitchFamily="34" charset="-122"/>
+                <a:cs typeface="Segoe UI" pitchFamily="34" charset="-120"/>
               </a:rPr>
               <a:t>3</a:t>
             </a:r>
@@ -2721,14 +2795,14 @@
       </p:sp>
       <p:sp>
         <p:nvSpPr>
-          <p:cNvPr id="23" name="Text 20"/>
-          <p:cNvSpPr/>
-          <p:nvPr/>
-        </p:nvSpPr>
-        <p:spPr>
-          <a:xfrm>
-            <a:off x="5560649" y="1380744"/>
-            <a:ext cx="1527597" cy="420624"/>
+          <p:cNvPr id="24" name="Text 20"/>
+          <p:cNvSpPr/>
+          <p:nvPr/>
+        </p:nvSpPr>
+        <p:spPr>
+          <a:xfrm>
+            <a:off x="5560649" y="1403604"/>
+            <a:ext cx="1491021" cy="420624"/>
           </a:xfrm>
           <a:prstGeom prst="rect">
             <a:avLst/>
@@ -2750,9 +2824,9 @@
                 <a:solidFill>
                   <a:srgbClr val="003087"/>
                 </a:solidFill>
-                <a:latin typeface="Arial" pitchFamily="34" charset="0"/>
-                <a:ea typeface="Arial" pitchFamily="34" charset="-122"/>
-                <a:cs typeface="Arial" pitchFamily="34" charset="-120"/>
+                <a:latin typeface="Segoe UI" pitchFamily="34" charset="0"/>
+                <a:ea typeface="Segoe UI" pitchFamily="34" charset="-122"/>
+                <a:cs typeface="Segoe UI" pitchFamily="34" charset="-120"/>
               </a:rPr>
               <a:t>Diagnosis</a:t>
             </a:r>
@@ -2762,14 +2836,14 @@
       </p:sp>
       <p:sp>
         <p:nvSpPr>
-          <p:cNvPr id="24" name="Text 21"/>
-          <p:cNvSpPr/>
-          <p:nvPr/>
-        </p:nvSpPr>
-        <p:spPr>
-          <a:xfrm>
-            <a:off x="5140025" y="1856232"/>
-            <a:ext cx="1911645" cy="539496"/>
+          <p:cNvPr id="25" name="Text 21"/>
+          <p:cNvSpPr/>
+          <p:nvPr/>
+        </p:nvSpPr>
+        <p:spPr>
+          <a:xfrm>
+            <a:off x="5149169" y="1879092"/>
+            <a:ext cx="1893357" cy="493776"/>
           </a:xfrm>
           <a:prstGeom prst="rect">
             <a:avLst/>
@@ -2791,9 +2865,9 @@
                 <a:solidFill>
                   <a:srgbClr val="4C6272"/>
                 </a:solidFill>
-                <a:latin typeface="Arial" pitchFamily="34" charset="0"/>
-                <a:ea typeface="Arial" pitchFamily="34" charset="-122"/>
-                <a:cs typeface="Arial" pitchFamily="34" charset="-120"/>
+                <a:latin typeface="Segoe UI" pitchFamily="34" charset="0"/>
+                <a:ea typeface="Segoe UI" pitchFamily="34" charset="-122"/>
+                <a:cs typeface="Segoe UI" pitchFamily="34" charset="-120"/>
               </a:rPr>
               <a:t>kit out, sample back, result to the consultant first</a:t>
             </a:r>
@@ -2803,26 +2877,26 @@
       </p:sp>
       <p:sp>
         <p:nvSpPr>
-          <p:cNvPr id="25" name="Shape 22"/>
-          <p:cNvSpPr/>
-          <p:nvPr/>
-        </p:nvSpPr>
-        <p:spPr>
-          <a:xfrm>
-            <a:off x="7289414" y="1234440"/>
-            <a:ext cx="2167677" cy="1234440"/>
+          <p:cNvPr id="26" name="Shape 22"/>
+          <p:cNvSpPr/>
+          <p:nvPr/>
+        </p:nvSpPr>
+        <p:spPr>
+          <a:xfrm>
+            <a:off x="7289414" y="1239012"/>
+            <a:ext cx="2167677" cy="1243584"/>
           </a:xfrm>
           <a:prstGeom prst="roundRect">
             <a:avLst>
-              <a:gd name="adj" fmla="val 5926"/>
+              <a:gd name="adj" fmla="val 7353"/>
             </a:avLst>
           </a:prstGeom>
           <a:solidFill>
-            <a:srgbClr val="F0F4F5"/>
+            <a:srgbClr val="F8FAFC"/>
           </a:solidFill>
           <a:ln w="9525">
             <a:solidFill>
-              <a:srgbClr val="DDE3E8"/>
+              <a:srgbClr val="EBEEF1"/>
             </a:solidFill>
             <a:prstDash val="solid"/>
           </a:ln>
@@ -2830,14 +2904,14 @@
       </p:sp>
       <p:sp>
         <p:nvSpPr>
-          <p:cNvPr id="26" name="Shape 23"/>
-          <p:cNvSpPr/>
-          <p:nvPr/>
-        </p:nvSpPr>
-        <p:spPr>
-          <a:xfrm>
-            <a:off x="7289414" y="1234440"/>
-            <a:ext cx="2167677" cy="54864"/>
+          <p:cNvPr id="27" name="Shape 23"/>
+          <p:cNvSpPr/>
+          <p:nvPr/>
+        </p:nvSpPr>
+        <p:spPr>
+          <a:xfrm>
+            <a:off x="7289414" y="1239012"/>
+            <a:ext cx="2167677" cy="64008"/>
           </a:xfrm>
           <a:prstGeom prst="rect">
             <a:avLst/>
@@ -2855,13 +2929,13 @@
       </p:sp>
       <p:sp>
         <p:nvSpPr>
-          <p:cNvPr id="27" name="Shape 24"/>
-          <p:cNvSpPr/>
-          <p:nvPr/>
-        </p:nvSpPr>
-        <p:spPr>
-          <a:xfrm>
-            <a:off x="7417430" y="1417320"/>
+          <p:cNvPr id="28" name="Shape 24"/>
+          <p:cNvSpPr/>
+          <p:nvPr/>
+        </p:nvSpPr>
+        <p:spPr>
+          <a:xfrm>
+            <a:off x="7426574" y="1440180"/>
             <a:ext cx="347472" cy="347472"/>
           </a:xfrm>
           <a:prstGeom prst="ellipse">
@@ -2880,13 +2954,13 @@
       </p:sp>
       <p:sp>
         <p:nvSpPr>
-          <p:cNvPr id="28" name="Text 25"/>
-          <p:cNvSpPr/>
-          <p:nvPr/>
-        </p:nvSpPr>
-        <p:spPr>
-          <a:xfrm>
-            <a:off x="7417430" y="1417320"/>
+          <p:cNvPr id="29" name="Text 25"/>
+          <p:cNvSpPr/>
+          <p:nvPr/>
+        </p:nvSpPr>
+        <p:spPr>
+          <a:xfrm>
+            <a:off x="7426574" y="1440180"/>
             <a:ext cx="347472" cy="347472"/>
           </a:xfrm>
           <a:prstGeom prst="rect">
@@ -2907,9 +2981,9 @@
                 <a:solidFill>
                   <a:srgbClr val="FFFFFF"/>
                 </a:solidFill>
-                <a:latin typeface="Arial" pitchFamily="34" charset="0"/>
-                <a:ea typeface="Arial" pitchFamily="34" charset="-122"/>
-                <a:cs typeface="Arial" pitchFamily="34" charset="-120"/>
+                <a:latin typeface="Segoe UI" pitchFamily="34" charset="0"/>
+                <a:ea typeface="Segoe UI" pitchFamily="34" charset="-122"/>
+                <a:cs typeface="Segoe UI" pitchFamily="34" charset="-120"/>
               </a:rPr>
               <a:t>4</a:t>
             </a:r>
@@ -2919,14 +2993,14 @@
       </p:sp>
       <p:sp>
         <p:nvSpPr>
-          <p:cNvPr id="29" name="Text 26"/>
-          <p:cNvSpPr/>
-          <p:nvPr/>
-        </p:nvSpPr>
-        <p:spPr>
-          <a:xfrm>
-            <a:off x="7838054" y="1380744"/>
-            <a:ext cx="1527597" cy="420624"/>
+          <p:cNvPr id="30" name="Text 26"/>
+          <p:cNvSpPr/>
+          <p:nvPr/>
+        </p:nvSpPr>
+        <p:spPr>
+          <a:xfrm>
+            <a:off x="7838054" y="1403604"/>
+            <a:ext cx="1491021" cy="420624"/>
           </a:xfrm>
           <a:prstGeom prst="rect">
             <a:avLst/>
@@ -2948,9 +3022,9 @@
                 <a:solidFill>
                   <a:srgbClr val="003087"/>
                 </a:solidFill>
-                <a:latin typeface="Arial" pitchFamily="34" charset="0"/>
-                <a:ea typeface="Arial" pitchFamily="34" charset="-122"/>
-                <a:cs typeface="Arial" pitchFamily="34" charset="-120"/>
+                <a:latin typeface="Segoe UI" pitchFamily="34" charset="0"/>
+                <a:ea typeface="Segoe UI" pitchFamily="34" charset="-122"/>
+                <a:cs typeface="Segoe UI" pitchFamily="34" charset="-120"/>
               </a:rPr>
               <a:t>Treatment</a:t>
             </a:r>
@@ -2960,14 +3034,14 @@
       </p:sp>
       <p:sp>
         <p:nvSpPr>
-          <p:cNvPr id="30" name="Text 27"/>
-          <p:cNvSpPr/>
-          <p:nvPr/>
-        </p:nvSpPr>
-        <p:spPr>
-          <a:xfrm>
-            <a:off x="7417430" y="1856232"/>
-            <a:ext cx="1911645" cy="539496"/>
+          <p:cNvPr id="31" name="Text 27"/>
+          <p:cNvSpPr/>
+          <p:nvPr/>
+        </p:nvSpPr>
+        <p:spPr>
+          <a:xfrm>
+            <a:off x="7426574" y="1879092"/>
+            <a:ext cx="1893357" cy="493776"/>
           </a:xfrm>
           <a:prstGeom prst="rect">
             <a:avLst/>
@@ -2989,9 +3063,9 @@
                 <a:solidFill>
                   <a:srgbClr val="4C6272"/>
                 </a:solidFill>
-                <a:latin typeface="Arial" pitchFamily="34" charset="0"/>
-                <a:ea typeface="Arial" pitchFamily="34" charset="-122"/>
-                <a:cs typeface="Arial" pitchFamily="34" charset="-120"/>
+                <a:latin typeface="Segoe UI" pitchFamily="34" charset="0"/>
+                <a:ea typeface="Segoe UI" pitchFamily="34" charset="-122"/>
+                <a:cs typeface="Segoe UI" pitchFamily="34" charset="-120"/>
               </a:rPr>
               <a:t>the surveillance itself</a:t>
             </a:r>
@@ -3001,26 +3075,26 @@
       </p:sp>
       <p:sp>
         <p:nvSpPr>
-          <p:cNvPr id="31" name="Shape 28"/>
-          <p:cNvSpPr/>
-          <p:nvPr/>
-        </p:nvSpPr>
-        <p:spPr>
-          <a:xfrm>
-            <a:off x="9566819" y="1234440"/>
-            <a:ext cx="2167677" cy="1234440"/>
+          <p:cNvPr id="32" name="Shape 28"/>
+          <p:cNvSpPr/>
+          <p:nvPr/>
+        </p:nvSpPr>
+        <p:spPr>
+          <a:xfrm>
+            <a:off x="9566819" y="1239012"/>
+            <a:ext cx="2167677" cy="1243584"/>
           </a:xfrm>
           <a:prstGeom prst="roundRect">
             <a:avLst>
-              <a:gd name="adj" fmla="val 5926"/>
+              <a:gd name="adj" fmla="val 7353"/>
             </a:avLst>
           </a:prstGeom>
           <a:solidFill>
-            <a:srgbClr val="F0F4F5"/>
+            <a:srgbClr val="F8FAFC"/>
           </a:solidFill>
           <a:ln w="9525">
             <a:solidFill>
-              <a:srgbClr val="DDE3E8"/>
+              <a:srgbClr val="EBEEF1"/>
             </a:solidFill>
             <a:prstDash val="solid"/>
           </a:ln>
@@ -3028,14 +3102,14 @@
       </p:sp>
       <p:sp>
         <p:nvSpPr>
-          <p:cNvPr id="32" name="Shape 29"/>
-          <p:cNvSpPr/>
-          <p:nvPr/>
-        </p:nvSpPr>
-        <p:spPr>
-          <a:xfrm>
-            <a:off x="9566819" y="1234440"/>
-            <a:ext cx="2167677" cy="54864"/>
+          <p:cNvPr id="33" name="Shape 29"/>
+          <p:cNvSpPr/>
+          <p:nvPr/>
+        </p:nvSpPr>
+        <p:spPr>
+          <a:xfrm>
+            <a:off x="9566819" y="1239012"/>
+            <a:ext cx="2167677" cy="64008"/>
           </a:xfrm>
           <a:prstGeom prst="rect">
             <a:avLst/>
@@ -3053,13 +3127,13 @@
       </p:sp>
       <p:sp>
         <p:nvSpPr>
-          <p:cNvPr id="33" name="Shape 30"/>
-          <p:cNvSpPr/>
-          <p:nvPr/>
-        </p:nvSpPr>
-        <p:spPr>
-          <a:xfrm>
-            <a:off x="9694835" y="1417320"/>
+          <p:cNvPr id="34" name="Shape 30"/>
+          <p:cNvSpPr/>
+          <p:nvPr/>
+        </p:nvSpPr>
+        <p:spPr>
+          <a:xfrm>
+            <a:off x="9703979" y="1440180"/>
             <a:ext cx="347472" cy="347472"/>
           </a:xfrm>
           <a:prstGeom prst="ellipse">
@@ -3078,13 +3152,13 @@
       </p:sp>
       <p:sp>
         <p:nvSpPr>
-          <p:cNvPr id="34" name="Text 31"/>
-          <p:cNvSpPr/>
-          <p:nvPr/>
-        </p:nvSpPr>
-        <p:spPr>
-          <a:xfrm>
-            <a:off x="9694835" y="1417320"/>
+          <p:cNvPr id="35" name="Text 31"/>
+          <p:cNvSpPr/>
+          <p:nvPr/>
+        </p:nvSpPr>
+        <p:spPr>
+          <a:xfrm>
+            <a:off x="9703979" y="1440180"/>
             <a:ext cx="347472" cy="347472"/>
           </a:xfrm>
           <a:prstGeom prst="rect">
@@ -3105,9 +3179,9 @@
                 <a:solidFill>
                   <a:srgbClr val="FFFFFF"/>
                 </a:solidFill>
-                <a:latin typeface="Arial" pitchFamily="34" charset="0"/>
-                <a:ea typeface="Arial" pitchFamily="34" charset="-122"/>
-                <a:cs typeface="Arial" pitchFamily="34" charset="-120"/>
+                <a:latin typeface="Segoe UI" pitchFamily="34" charset="0"/>
+                <a:ea typeface="Segoe UI" pitchFamily="34" charset="-122"/>
+                <a:cs typeface="Segoe UI" pitchFamily="34" charset="-120"/>
               </a:rPr>
               <a:t>5</a:t>
             </a:r>
@@ -3117,14 +3191,14 @@
       </p:sp>
       <p:sp>
         <p:nvSpPr>
-          <p:cNvPr id="35" name="Text 32"/>
-          <p:cNvSpPr/>
-          <p:nvPr/>
-        </p:nvSpPr>
-        <p:spPr>
-          <a:xfrm>
-            <a:off x="10115459" y="1380744"/>
-            <a:ext cx="1527597" cy="420624"/>
+          <p:cNvPr id="36" name="Text 32"/>
+          <p:cNvSpPr/>
+          <p:nvPr/>
+        </p:nvSpPr>
+        <p:spPr>
+          <a:xfrm>
+            <a:off x="10115459" y="1403604"/>
+            <a:ext cx="1491021" cy="420624"/>
           </a:xfrm>
           <a:prstGeom prst="rect">
             <a:avLst/>
@@ -3146,9 +3220,9 @@
                 <a:solidFill>
                   <a:srgbClr val="003087"/>
                 </a:solidFill>
-                <a:latin typeface="Arial" pitchFamily="34" charset="0"/>
-                <a:ea typeface="Arial" pitchFamily="34" charset="-122"/>
-                <a:cs typeface="Arial" pitchFamily="34" charset="-120"/>
+                <a:latin typeface="Segoe UI" pitchFamily="34" charset="0"/>
+                <a:ea typeface="Segoe UI" pitchFamily="34" charset="-122"/>
+                <a:cs typeface="Segoe UI" pitchFamily="34" charset="-120"/>
               </a:rPr>
               <a:t>Long-term optimisation</a:t>
             </a:r>
@@ -3158,14 +3232,14 @@
       </p:sp>
       <p:sp>
         <p:nvSpPr>
-          <p:cNvPr id="36" name="Text 33"/>
-          <p:cNvSpPr/>
-          <p:nvPr/>
-        </p:nvSpPr>
-        <p:spPr>
-          <a:xfrm>
-            <a:off x="9694835" y="1856232"/>
-            <a:ext cx="1911645" cy="539496"/>
+          <p:cNvPr id="37" name="Text 33"/>
+          <p:cNvSpPr/>
+          <p:nvPr/>
+        </p:nvSpPr>
+        <p:spPr>
+          <a:xfrm>
+            <a:off x="9703979" y="1879092"/>
+            <a:ext cx="1893357" cy="493776"/>
           </a:xfrm>
           <a:prstGeom prst="rect">
             <a:avLst/>
@@ -3187,9 +3261,9 @@
                 <a:solidFill>
                   <a:srgbClr val="4C6272"/>
                 </a:solidFill>
-                <a:latin typeface="Arial" pitchFamily="34" charset="0"/>
-                <a:ea typeface="Arial" pitchFamily="34" charset="-122"/>
-                <a:cs typeface="Arial" pitchFamily="34" charset="-120"/>
+                <a:latin typeface="Segoe UI" pitchFamily="34" charset="0"/>
+                <a:ea typeface="Segoe UI" pitchFamily="34" charset="-122"/>
+                <a:cs typeface="Segoe UI" pitchFamily="34" charset="-120"/>
               </a:rPr>
               <a:t>the surveillance that keeps him in surveillance</a:t>
             </a:r>
@@ -3199,22 +3273,22 @@
       </p:sp>
       <p:sp>
         <p:nvSpPr>
-          <p:cNvPr id="37" name="Shape 34"/>
-          <p:cNvSpPr/>
-          <p:nvPr/>
-        </p:nvSpPr>
-        <p:spPr>
-          <a:xfrm>
-            <a:off x="457200" y="2788920"/>
-            <a:ext cx="5501488" cy="3520440"/>
+          <p:cNvPr id="38" name="Shape 34"/>
+          <p:cNvSpPr/>
+          <p:nvPr/>
+        </p:nvSpPr>
+        <p:spPr>
+          <a:xfrm>
+            <a:off x="457200" y="2793492"/>
+            <a:ext cx="5501488" cy="1915160"/>
           </a:xfrm>
           <a:prstGeom prst="roundRect">
             <a:avLst>
-              <a:gd name="adj" fmla="val 2597"/>
+              <a:gd name="adj" fmla="val 4775"/>
             </a:avLst>
           </a:prstGeom>
           <a:solidFill>
-            <a:srgbClr val="D5E8F0"/>
+            <a:srgbClr val="F4F8FC"/>
           </a:solidFill>
           <a:ln w="9525">
             <a:solidFill>
@@ -3226,14 +3300,14 @@
       </p:sp>
       <p:sp>
         <p:nvSpPr>
-          <p:cNvPr id="38" name="Text 35"/>
-          <p:cNvSpPr/>
-          <p:nvPr/>
-        </p:nvSpPr>
-        <p:spPr>
-          <a:xfrm>
-            <a:off x="685800" y="2953512"/>
-            <a:ext cx="5044288" cy="256032"/>
+          <p:cNvPr id="39" name="Text 35"/>
+          <p:cNvSpPr/>
+          <p:nvPr/>
+        </p:nvSpPr>
+        <p:spPr>
+          <a:xfrm>
+            <a:off x="676656" y="2976372"/>
+            <a:ext cx="5062576" cy="237744"/>
           </a:xfrm>
           <a:prstGeom prst="rect">
             <a:avLst/>
@@ -3249,30 +3323,30 @@
               <a:buNone/>
             </a:pPr>
             <a:r>
-              <a:rPr lang="en-US" sz="900" b="1" spc="150" kern="0" dirty="0">
+              <a:rPr lang="en-US" sz="850" b="1" spc="160" kern="0" dirty="0">
                 <a:solidFill>
                   <a:srgbClr val="005EB8"/>
                 </a:solidFill>
-                <a:latin typeface="Arial" pitchFamily="34" charset="0"/>
-                <a:ea typeface="Arial" pitchFamily="34" charset="-122"/>
-                <a:cs typeface="Arial" pitchFamily="34" charset="-120"/>
+                <a:latin typeface="Segoe UI" pitchFamily="34" charset="0"/>
+                <a:ea typeface="Segoe UI" pitchFamily="34" charset="-122"/>
+                <a:cs typeface="Segoe UI" pitchFamily="34" charset="-120"/>
               </a:rPr>
               <a:t>THE PATIENT NORTH STAR</a:t>
             </a:r>
-            <a:endParaRPr lang="en-US" sz="900" dirty="0"/>
-          </a:p>
-        </p:txBody>
-      </p:sp>
-      <p:sp>
-        <p:nvSpPr>
-          <p:cNvPr id="39" name="Text 36"/>
-          <p:cNvSpPr/>
-          <p:nvPr/>
-        </p:nvSpPr>
-        <p:spPr>
-          <a:xfrm>
-            <a:off x="685800" y="3227832"/>
-            <a:ext cx="5044288" cy="685800"/>
+            <a:endParaRPr lang="en-US" sz="850" dirty="0"/>
+          </a:p>
+        </p:txBody>
+      </p:sp>
+      <p:sp>
+        <p:nvSpPr>
+          <p:cNvPr id="40" name="Text 36"/>
+          <p:cNvSpPr/>
+          <p:nvPr/>
+        </p:nvSpPr>
+        <p:spPr>
+          <a:xfrm>
+            <a:off x="676656" y="3250692"/>
+            <a:ext cx="5062576" cy="527304"/>
           </a:xfrm>
           <a:prstGeom prst="rect">
             <a:avLst/>
@@ -3294,9 +3368,9 @@
                 <a:solidFill>
                   <a:srgbClr val="003087"/>
                 </a:solidFill>
-                <a:latin typeface="Arial" pitchFamily="34" charset="0"/>
-                <a:ea typeface="Arial" pitchFamily="34" charset="-122"/>
-                <a:cs typeface="Arial" pitchFamily="34" charset="-120"/>
+                <a:latin typeface="Segoe UI" pitchFamily="34" charset="0"/>
+                <a:ea typeface="Segoe UI" pitchFamily="34" charset="-122"/>
+                <a:cs typeface="Segoe UI" pitchFamily="34" charset="-120"/>
               </a:rPr>
               <a:t>His consultant still holds the cohort. The quarterly visit just does not need to be in clinic.</a:t>
             </a:r>
@@ -3306,14 +3380,14 @@
       </p:sp>
       <p:sp>
         <p:nvSpPr>
-          <p:cNvPr id="40" name="Text 37"/>
-          <p:cNvSpPr/>
-          <p:nvPr/>
-        </p:nvSpPr>
-        <p:spPr>
-          <a:xfrm>
-            <a:off x="685800" y="3959352"/>
-            <a:ext cx="5044288" cy="2194560"/>
+          <p:cNvPr id="41" name="Text 37"/>
+          <p:cNvSpPr/>
+          <p:nvPr/>
+        </p:nvSpPr>
+        <p:spPr>
+          <a:xfrm>
+            <a:off x="676656" y="3851148"/>
+            <a:ext cx="5062576" cy="674624"/>
           </a:xfrm>
           <a:prstGeom prst="rect">
             <a:avLst/>
@@ -3331,13 +3405,13 @@
               <a:buNone/>
             </a:pPr>
             <a:r>
-              <a:rPr lang="en-US" sz="1100" dirty="0">
-                <a:solidFill>
-                  <a:srgbClr val="231F20"/>
-                </a:solidFill>
-                <a:latin typeface="Arial" pitchFamily="34" charset="0"/>
-                <a:ea typeface="Arial" pitchFamily="34" charset="-122"/>
-                <a:cs typeface="Arial" pitchFamily="34" charset="-120"/>
+              <a:rPr lang="en-US" sz="1050" dirty="0">
+                <a:solidFill>
+                  <a:srgbClr val="212B32"/>
+                </a:solidFill>
+                <a:latin typeface="Segoe UI" pitchFamily="34" charset="0"/>
+                <a:ea typeface="Segoe UI" pitchFamily="34" charset="-122"/>
+                <a:cs typeface="Segoe UI" pitchFamily="34" charset="-120"/>
               </a:rPr>
               <a:t>Mark trusts Adam. The active-surveillance cohort works because the clinician is reading the trend. </a:t>
             </a:r>
@@ -3345,38 +3419,38 @@
               <a:buNone/>
             </a:pPr>
             <a:r>
-              <a:rPr lang="en-US" sz="1100" b="1" dirty="0">
-                <a:solidFill>
-                  <a:srgbClr val="231F20"/>
-                </a:solidFill>
-                <a:latin typeface="Arial" pitchFamily="34" charset="0"/>
-                <a:ea typeface="Arial" pitchFamily="34" charset="-122"/>
-                <a:cs typeface="Arial" pitchFamily="34" charset="-120"/>
+              <a:rPr lang="en-US" sz="1050" b="1" dirty="0">
+                <a:solidFill>
+                  <a:srgbClr val="212B32"/>
+                </a:solidFill>
+                <a:latin typeface="Segoe UI" pitchFamily="34" charset="0"/>
+                <a:ea typeface="Segoe UI" pitchFamily="34" charset="-122"/>
+                <a:cs typeface="Segoe UI" pitchFamily="34" charset="-120"/>
               </a:rPr>
               <a:t>The home pathway preserves the clinical role and removes the clinic visit that did nothing but draw the blood.</a:t>
             </a:r>
-            <a:endParaRPr lang="en-US" sz="1100" dirty="0"/>
-          </a:p>
-        </p:txBody>
-      </p:sp>
-      <p:sp>
-        <p:nvSpPr>
-          <p:cNvPr id="41" name="Shape 38"/>
-          <p:cNvSpPr/>
-          <p:nvPr/>
-        </p:nvSpPr>
-        <p:spPr>
-          <a:xfrm>
-            <a:off x="6233008" y="2788920"/>
-            <a:ext cx="5501488" cy="3520440"/>
+            <a:endParaRPr lang="en-US" sz="1050" dirty="0"/>
+          </a:p>
+        </p:txBody>
+      </p:sp>
+      <p:sp>
+        <p:nvSpPr>
+          <p:cNvPr id="42" name="Shape 38"/>
+          <p:cNvSpPr/>
+          <p:nvPr/>
+        </p:nvSpPr>
+        <p:spPr>
+          <a:xfrm>
+            <a:off x="6233008" y="2793492"/>
+            <a:ext cx="5501488" cy="1915160"/>
           </a:xfrm>
           <a:prstGeom prst="roundRect">
             <a:avLst>
-              <a:gd name="adj" fmla="val 2597"/>
+              <a:gd name="adj" fmla="val 4775"/>
             </a:avLst>
           </a:prstGeom>
           <a:solidFill>
-            <a:srgbClr val="FFF3CD"/>
+            <a:srgbClr val="FFF9EC"/>
           </a:solidFill>
           <a:ln w="9525">
             <a:solidFill>
@@ -3388,14 +3462,14 @@
       </p:sp>
       <p:sp>
         <p:nvSpPr>
-          <p:cNvPr id="42" name="Text 39"/>
-          <p:cNvSpPr/>
-          <p:nvPr/>
-        </p:nvSpPr>
-        <p:spPr>
-          <a:xfrm>
-            <a:off x="6461608" y="2953512"/>
-            <a:ext cx="5044288" cy="256032"/>
+          <p:cNvPr id="43" name="Text 39"/>
+          <p:cNvSpPr/>
+          <p:nvPr/>
+        </p:nvSpPr>
+        <p:spPr>
+          <a:xfrm>
+            <a:off x="6452464" y="2976372"/>
+            <a:ext cx="5062576" cy="237744"/>
           </a:xfrm>
           <a:prstGeom prst="rect">
             <a:avLst/>
@@ -3411,30 +3485,30 @@
               <a:buNone/>
             </a:pPr>
             <a:r>
-              <a:rPr lang="en-US" sz="900" b="1" spc="150" kern="0" dirty="0">
+              <a:rPr lang="en-US" sz="850" b="1" spc="160" kern="0" dirty="0">
                 <a:solidFill>
                   <a:srgbClr val="8A6D1F"/>
                 </a:solidFill>
-                <a:latin typeface="Arial" pitchFamily="34" charset="0"/>
-                <a:ea typeface="Arial" pitchFamily="34" charset="-122"/>
-                <a:cs typeface="Arial" pitchFamily="34" charset="-120"/>
+                <a:latin typeface="Segoe UI" pitchFamily="34" charset="0"/>
+                <a:ea typeface="Segoe UI" pitchFamily="34" charset="-122"/>
+                <a:cs typeface="Segoe UI" pitchFamily="34" charset="-120"/>
               </a:rPr>
               <a:t>WHY THIS WORKS FOR HIM</a:t>
             </a:r>
-            <a:endParaRPr lang="en-US" sz="900" dirty="0"/>
-          </a:p>
-        </p:txBody>
-      </p:sp>
-      <p:sp>
-        <p:nvSpPr>
-          <p:cNvPr id="43" name="Text 40"/>
-          <p:cNvSpPr/>
-          <p:nvPr/>
-        </p:nvSpPr>
-        <p:spPr>
-          <a:xfrm>
-            <a:off x="6461608" y="3227832"/>
-            <a:ext cx="5044288" cy="685800"/>
+            <a:endParaRPr lang="en-US" sz="850" dirty="0"/>
+          </a:p>
+        </p:txBody>
+      </p:sp>
+      <p:sp>
+        <p:nvSpPr>
+          <p:cNvPr id="44" name="Text 40"/>
+          <p:cNvSpPr/>
+          <p:nvPr/>
+        </p:nvSpPr>
+        <p:spPr>
+          <a:xfrm>
+            <a:off x="6452464" y="3250692"/>
+            <a:ext cx="5062576" cy="527304"/>
           </a:xfrm>
           <a:prstGeom prst="rect">
             <a:avLst/>
@@ -3456,9 +3530,9 @@
                 <a:solidFill>
                   <a:srgbClr val="003087"/>
                 </a:solidFill>
-                <a:latin typeface="Arial" pitchFamily="34" charset="0"/>
-                <a:ea typeface="Arial" pitchFamily="34" charset="-122"/>
-                <a:cs typeface="Arial" pitchFamily="34" charset="-120"/>
+                <a:latin typeface="Segoe UI" pitchFamily="34" charset="0"/>
+                <a:ea typeface="Segoe UI" pitchFamily="34" charset="-122"/>
+                <a:cs typeface="Segoe UI" pitchFamily="34" charset="-120"/>
               </a:rPr>
               <a:t>Travel saved. Half-days saved. The same surveillance, on time.</a:t>
             </a:r>
@@ -3468,14 +3542,14 @@
       </p:sp>
       <p:sp>
         <p:nvSpPr>
-          <p:cNvPr id="44" name="Text 41"/>
-          <p:cNvSpPr/>
-          <p:nvPr/>
-        </p:nvSpPr>
-        <p:spPr>
-          <a:xfrm>
-            <a:off x="6461608" y="3959352"/>
-            <a:ext cx="5044288" cy="2194560"/>
+          <p:cNvPr id="45" name="Text 41"/>
+          <p:cNvSpPr/>
+          <p:nvPr/>
+        </p:nvSpPr>
+        <p:spPr>
+          <a:xfrm>
+            <a:off x="6452464" y="3851148"/>
+            <a:ext cx="5062576" cy="674624"/>
           </a:xfrm>
           <a:prstGeom prst="rect">
             <a:avLst/>
@@ -3493,13 +3567,13 @@
               <a:buNone/>
             </a:pPr>
             <a:r>
-              <a:rPr lang="en-US" sz="1100" dirty="0">
-                <a:solidFill>
-                  <a:srgbClr val="231F20"/>
-                </a:solidFill>
-                <a:latin typeface="Arial" pitchFamily="34" charset="0"/>
-                <a:ea typeface="Arial" pitchFamily="34" charset="-122"/>
-                <a:cs typeface="Arial" pitchFamily="34" charset="-120"/>
+              <a:rPr lang="en-US" sz="900" dirty="0">
+                <a:solidFill>
+                  <a:srgbClr val="212B32"/>
+                </a:solidFill>
+                <a:latin typeface="Segoe UI" pitchFamily="34" charset="0"/>
+                <a:ea typeface="Segoe UI" pitchFamily="34" charset="-122"/>
+                <a:cs typeface="Segoe UI" pitchFamily="34" charset="-120"/>
               </a:rPr>
               <a:t>Mark has worked through it, taken his kids to school, looked after a parent. The hospital is an hour's drive. The clinic visit was always the friction; the blood result was always the point. </a:t>
             </a:r>
@@ -3507,30 +3581,30 @@
               <a:buNone/>
             </a:pPr>
             <a:r>
-              <a:rPr lang="en-US" sz="1100" b="1" dirty="0">
-                <a:solidFill>
-                  <a:srgbClr val="231F20"/>
-                </a:solidFill>
-                <a:latin typeface="Arial" pitchFamily="34" charset="0"/>
-                <a:ea typeface="Arial" pitchFamily="34" charset="-122"/>
-                <a:cs typeface="Arial" pitchFamily="34" charset="-120"/>
+              <a:rPr lang="en-US" sz="900" b="1" dirty="0">
+                <a:solidFill>
+                  <a:srgbClr val="212B32"/>
+                </a:solidFill>
+                <a:latin typeface="Segoe UI" pitchFamily="34" charset="0"/>
+                <a:ea typeface="Segoe UI" pitchFamily="34" charset="-122"/>
+                <a:cs typeface="Segoe UI" pitchFamily="34" charset="-120"/>
               </a:rPr>
               <a:t>The kit moves the friction; the clinical decision-making stays exactly where it was.</a:t>
             </a:r>
-            <a:endParaRPr lang="en-US" sz="1100" dirty="0"/>
-          </a:p>
-        </p:txBody>
-      </p:sp>
-      <p:sp>
-        <p:nvSpPr>
-          <p:cNvPr id="45" name="Text 42"/>
-          <p:cNvSpPr/>
-          <p:nvPr/>
-        </p:nvSpPr>
-        <p:spPr>
-          <a:xfrm>
-            <a:off x="457200" y="6473952"/>
-            <a:ext cx="3108960" cy="274320"/>
+            <a:endParaRPr lang="en-US" sz="900" dirty="0"/>
+          </a:p>
+        </p:txBody>
+      </p:sp>
+      <p:sp>
+        <p:nvSpPr>
+          <p:cNvPr id="46" name="Text 42"/>
+          <p:cNvSpPr/>
+          <p:nvPr/>
+        </p:nvSpPr>
+        <p:spPr>
+          <a:xfrm>
+            <a:off x="457200" y="6455664"/>
+            <a:ext cx="4206240" cy="274320"/>
           </a:xfrm>
           <a:prstGeom prst="rect">
             <a:avLst/>
@@ -3550,9 +3624,9 @@
                 <a:solidFill>
                   <a:srgbClr val="7E8B97"/>
                 </a:solidFill>
-                <a:latin typeface="Arial" pitchFamily="34" charset="0"/>
-                <a:ea typeface="Arial" pitchFamily="34" charset="-122"/>
-                <a:cs typeface="Arial" pitchFamily="34" charset="-120"/>
+                <a:latin typeface="Segoe UI" pitchFamily="34" charset="0"/>
+                <a:ea typeface="Segoe UI" pitchFamily="34" charset="-122"/>
+                <a:cs typeface="Segoe UI" pitchFamily="34" charset="-120"/>
               </a:rPr>
               <a:t>Mark  ·  Hearts and Minds</a:t>
             </a:r>
@@ -3562,14 +3636,14 @@
       </p:sp>
       <p:sp>
         <p:nvSpPr>
-          <p:cNvPr id="46" name="Text 43"/>
-          <p:cNvSpPr/>
-          <p:nvPr/>
-        </p:nvSpPr>
-        <p:spPr>
-          <a:xfrm>
-            <a:off x="3657600" y="6473952"/>
-            <a:ext cx="7528255" cy="274320"/>
+          <p:cNvPr id="47" name="Text 43"/>
+          <p:cNvSpPr/>
+          <p:nvPr/>
+        </p:nvSpPr>
+        <p:spPr>
+          <a:xfrm>
+            <a:off x="4754880" y="6455664"/>
+            <a:ext cx="6430975" cy="274320"/>
           </a:xfrm>
           <a:prstGeom prst="rect">
             <a:avLst/>
@@ -3589,9 +3663,9 @@
                 <a:solidFill>
                   <a:srgbClr val="7E8B97"/>
                 </a:solidFill>
-                <a:latin typeface="Arial" pitchFamily="34" charset="0"/>
-                <a:ea typeface="Arial" pitchFamily="34" charset="-122"/>
-                <a:cs typeface="Arial" pitchFamily="34" charset="-120"/>
+                <a:latin typeface="Segoe UI" pitchFamily="34" charset="0"/>
+                <a:ea typeface="Segoe UI" pitchFamily="34" charset="-122"/>
+                <a:cs typeface="Segoe UI" pitchFamily="34" charset="-120"/>
               </a:rPr>
               <a:t>Commercial positions are agreed in principle and remain subject to the live procurement.</a:t>
             </a:r>
@@ -3601,14 +3675,14 @@
       </p:sp>
       <p:sp>
         <p:nvSpPr>
-          <p:cNvPr id="47" name="Text 44"/>
-          <p:cNvSpPr/>
-          <p:nvPr/>
-        </p:nvSpPr>
-        <p:spPr>
-          <a:xfrm>
-            <a:off x="11368735" y="6473952"/>
-            <a:ext cx="365760" cy="274320"/>
+          <p:cNvPr id="48" name="Text 44"/>
+          <p:cNvSpPr/>
+          <p:nvPr/>
+        </p:nvSpPr>
+        <p:spPr>
+          <a:xfrm>
+            <a:off x="11323015" y="6455664"/>
+            <a:ext cx="411480" cy="274320"/>
           </a:xfrm>
           <a:prstGeom prst="rect">
             <a:avLst/>
@@ -3628,9 +3702,9 @@
                 <a:solidFill>
                   <a:srgbClr val="7E8B97"/>
                 </a:solidFill>
-                <a:latin typeface="Arial" pitchFamily="34" charset="0"/>
-                <a:ea typeface="Arial" pitchFamily="34" charset="-122"/>
-                <a:cs typeface="Arial" pitchFamily="34" charset="-120"/>
+                <a:latin typeface="Segoe UI" pitchFamily="34" charset="0"/>
+                <a:ea typeface="Segoe UI" pitchFamily="34" charset="-122"/>
+                <a:cs typeface="Segoe UI" pitchFamily="34" charset="-120"/>
               </a:rPr>
               <a:t>2</a:t>
             </a:r>
@@ -3670,137 +3744,9 @@
           <a:chExt cx="0" cy="0"/>
         </a:xfrm>
       </p:grpSpPr>
-      <p:sp>
-        <p:nvSpPr>
-          <p:cNvPr id="2" name="Shape 0"/>
-          <p:cNvSpPr/>
-          <p:nvPr/>
-        </p:nvSpPr>
-        <p:spPr>
-          <a:xfrm>
-            <a:off x="0" y="0"/>
-            <a:ext cx="12191695" cy="868680"/>
-          </a:xfrm>
-          <a:prstGeom prst="rect">
-            <a:avLst/>
-          </a:prstGeom>
-          <a:solidFill>
-            <a:srgbClr val="003087"/>
-          </a:solidFill>
-          <a:ln w="12700">
-            <a:solidFill>
-              <a:srgbClr val="003087"/>
-            </a:solidFill>
-            <a:prstDash val="solid"/>
-          </a:ln>
-        </p:spPr>
-      </p:sp>
-      <p:sp>
-        <p:nvSpPr>
-          <p:cNvPr id="3" name="Shape 1"/>
-          <p:cNvSpPr/>
-          <p:nvPr/>
-        </p:nvSpPr>
-        <p:spPr>
-          <a:xfrm>
-            <a:off x="0" y="868680"/>
-            <a:ext cx="12191695" cy="54864"/>
-          </a:xfrm>
-          <a:prstGeom prst="rect">
-            <a:avLst/>
-          </a:prstGeom>
-          <a:solidFill>
-            <a:srgbClr val="FFB91D"/>
-          </a:solidFill>
-          <a:ln w="12700">
-            <a:solidFill>
-              <a:srgbClr val="FFB91D"/>
-            </a:solidFill>
-            <a:prstDash val="solid"/>
-          </a:ln>
-        </p:spPr>
-      </p:sp>
-      <p:sp>
-        <p:nvSpPr>
-          <p:cNvPr id="4" name="Text 2"/>
-          <p:cNvSpPr/>
-          <p:nvPr/>
-        </p:nvSpPr>
-        <p:spPr>
-          <a:xfrm>
-            <a:off x="457200" y="128016"/>
-            <a:ext cx="8686800" cy="256032"/>
-          </a:xfrm>
-          <a:prstGeom prst="rect">
-            <a:avLst/>
-          </a:prstGeom>
-          <a:noFill/>
-          <a:ln/>
-        </p:spPr>
-        <p:txBody>
-          <a:bodyPr wrap="square" lIns="0" tIns="0" rIns="0" bIns="0" rtlCol="0" anchor="ctr"/>
-          <a:lstStyle/>
-          <a:p>
-            <a:pPr indent="0" marL="0">
-              <a:buNone/>
-            </a:pPr>
-            <a:r>
-              <a:rPr lang="en-US" sz="950" b="1" spc="200" kern="0" dirty="0">
-                <a:solidFill>
-                  <a:srgbClr val="7EC8E3"/>
-                </a:solidFill>
-                <a:latin typeface="Arial" pitchFamily="34" charset="0"/>
-                <a:ea typeface="Arial" pitchFamily="34" charset="-122"/>
-                <a:cs typeface="Arial" pitchFamily="34" charset="-120"/>
-              </a:rPr>
-              <a:t>HEARTS AND MINDS  ·  MARK'S JOURNEY  ·  STAGE 1 OF 5</a:t>
-            </a:r>
-            <a:endParaRPr lang="en-US" sz="950" dirty="0"/>
-          </a:p>
-        </p:txBody>
-      </p:sp>
-      <p:sp>
-        <p:nvSpPr>
-          <p:cNvPr id="5" name="Text 3"/>
-          <p:cNvSpPr/>
-          <p:nvPr/>
-        </p:nvSpPr>
-        <p:spPr>
-          <a:xfrm>
-            <a:off x="457200" y="384048"/>
-            <a:ext cx="9601200" cy="411480"/>
-          </a:xfrm>
-          <a:prstGeom prst="rect">
-            <a:avLst/>
-          </a:prstGeom>
-          <a:noFill/>
-          <a:ln/>
-        </p:spPr>
-        <p:txBody>
-          <a:bodyPr wrap="square" lIns="0" tIns="0" rIns="0" bIns="0" rtlCol="0" anchor="ctr"/>
-          <a:lstStyle/>
-          <a:p>
-            <a:pPr indent="0" marL="0">
-              <a:buNone/>
-            </a:pPr>
-            <a:r>
-              <a:rPr lang="en-US" sz="2000" b="1" dirty="0">
-                <a:solidFill>
-                  <a:srgbClr val="FFFFFF"/>
-                </a:solidFill>
-                <a:latin typeface="Arial" pitchFamily="34" charset="0"/>
-                <a:ea typeface="Arial" pitchFamily="34" charset="-122"/>
-                <a:cs typeface="Arial" pitchFamily="34" charset="-120"/>
-              </a:rPr>
-              <a:t>Stratification, the cohort eligible for active surveillance</a:t>
-            </a:r>
-            <a:endParaRPr lang="en-US" sz="2000" dirty="0"/>
-          </a:p>
-        </p:txBody>
-      </p:sp>
       <p:pic>
         <p:nvPicPr>
-          <p:cNvPr id="6" name="Image 0" descr="/sessions/quirky-zen-galileo/mnt/outputs/deckbuild/nhs_logo.png">    </p:cNvPr>
+          <p:cNvPr id="2" name="Image 0" descr="/sessions/quirky-zen-galileo/mnt/NHS/07 Sites &amp; Repos/dtx-ecosystem/hearts-and-minds/_generators/assets/bg-band.jpg">    </p:cNvPr>
           <p:cNvPicPr>
             <a:picLocks noChangeAspect="1"/>
           </p:cNvPicPr>
@@ -3814,8 +3760,8 @@
         </p:blipFill>
         <p:spPr>
           <a:xfrm>
-            <a:off x="10774375" y="201168"/>
-            <a:ext cx="960120" cy="393192"/>
+            <a:off x="0" y="0"/>
+            <a:ext cx="12191695" cy="932688"/>
           </a:xfrm>
           <a:prstGeom prst="rect">
             <a:avLst/>
@@ -3824,119 +3770,14 @@
       </p:pic>
       <p:sp>
         <p:nvSpPr>
-          <p:cNvPr id="7" name="Text 4"/>
-          <p:cNvSpPr/>
-          <p:nvPr/>
-        </p:nvSpPr>
-        <p:spPr>
-          <a:xfrm>
-            <a:off x="429768" y="1024128"/>
-            <a:ext cx="1463040" cy="868680"/>
-          </a:xfrm>
-          <a:prstGeom prst="rect">
-            <a:avLst/>
-          </a:prstGeom>
-          <a:noFill/>
-          <a:ln/>
-        </p:spPr>
-        <p:txBody>
-          <a:bodyPr wrap="square" lIns="0" tIns="0" rIns="0" bIns="0" rtlCol="0" anchor="ctr"/>
-          <a:lstStyle/>
-          <a:p>
-            <a:pPr indent="0" marL="0">
-              <a:buNone/>
-            </a:pPr>
-            <a:r>
-              <a:rPr lang="en-US" sz="5200" b="1" dirty="0">
-                <a:solidFill>
-                  <a:srgbClr val="FFB91D"/>
-                </a:solidFill>
-                <a:latin typeface="Arial" pitchFamily="34" charset="0"/>
-                <a:ea typeface="Arial" pitchFamily="34" charset="-122"/>
-                <a:cs typeface="Arial" pitchFamily="34" charset="-120"/>
-              </a:rPr>
-              <a:t>01</a:t>
-            </a:r>
-            <a:endParaRPr lang="en-US" sz="5200" dirty="0"/>
-          </a:p>
-        </p:txBody>
-      </p:sp>
-      <p:sp>
-        <p:nvSpPr>
-          <p:cNvPr id="8" name="Text 5"/>
-          <p:cNvSpPr/>
-          <p:nvPr/>
-        </p:nvSpPr>
-        <p:spPr>
-          <a:xfrm>
-            <a:off x="457200" y="1920240"/>
-            <a:ext cx="4892040" cy="1176020"/>
-          </a:xfrm>
-          <a:prstGeom prst="rect">
-            <a:avLst/>
-          </a:prstGeom>
-          <a:noFill/>
-          <a:ln/>
-        </p:spPr>
-        <p:txBody>
-          <a:bodyPr wrap="square" lIns="0" tIns="0" rIns="0" bIns="0" rtlCol="0" anchor="t">
-            <a:normAutofit/>
-          </a:bodyPr>
-          <a:lstStyle/>
-          <a:p>
-            <a:pPr indent="0" marL="0">
-              <a:buNone/>
-            </a:pPr>
-            <a:r>
-              <a:rPr lang="en-US" sz="1400" b="1" dirty="0">
-                <a:solidFill>
-                  <a:srgbClr val="003087"/>
-                </a:solidFill>
-                <a:latin typeface="Arial" pitchFamily="34" charset="0"/>
-                <a:ea typeface="Arial" pitchFamily="34" charset="-122"/>
-                <a:cs typeface="Arial" pitchFamily="34" charset="-120"/>
-              </a:rPr>
-              <a:t>More than 64,000 men a year are diagnosed with prostate cancer in the UK. Around 6,500 a year choose active surveillance; up to 5,000 more could. Mark sits in that cohort: low-risk disease, watch-and-wait, quarterly PSA. The surveillance is the treatment.</a:t>
-            </a:r>
-            <a:endParaRPr lang="en-US" sz="1400" dirty="0"/>
-          </a:p>
-        </p:txBody>
-      </p:sp>
-      <p:sp>
-        <p:nvSpPr>
-          <p:cNvPr id="9" name="Shape 6"/>
-          <p:cNvSpPr/>
-          <p:nvPr/>
-        </p:nvSpPr>
-        <p:spPr>
-          <a:xfrm>
-            <a:off x="457200" y="3205988"/>
-            <a:ext cx="4892040" cy="944499"/>
-          </a:xfrm>
-          <a:prstGeom prst="rect">
-            <a:avLst/>
-          </a:prstGeom>
-          <a:solidFill>
-            <a:srgbClr val="F0F4F5"/>
-          </a:solidFill>
-          <a:ln w="12700">
-            <a:solidFill>
-              <a:srgbClr val="F0F4F5"/>
-            </a:solidFill>
-            <a:prstDash val="solid"/>
-          </a:ln>
-        </p:spPr>
-      </p:sp>
-      <p:sp>
-        <p:nvSpPr>
-          <p:cNvPr id="10" name="Shape 7"/>
-          <p:cNvSpPr/>
-          <p:nvPr/>
-        </p:nvSpPr>
-        <p:spPr>
-          <a:xfrm>
-            <a:off x="457200" y="3205988"/>
-            <a:ext cx="82296" cy="944499"/>
+          <p:cNvPr id="3" name="Shape 0"/>
+          <p:cNvSpPr/>
+          <p:nvPr/>
+        </p:nvSpPr>
+        <p:spPr>
+          <a:xfrm>
+            <a:off x="0" y="932688"/>
+            <a:ext cx="12191695" cy="50292"/>
           </a:xfrm>
           <a:prstGeom prst="rect">
             <a:avLst/>
@@ -3954,23 +3795,62 @@
       </p:sp>
       <p:sp>
         <p:nvSpPr>
-          <p:cNvPr id="11" name="Text 8"/>
-          <p:cNvSpPr/>
-          <p:nvPr/>
-        </p:nvSpPr>
-        <p:spPr>
-          <a:xfrm>
-            <a:off x="685800" y="3260852"/>
-            <a:ext cx="4526280" cy="578739"/>
-          </a:xfrm>
-          <a:prstGeom prst="rect">
-            <a:avLst/>
-          </a:prstGeom>
-          <a:noFill/>
-          <a:ln/>
-        </p:spPr>
-        <p:txBody>
-          <a:bodyPr wrap="square" lIns="0" tIns="0" rIns="0" bIns="0" rtlCol="0" anchor="t">
+          <p:cNvPr id="4" name="Text 1"/>
+          <p:cNvSpPr/>
+          <p:nvPr/>
+        </p:nvSpPr>
+        <p:spPr>
+          <a:xfrm>
+            <a:off x="502920" y="137160"/>
+            <a:ext cx="8595360" cy="256032"/>
+          </a:xfrm>
+          <a:prstGeom prst="rect">
+            <a:avLst/>
+          </a:prstGeom>
+          <a:noFill/>
+          <a:ln/>
+        </p:spPr>
+        <p:txBody>
+          <a:bodyPr wrap="square" lIns="0" tIns="0" rIns="0" bIns="0" rtlCol="0" anchor="ctr"/>
+          <a:lstStyle/>
+          <a:p>
+            <a:pPr indent="0" marL="0">
+              <a:buNone/>
+            </a:pPr>
+            <a:r>
+              <a:rPr lang="en-US" sz="950" b="1" spc="240" kern="0" dirty="0">
+                <a:solidFill>
+                  <a:srgbClr val="FFD66B"/>
+                </a:solidFill>
+                <a:latin typeface="Segoe UI" pitchFamily="34" charset="0"/>
+                <a:ea typeface="Segoe UI" pitchFamily="34" charset="-122"/>
+                <a:cs typeface="Segoe UI" pitchFamily="34" charset="-120"/>
+              </a:rPr>
+              <a:t>HEARTS AND MINDS  ·  MARK’S JOURNEY  ·  STAGE 1 OF 5</a:t>
+            </a:r>
+            <a:endParaRPr lang="en-US" sz="950" dirty="0"/>
+          </a:p>
+        </p:txBody>
+      </p:sp>
+      <p:sp>
+        <p:nvSpPr>
+          <p:cNvPr id="5" name="Text 2"/>
+          <p:cNvSpPr/>
+          <p:nvPr/>
+        </p:nvSpPr>
+        <p:spPr>
+          <a:xfrm>
+            <a:off x="502920" y="402336"/>
+            <a:ext cx="9509760" cy="457200"/>
+          </a:xfrm>
+          <a:prstGeom prst="rect">
+            <a:avLst/>
+          </a:prstGeom>
+          <a:noFill/>
+          <a:ln/>
+        </p:spPr>
+        <p:txBody>
+          <a:bodyPr wrap="square" lIns="0" tIns="0" rIns="0" bIns="0" rtlCol="0" anchor="ctr">
             <a:normAutofit/>
           </a:bodyPr>
           <a:lstStyle/>
@@ -3979,62 +3859,50 @@
               <a:buNone/>
             </a:pPr>
             <a:r>
-              <a:rPr lang="en-US" sz="950" i="1" dirty="0">
-                <a:solidFill>
-                  <a:srgbClr val="231F20"/>
-                </a:solidFill>
-                <a:latin typeface="Arial" pitchFamily="34" charset="0"/>
-                <a:ea typeface="Arial" pitchFamily="34" charset="-122"/>
-                <a:cs typeface="Arial" pitchFamily="34" charset="-120"/>
-              </a:rPr>
-              <a:t>“I am sixty-five and I have prostate cancer. They told me it is the kind that does not need treating, just watching. That is the bit nobody warns you about, what the watching actually costs.”</a:t>
-            </a:r>
-            <a:endParaRPr lang="en-US" sz="950" dirty="0"/>
-          </a:p>
-        </p:txBody>
-      </p:sp>
-      <p:sp>
-        <p:nvSpPr>
-          <p:cNvPr id="12" name="Text 9"/>
-          <p:cNvSpPr/>
-          <p:nvPr/>
-        </p:nvSpPr>
-        <p:spPr>
-          <a:xfrm>
-            <a:off x="685800" y="3839591"/>
-            <a:ext cx="4526280" cy="256032"/>
-          </a:xfrm>
-          <a:prstGeom prst="rect">
-            <a:avLst/>
-          </a:prstGeom>
-          <a:noFill/>
-          <a:ln/>
-        </p:spPr>
-        <p:txBody>
-          <a:bodyPr wrap="square" lIns="0" tIns="0" rIns="0" bIns="0" rtlCol="0" anchor="ctr"/>
-          <a:lstStyle/>
-          <a:p>
-            <a:pPr indent="0" marL="0">
-              <a:buNone/>
-            </a:pPr>
-            <a:r>
-              <a:rPr lang="en-US" sz="950" b="1" dirty="0">
-                <a:solidFill>
-                  <a:srgbClr val="8A6D1F"/>
-                </a:solidFill>
-                <a:latin typeface="Arial" pitchFamily="34" charset="0"/>
-                <a:ea typeface="Arial" pitchFamily="34" charset="-122"/>
-                <a:cs typeface="Arial" pitchFamily="34" charset="-120"/>
-              </a:rPr>
-              <a:t>Mark</a:t>
-            </a:r>
-            <a:endParaRPr lang="en-US" sz="950" dirty="0"/>
-          </a:p>
-        </p:txBody>
+              <a:rPr lang="en-US" sz="2100" b="1" dirty="0">
+                <a:solidFill>
+                  <a:srgbClr val="FFFFFF"/>
+                </a:solidFill>
+                <a:latin typeface="Segoe UI" pitchFamily="34" charset="0"/>
+                <a:ea typeface="Segoe UI" pitchFamily="34" charset="-122"/>
+                <a:cs typeface="Segoe UI" pitchFamily="34" charset="-120"/>
+              </a:rPr>
+              <a:t>Stratification, the cohort eligible for active surveillance</a:t>
+            </a:r>
+            <a:endParaRPr lang="en-US" sz="2100" dirty="0"/>
+          </a:p>
+        </p:txBody>
+      </p:sp>
+      <p:sp>
+        <p:nvSpPr>
+          <p:cNvPr id="6" name="Shape 3"/>
+          <p:cNvSpPr/>
+          <p:nvPr/>
+        </p:nvSpPr>
+        <p:spPr>
+          <a:xfrm>
+            <a:off x="10942806" y="173736"/>
+            <a:ext cx="791689" cy="605699"/>
+          </a:xfrm>
+          <a:prstGeom prst="roundRect">
+            <a:avLst>
+              <a:gd name="adj" fmla="val 12077"/>
+            </a:avLst>
+          </a:prstGeom>
+          <a:solidFill>
+            <a:srgbClr val="FFFFFF"/>
+          </a:solidFill>
+          <a:ln w="12700">
+            <a:solidFill>
+              <a:srgbClr val="FFFFFF"/>
+            </a:solidFill>
+            <a:prstDash val="solid"/>
+          </a:ln>
+        </p:spPr>
       </p:sp>
       <p:pic>
         <p:nvPicPr>
-          <p:cNvPr id="13" name="Image 1" descr="/sessions/quirky-zen-galileo/mnt/outputs/hmdecks5/img/mark-stage1.jpg">    </p:cNvPr>
+          <p:cNvPr id="7" name="Image 1" descr="/sessions/quirky-zen-galileo/mnt/NHS/07 Sites &amp; Repos/dtx-ecosystem/hearts-and-minds/_generators/assets/nhs-logo.png">    </p:cNvPr>
           <p:cNvPicPr>
             <a:picLocks noChangeAspect="1"/>
           </p:cNvPicPr>
@@ -4048,8 +3916,8 @@
         </p:blipFill>
         <p:spPr>
           <a:xfrm>
-            <a:off x="457200" y="4315079"/>
-            <a:ext cx="3540321" cy="1975993"/>
+            <a:off x="11068993" y="266273"/>
+            <a:ext cx="539315" cy="420624"/>
           </a:xfrm>
           <a:prstGeom prst="rect">
             <a:avLst/>
@@ -4058,13 +3926,246 @@
       </p:pic>
       <p:sp>
         <p:nvSpPr>
-          <p:cNvPr id="14" name="Shape 10"/>
-          <p:cNvSpPr/>
-          <p:nvPr/>
-        </p:nvSpPr>
-        <p:spPr>
-          <a:xfrm>
-            <a:off x="5669280" y="1097280"/>
+          <p:cNvPr id="8" name="Text 4"/>
+          <p:cNvSpPr/>
+          <p:nvPr/>
+        </p:nvSpPr>
+        <p:spPr>
+          <a:xfrm>
+            <a:off x="429768" y="1129284"/>
+            <a:ext cx="1463040" cy="841248"/>
+          </a:xfrm>
+          <a:prstGeom prst="rect">
+            <a:avLst/>
+          </a:prstGeom>
+          <a:noFill/>
+          <a:ln/>
+        </p:spPr>
+        <p:txBody>
+          <a:bodyPr wrap="square" lIns="0" tIns="0" rIns="0" bIns="0" rtlCol="0" anchor="ctr"/>
+          <a:lstStyle/>
+          <a:p>
+            <a:pPr indent="0" marL="0">
+              <a:buNone/>
+            </a:pPr>
+            <a:r>
+              <a:rPr lang="en-US" sz="5000" b="1" spc="-100" kern="0" dirty="0">
+                <a:solidFill>
+                  <a:srgbClr val="FFB91D"/>
+                </a:solidFill>
+                <a:latin typeface="Segoe UI" pitchFamily="34" charset="0"/>
+                <a:ea typeface="Segoe UI" pitchFamily="34" charset="-122"/>
+                <a:cs typeface="Segoe UI" pitchFamily="34" charset="-120"/>
+              </a:rPr>
+              <a:t>01</a:t>
+            </a:r>
+            <a:endParaRPr lang="en-US" sz="5000" dirty="0"/>
+          </a:p>
+        </p:txBody>
+      </p:sp>
+      <p:sp>
+        <p:nvSpPr>
+          <p:cNvPr id="9" name="Text 5"/>
+          <p:cNvSpPr/>
+          <p:nvPr/>
+        </p:nvSpPr>
+        <p:spPr>
+          <a:xfrm>
+            <a:off x="457200" y="2007108"/>
+            <a:ext cx="4892040" cy="1154430"/>
+          </a:xfrm>
+          <a:prstGeom prst="rect">
+            <a:avLst/>
+          </a:prstGeom>
+          <a:noFill/>
+          <a:ln/>
+        </p:spPr>
+        <p:txBody>
+          <a:bodyPr wrap="square" lIns="0" tIns="0" rIns="0" bIns="0" rtlCol="0" anchor="t">
+            <a:normAutofit/>
+          </a:bodyPr>
+          <a:lstStyle/>
+          <a:p>
+            <a:pPr indent="0" marL="0">
+              <a:buNone/>
+            </a:pPr>
+            <a:r>
+              <a:rPr lang="en-US" sz="1350" b="1" dirty="0">
+                <a:solidFill>
+                  <a:srgbClr val="003087"/>
+                </a:solidFill>
+                <a:latin typeface="Segoe UI" pitchFamily="34" charset="0"/>
+                <a:ea typeface="Segoe UI" pitchFamily="34" charset="-122"/>
+                <a:cs typeface="Segoe UI" pitchFamily="34" charset="-120"/>
+              </a:rPr>
+              <a:t>More than 64,000 men a year are diagnosed with prostate cancer in the UK. Around 6,500 a year choose active surveillance; up to 5,000 more could. Mark sits in that cohort: low-risk disease, watch-and-wait, quarterly PSA. The surveillance is the treatment.</a:t>
+            </a:r>
+            <a:endParaRPr lang="en-US" sz="1350" dirty="0"/>
+          </a:p>
+        </p:txBody>
+      </p:sp>
+      <p:sp>
+        <p:nvSpPr>
+          <p:cNvPr id="10" name="Shape 6"/>
+          <p:cNvSpPr/>
+          <p:nvPr/>
+        </p:nvSpPr>
+        <p:spPr>
+          <a:xfrm>
+            <a:off x="457200" y="3289554"/>
+            <a:ext cx="4892040" cy="1008126"/>
+          </a:xfrm>
+          <a:prstGeom prst="rect">
+            <a:avLst/>
+          </a:prstGeom>
+          <a:solidFill>
+            <a:srgbClr val="F8FAFC"/>
+          </a:solidFill>
+          <a:ln w="12700">
+            <a:solidFill>
+              <a:srgbClr val="F8FAFC"/>
+            </a:solidFill>
+            <a:prstDash val="solid"/>
+          </a:ln>
+        </p:spPr>
+      </p:sp>
+      <p:sp>
+        <p:nvSpPr>
+          <p:cNvPr id="11" name="Shape 7"/>
+          <p:cNvSpPr/>
+          <p:nvPr/>
+        </p:nvSpPr>
+        <p:spPr>
+          <a:xfrm>
+            <a:off x="457200" y="3289554"/>
+            <a:ext cx="82296" cy="1008126"/>
+          </a:xfrm>
+          <a:prstGeom prst="rect">
+            <a:avLst/>
+          </a:prstGeom>
+          <a:solidFill>
+            <a:srgbClr val="FFB91D"/>
+          </a:solidFill>
+          <a:ln w="12700">
+            <a:solidFill>
+              <a:srgbClr val="FFB91D"/>
+            </a:solidFill>
+            <a:prstDash val="solid"/>
+          </a:ln>
+        </p:spPr>
+      </p:sp>
+      <p:sp>
+        <p:nvSpPr>
+          <p:cNvPr id="12" name="Text 8"/>
+          <p:cNvSpPr/>
+          <p:nvPr/>
+        </p:nvSpPr>
+        <p:spPr>
+          <a:xfrm>
+            <a:off x="694944" y="3353562"/>
+            <a:ext cx="4507992" cy="624078"/>
+          </a:xfrm>
+          <a:prstGeom prst="rect">
+            <a:avLst/>
+          </a:prstGeom>
+          <a:noFill/>
+          <a:ln/>
+        </p:spPr>
+        <p:txBody>
+          <a:bodyPr wrap="square" lIns="0" tIns="0" rIns="0" bIns="0" rtlCol="0" anchor="t">
+            <a:normAutofit/>
+          </a:bodyPr>
+          <a:lstStyle/>
+          <a:p>
+            <a:pPr indent="0" marL="0">
+              <a:buNone/>
+            </a:pPr>
+            <a:r>
+              <a:rPr lang="en-US" sz="1050" i="1" dirty="0">
+                <a:solidFill>
+                  <a:srgbClr val="212B32"/>
+                </a:solidFill>
+                <a:latin typeface="Segoe UI" pitchFamily="34" charset="0"/>
+                <a:ea typeface="Segoe UI" pitchFamily="34" charset="-122"/>
+                <a:cs typeface="Segoe UI" pitchFamily="34" charset="-120"/>
+              </a:rPr>
+              <a:t>“I am sixty-five and I have prostate cancer. They told me it is the kind that does not need treating, just watching. That is the bit nobody warns you about, what the watching actually costs.”</a:t>
+            </a:r>
+            <a:endParaRPr lang="en-US" sz="1050" dirty="0"/>
+          </a:p>
+        </p:txBody>
+      </p:sp>
+      <p:sp>
+        <p:nvSpPr>
+          <p:cNvPr id="13" name="Text 9"/>
+          <p:cNvSpPr/>
+          <p:nvPr/>
+        </p:nvSpPr>
+        <p:spPr>
+          <a:xfrm>
+            <a:off x="694944" y="3977640"/>
+            <a:ext cx="4507992" cy="256032"/>
+          </a:xfrm>
+          <a:prstGeom prst="rect">
+            <a:avLst/>
+          </a:prstGeom>
+          <a:noFill/>
+          <a:ln/>
+        </p:spPr>
+        <p:txBody>
+          <a:bodyPr wrap="square" lIns="0" tIns="0" rIns="0" bIns="0" rtlCol="0" anchor="ctr"/>
+          <a:lstStyle/>
+          <a:p>
+            <a:pPr indent="0" marL="0">
+              <a:buNone/>
+            </a:pPr>
+            <a:r>
+              <a:rPr lang="en-US" sz="950" b="1" dirty="0">
+                <a:solidFill>
+                  <a:srgbClr val="8A6D1F"/>
+                </a:solidFill>
+                <a:latin typeface="Segoe UI" pitchFamily="34" charset="0"/>
+                <a:ea typeface="Segoe UI" pitchFamily="34" charset="-122"/>
+                <a:cs typeface="Segoe UI" pitchFamily="34" charset="-120"/>
+              </a:rPr>
+              <a:t>Mark</a:t>
+            </a:r>
+            <a:endParaRPr lang="en-US" sz="950" dirty="0"/>
+          </a:p>
+        </p:txBody>
+      </p:sp>
+      <p:pic>
+        <p:nvPicPr>
+          <p:cNvPr id="14" name="Image 2" descr="/sessions/quirky-zen-galileo/mnt/outputs/jd/img/mark-stage1.jpg">    </p:cNvPr>
+          <p:cNvPicPr>
+            <a:picLocks noChangeAspect="1"/>
+          </p:cNvPicPr>
+          <p:nvPr/>
+        </p:nvPicPr>
+        <p:blipFill>
+          <a:blip r:embed="rId3"/>
+          <a:srcRect l="0" r="0" t="0" b="0"/>
+          <a:stretch/>
+        </p:blipFill>
+        <p:spPr>
+          <a:xfrm>
+            <a:off x="457200" y="4480560"/>
+            <a:ext cx="4892040" cy="1810512"/>
+          </a:xfrm>
+          <a:prstGeom prst="rect">
+            <a:avLst/>
+          </a:prstGeom>
+        </p:spPr>
+      </p:pic>
+      <p:sp>
+        <p:nvSpPr>
+          <p:cNvPr id="15" name="Shape 10"/>
+          <p:cNvSpPr/>
+          <p:nvPr/>
+        </p:nvSpPr>
+        <p:spPr>
+          <a:xfrm>
+            <a:off x="5669280" y="1184148"/>
             <a:ext cx="6065215" cy="274320"/>
           </a:xfrm>
           <a:prstGeom prst="rect">
@@ -4083,14 +4184,14 @@
       </p:sp>
       <p:sp>
         <p:nvSpPr>
-          <p:cNvPr id="15" name="Text 11"/>
-          <p:cNvSpPr/>
-          <p:nvPr/>
-        </p:nvSpPr>
-        <p:spPr>
-          <a:xfrm>
-            <a:off x="5779008" y="1097280"/>
-            <a:ext cx="5845759" cy="274320"/>
+          <p:cNvPr id="16" name="Text 11"/>
+          <p:cNvSpPr/>
+          <p:nvPr/>
+        </p:nvSpPr>
+        <p:spPr>
+          <a:xfrm>
+            <a:off x="5788152" y="1184148"/>
+            <a:ext cx="5827471" cy="274320"/>
           </a:xfrm>
           <a:prstGeom prst="rect">
             <a:avLst/>
@@ -4110,9 +4211,9 @@
                 <a:solidFill>
                   <a:srgbClr val="FFFFFF"/>
                 </a:solidFill>
-                <a:latin typeface="Arial" pitchFamily="34" charset="0"/>
-                <a:ea typeface="Arial" pitchFamily="34" charset="-122"/>
-                <a:cs typeface="Arial" pitchFamily="34" charset="-120"/>
+                <a:latin typeface="Segoe UI" pitchFamily="34" charset="0"/>
+                <a:ea typeface="Segoe UI" pitchFamily="34" charset="-122"/>
+                <a:cs typeface="Segoe UI" pitchFamily="34" charset="-120"/>
               </a:rPr>
               <a:t>WHAT THE MODEL IS DOING UNDERNEATH</a:t>
             </a:r>
@@ -4122,14 +4223,14 @@
       </p:sp>
       <p:sp>
         <p:nvSpPr>
-          <p:cNvPr id="16" name="Shape 12"/>
-          <p:cNvSpPr/>
-          <p:nvPr/>
-        </p:nvSpPr>
-        <p:spPr>
-          <a:xfrm>
-            <a:off x="5669280" y="1371600"/>
-            <a:ext cx="6065215" cy="882904"/>
+          <p:cNvPr id="17" name="Shape 12"/>
+          <p:cNvSpPr/>
+          <p:nvPr/>
+        </p:nvSpPr>
+        <p:spPr>
+          <a:xfrm>
+            <a:off x="5669280" y="1458468"/>
+            <a:ext cx="6065215" cy="894080"/>
           </a:xfrm>
           <a:prstGeom prst="rect">
             <a:avLst/>
@@ -4147,14 +4248,14 @@
       </p:sp>
       <p:sp>
         <p:nvSpPr>
-          <p:cNvPr id="17" name="Text 13"/>
-          <p:cNvSpPr/>
-          <p:nvPr/>
-        </p:nvSpPr>
-        <p:spPr>
-          <a:xfrm>
-            <a:off x="5779008" y="1408176"/>
-            <a:ext cx="5845759" cy="828040"/>
+          <p:cNvPr id="18" name="Text 13"/>
+          <p:cNvSpPr/>
+          <p:nvPr/>
+        </p:nvSpPr>
+        <p:spPr>
+          <a:xfrm>
+            <a:off x="5788152" y="1495044"/>
+            <a:ext cx="5827471" cy="839216"/>
           </a:xfrm>
           <a:prstGeom prst="rect">
             <a:avLst/>
@@ -4172,11 +4273,11 @@
             <a:r>
               <a:rPr lang="en-US" sz="1100" dirty="0">
                 <a:solidFill>
-                  <a:srgbClr val="231F20"/>
-                </a:solidFill>
-                <a:latin typeface="Arial" pitchFamily="34" charset="0"/>
-                <a:ea typeface="Arial" pitchFamily="34" charset="-122"/>
-                <a:cs typeface="Arial" pitchFamily="34" charset="-120"/>
+                  <a:srgbClr val="212B32"/>
+                </a:solidFill>
+                <a:latin typeface="Segoe UI" pitchFamily="34" charset="0"/>
+                <a:ea typeface="Segoe UI" pitchFamily="34" charset="-122"/>
+                <a:cs typeface="Segoe UI" pitchFamily="34" charset="-120"/>
               </a:rPr>
               <a:t>NICE NG131 sets the framework for active surveillance in low-risk prostate cancer: regular PSA, MRI at intervals, repeat biopsy as triggered by trend. The cohort is well-defined. The challenge is holding the cohort in surveillance without burning the clinic.</a:t>
             </a:r>
@@ -4186,13 +4287,13 @@
       </p:sp>
       <p:sp>
         <p:nvSpPr>
-          <p:cNvPr id="18" name="Shape 14"/>
-          <p:cNvSpPr/>
-          <p:nvPr/>
-        </p:nvSpPr>
-        <p:spPr>
-          <a:xfrm>
-            <a:off x="5669280" y="2382520"/>
+          <p:cNvPr id="19" name="Shape 14"/>
+          <p:cNvSpPr/>
+          <p:nvPr/>
+        </p:nvSpPr>
+        <p:spPr>
+          <a:xfrm>
+            <a:off x="5669280" y="2480564"/>
             <a:ext cx="6065215" cy="274320"/>
           </a:xfrm>
           <a:prstGeom prst="rect">
@@ -4211,14 +4312,14 @@
       </p:sp>
       <p:sp>
         <p:nvSpPr>
-          <p:cNvPr id="19" name="Text 15"/>
-          <p:cNvSpPr/>
-          <p:nvPr/>
-        </p:nvSpPr>
-        <p:spPr>
-          <a:xfrm>
-            <a:off x="5779008" y="2382520"/>
-            <a:ext cx="5845759" cy="274320"/>
+          <p:cNvPr id="20" name="Text 15"/>
+          <p:cNvSpPr/>
+          <p:nvPr/>
+        </p:nvSpPr>
+        <p:spPr>
+          <a:xfrm>
+            <a:off x="5788152" y="2480564"/>
+            <a:ext cx="5827471" cy="274320"/>
           </a:xfrm>
           <a:prstGeom prst="rect">
             <a:avLst/>
@@ -4238,9 +4339,9 @@
                 <a:solidFill>
                   <a:srgbClr val="FFFFFF"/>
                 </a:solidFill>
-                <a:latin typeface="Arial" pitchFamily="34" charset="0"/>
-                <a:ea typeface="Arial" pitchFamily="34" charset="-122"/>
-                <a:cs typeface="Arial" pitchFamily="34" charset="-120"/>
+                <a:latin typeface="Segoe UI" pitchFamily="34" charset="0"/>
+                <a:ea typeface="Segoe UI" pitchFamily="34" charset="-122"/>
+                <a:cs typeface="Segoe UI" pitchFamily="34" charset="-120"/>
               </a:rPr>
               <a:t>THE OLD WAY</a:t>
             </a:r>
@@ -4250,24 +4351,24 @@
       </p:sp>
       <p:sp>
         <p:nvSpPr>
-          <p:cNvPr id="20" name="Shape 16"/>
-          <p:cNvSpPr/>
-          <p:nvPr/>
-        </p:nvSpPr>
-        <p:spPr>
-          <a:xfrm>
-            <a:off x="5669280" y="2656840"/>
-            <a:ext cx="6065215" cy="542036"/>
-          </a:xfrm>
-          <a:prstGeom prst="rect">
-            <a:avLst/>
-          </a:prstGeom>
-          <a:solidFill>
-            <a:srgbClr val="F0F4F5"/>
+          <p:cNvPr id="21" name="Shape 16"/>
+          <p:cNvSpPr/>
+          <p:nvPr/>
+        </p:nvSpPr>
+        <p:spPr>
+          <a:xfrm>
+            <a:off x="5669280" y="2754884"/>
+            <a:ext cx="6065215" cy="547624"/>
+          </a:xfrm>
+          <a:prstGeom prst="rect">
+            <a:avLst/>
+          </a:prstGeom>
+          <a:solidFill>
+            <a:srgbClr val="F8FAFC"/>
           </a:solidFill>
           <a:ln w="12700">
             <a:solidFill>
-              <a:srgbClr val="F0F4F5"/>
+              <a:srgbClr val="F8FAFC"/>
             </a:solidFill>
             <a:prstDash val="solid"/>
           </a:ln>
@@ -4275,14 +4376,14 @@
       </p:sp>
       <p:sp>
         <p:nvSpPr>
-          <p:cNvPr id="21" name="Text 17"/>
-          <p:cNvSpPr/>
-          <p:nvPr/>
-        </p:nvSpPr>
-        <p:spPr>
-          <a:xfrm>
-            <a:off x="5779008" y="2693416"/>
-            <a:ext cx="5845759" cy="487172"/>
+          <p:cNvPr id="22" name="Text 17"/>
+          <p:cNvSpPr/>
+          <p:nvPr/>
+        </p:nvSpPr>
+        <p:spPr>
+          <a:xfrm>
+            <a:off x="5788152" y="2791460"/>
+            <a:ext cx="5827471" cy="492760"/>
           </a:xfrm>
           <a:prstGeom prst="rect">
             <a:avLst/>
@@ -4300,11 +4401,11 @@
             <a:r>
               <a:rPr lang="en-US" sz="1100" dirty="0">
                 <a:solidFill>
-                  <a:srgbClr val="231F20"/>
-                </a:solidFill>
-                <a:latin typeface="Arial" pitchFamily="34" charset="0"/>
-                <a:ea typeface="Arial" pitchFamily="34" charset="-122"/>
-                <a:cs typeface="Arial" pitchFamily="34" charset="-120"/>
+                  <a:srgbClr val="212B32"/>
+                </a:solidFill>
+                <a:latin typeface="Segoe UI" pitchFamily="34" charset="0"/>
+                <a:ea typeface="Segoe UI" pitchFamily="34" charset="-122"/>
+                <a:cs typeface="Segoe UI" pitchFamily="34" charset="-120"/>
               </a:rPr>
               <a:t>An expanding AS cohort funnelled through fixed clinic capacity. Patients drop out, present later, get treated harder.</a:t>
             </a:r>
@@ -4314,13 +4415,13 @@
       </p:sp>
       <p:sp>
         <p:nvSpPr>
-          <p:cNvPr id="22" name="Shape 18"/>
-          <p:cNvSpPr/>
-          <p:nvPr/>
-        </p:nvSpPr>
-        <p:spPr>
-          <a:xfrm>
-            <a:off x="5669280" y="3326892"/>
+          <p:cNvPr id="23" name="Shape 18"/>
+          <p:cNvSpPr/>
+          <p:nvPr/>
+        </p:nvSpPr>
+        <p:spPr>
+          <a:xfrm>
+            <a:off x="5669280" y="3430524"/>
             <a:ext cx="6065215" cy="274320"/>
           </a:xfrm>
           <a:prstGeom prst="rect">
@@ -4339,14 +4440,14 @@
       </p:sp>
       <p:sp>
         <p:nvSpPr>
-          <p:cNvPr id="23" name="Text 19"/>
-          <p:cNvSpPr/>
-          <p:nvPr/>
-        </p:nvSpPr>
-        <p:spPr>
-          <a:xfrm>
-            <a:off x="5779008" y="3326892"/>
-            <a:ext cx="5845759" cy="274320"/>
+          <p:cNvPr id="24" name="Text 19"/>
+          <p:cNvSpPr/>
+          <p:nvPr/>
+        </p:nvSpPr>
+        <p:spPr>
+          <a:xfrm>
+            <a:off x="5788152" y="3430524"/>
+            <a:ext cx="5827471" cy="274320"/>
           </a:xfrm>
           <a:prstGeom prst="rect">
             <a:avLst/>
@@ -4366,9 +4467,9 @@
                 <a:solidFill>
                   <a:srgbClr val="FFFFFF"/>
                 </a:solidFill>
-                <a:latin typeface="Arial" pitchFamily="34" charset="0"/>
-                <a:ea typeface="Arial" pitchFamily="34" charset="-122"/>
-                <a:cs typeface="Arial" pitchFamily="34" charset="-120"/>
+                <a:latin typeface="Segoe UI" pitchFamily="34" charset="0"/>
+                <a:ea typeface="Segoe UI" pitchFamily="34" charset="-122"/>
+                <a:cs typeface="Segoe UI" pitchFamily="34" charset="-120"/>
               </a:rPr>
               <a:t>WHAT THE CARE TEAM SEES</a:t>
             </a:r>
@@ -4378,14 +4479,14 @@
       </p:sp>
       <p:sp>
         <p:nvSpPr>
-          <p:cNvPr id="24" name="Shape 20"/>
-          <p:cNvSpPr/>
-          <p:nvPr/>
-        </p:nvSpPr>
-        <p:spPr>
-          <a:xfrm>
-            <a:off x="5669280" y="3601212"/>
-            <a:ext cx="6065215" cy="542036"/>
+          <p:cNvPr id="25" name="Shape 20"/>
+          <p:cNvSpPr/>
+          <p:nvPr/>
+        </p:nvSpPr>
+        <p:spPr>
+          <a:xfrm>
+            <a:off x="5669280" y="3704844"/>
+            <a:ext cx="6065215" cy="547624"/>
           </a:xfrm>
           <a:prstGeom prst="rect">
             <a:avLst/>
@@ -4403,14 +4504,14 @@
       </p:sp>
       <p:sp>
         <p:nvSpPr>
-          <p:cNvPr id="25" name="Text 21"/>
-          <p:cNvSpPr/>
-          <p:nvPr/>
-        </p:nvSpPr>
-        <p:spPr>
-          <a:xfrm>
-            <a:off x="5779008" y="3637788"/>
-            <a:ext cx="5845759" cy="487172"/>
+          <p:cNvPr id="26" name="Text 21"/>
+          <p:cNvSpPr/>
+          <p:nvPr/>
+        </p:nvSpPr>
+        <p:spPr>
+          <a:xfrm>
+            <a:off x="5788152" y="3741420"/>
+            <a:ext cx="5827471" cy="492760"/>
           </a:xfrm>
           <a:prstGeom prst="rect">
             <a:avLst/>
@@ -4428,11 +4529,11 @@
             <a:r>
               <a:rPr lang="en-US" sz="1100" dirty="0">
                 <a:solidFill>
-                  <a:srgbClr val="231F20"/>
-                </a:solidFill>
-                <a:latin typeface="Arial" pitchFamily="34" charset="0"/>
-                <a:ea typeface="Arial" pitchFamily="34" charset="-122"/>
-                <a:cs typeface="Arial" pitchFamily="34" charset="-120"/>
+                  <a:srgbClr val="212B32"/>
+                </a:solidFill>
+                <a:latin typeface="Segoe UI" pitchFamily="34" charset="0"/>
+                <a:ea typeface="Segoe UI" pitchFamily="34" charset="-122"/>
+                <a:cs typeface="Segoe UI" pitchFamily="34" charset="-120"/>
               </a:rPr>
               <a:t>Adam, consultant urologist. The MDT. Catherine on the Trust commissioner side. Mark.</a:t>
             </a:r>
@@ -4442,14 +4543,14 @@
       </p:sp>
       <p:sp>
         <p:nvSpPr>
-          <p:cNvPr id="27" name="Text 22"/>
-          <p:cNvSpPr/>
-          <p:nvPr/>
-        </p:nvSpPr>
-        <p:spPr>
-          <a:xfrm>
-            <a:off x="457200" y="6473952"/>
-            <a:ext cx="3108960" cy="274320"/>
+          <p:cNvPr id="28" name="Text 22"/>
+          <p:cNvSpPr/>
+          <p:nvPr/>
+        </p:nvSpPr>
+        <p:spPr>
+          <a:xfrm>
+            <a:off x="457200" y="6455664"/>
+            <a:ext cx="4206240" cy="274320"/>
           </a:xfrm>
           <a:prstGeom prst="rect">
             <a:avLst/>
@@ -4469,9 +4570,9 @@
                 <a:solidFill>
                   <a:srgbClr val="7E8B97"/>
                 </a:solidFill>
-                <a:latin typeface="Arial" pitchFamily="34" charset="0"/>
-                <a:ea typeface="Arial" pitchFamily="34" charset="-122"/>
-                <a:cs typeface="Arial" pitchFamily="34" charset="-120"/>
+                <a:latin typeface="Segoe UI" pitchFamily="34" charset="0"/>
+                <a:ea typeface="Segoe UI" pitchFamily="34" charset="-122"/>
+                <a:cs typeface="Segoe UI" pitchFamily="34" charset="-120"/>
               </a:rPr>
               <a:t>Mark  ·  Hearts and Minds</a:t>
             </a:r>
@@ -4481,14 +4582,14 @@
       </p:sp>
       <p:sp>
         <p:nvSpPr>
-          <p:cNvPr id="28" name="Text 23"/>
-          <p:cNvSpPr/>
-          <p:nvPr/>
-        </p:nvSpPr>
-        <p:spPr>
-          <a:xfrm>
-            <a:off x="3657600" y="6473952"/>
-            <a:ext cx="7528255" cy="274320"/>
+          <p:cNvPr id="29" name="Text 23"/>
+          <p:cNvSpPr/>
+          <p:nvPr/>
+        </p:nvSpPr>
+        <p:spPr>
+          <a:xfrm>
+            <a:off x="4754880" y="6455664"/>
+            <a:ext cx="6430975" cy="274320"/>
           </a:xfrm>
           <a:prstGeom prst="rect">
             <a:avLst/>
@@ -4508,9 +4609,9 @@
                 <a:solidFill>
                   <a:srgbClr val="7E8B97"/>
                 </a:solidFill>
-                <a:latin typeface="Arial" pitchFamily="34" charset="0"/>
-                <a:ea typeface="Arial" pitchFamily="34" charset="-122"/>
-                <a:cs typeface="Arial" pitchFamily="34" charset="-120"/>
+                <a:latin typeface="Segoe UI" pitchFamily="34" charset="0"/>
+                <a:ea typeface="Segoe UI" pitchFamily="34" charset="-122"/>
+                <a:cs typeface="Segoe UI" pitchFamily="34" charset="-120"/>
               </a:rPr>
               <a:t>Commercial positions are agreed in principle and remain subject to the live procurement.</a:t>
             </a:r>
@@ -4520,14 +4621,14 @@
       </p:sp>
       <p:sp>
         <p:nvSpPr>
-          <p:cNvPr id="29" name="Text 24"/>
-          <p:cNvSpPr/>
-          <p:nvPr/>
-        </p:nvSpPr>
-        <p:spPr>
-          <a:xfrm>
-            <a:off x="11368735" y="6473952"/>
-            <a:ext cx="365760" cy="274320"/>
+          <p:cNvPr id="30" name="Text 24"/>
+          <p:cNvSpPr/>
+          <p:nvPr/>
+        </p:nvSpPr>
+        <p:spPr>
+          <a:xfrm>
+            <a:off x="11323015" y="6455664"/>
+            <a:ext cx="411480" cy="274320"/>
           </a:xfrm>
           <a:prstGeom prst="rect">
             <a:avLst/>
@@ -4547,9 +4648,9 @@
                 <a:solidFill>
                   <a:srgbClr val="7E8B97"/>
                 </a:solidFill>
-                <a:latin typeface="Arial" pitchFamily="34" charset="0"/>
-                <a:ea typeface="Arial" pitchFamily="34" charset="-122"/>
-                <a:cs typeface="Arial" pitchFamily="34" charset="-120"/>
+                <a:latin typeface="Segoe UI" pitchFamily="34" charset="0"/>
+                <a:ea typeface="Segoe UI" pitchFamily="34" charset="-122"/>
+                <a:cs typeface="Segoe UI" pitchFamily="34" charset="-120"/>
               </a:rPr>
               <a:t>3</a:t>
             </a:r>
@@ -4589,137 +4690,9 @@
           <a:chExt cx="0" cy="0"/>
         </a:xfrm>
       </p:grpSpPr>
-      <p:sp>
-        <p:nvSpPr>
-          <p:cNvPr id="2" name="Shape 0"/>
-          <p:cNvSpPr/>
-          <p:nvPr/>
-        </p:nvSpPr>
-        <p:spPr>
-          <a:xfrm>
-            <a:off x="0" y="0"/>
-            <a:ext cx="12191695" cy="868680"/>
-          </a:xfrm>
-          <a:prstGeom prst="rect">
-            <a:avLst/>
-          </a:prstGeom>
-          <a:solidFill>
-            <a:srgbClr val="003087"/>
-          </a:solidFill>
-          <a:ln w="12700">
-            <a:solidFill>
-              <a:srgbClr val="003087"/>
-            </a:solidFill>
-            <a:prstDash val="solid"/>
-          </a:ln>
-        </p:spPr>
-      </p:sp>
-      <p:sp>
-        <p:nvSpPr>
-          <p:cNvPr id="3" name="Shape 1"/>
-          <p:cNvSpPr/>
-          <p:nvPr/>
-        </p:nvSpPr>
-        <p:spPr>
-          <a:xfrm>
-            <a:off x="0" y="868680"/>
-            <a:ext cx="12191695" cy="54864"/>
-          </a:xfrm>
-          <a:prstGeom prst="rect">
-            <a:avLst/>
-          </a:prstGeom>
-          <a:solidFill>
-            <a:srgbClr val="FFB91D"/>
-          </a:solidFill>
-          <a:ln w="12700">
-            <a:solidFill>
-              <a:srgbClr val="FFB91D"/>
-            </a:solidFill>
-            <a:prstDash val="solid"/>
-          </a:ln>
-        </p:spPr>
-      </p:sp>
-      <p:sp>
-        <p:nvSpPr>
-          <p:cNvPr id="4" name="Text 2"/>
-          <p:cNvSpPr/>
-          <p:nvPr/>
-        </p:nvSpPr>
-        <p:spPr>
-          <a:xfrm>
-            <a:off x="457200" y="128016"/>
-            <a:ext cx="8686800" cy="256032"/>
-          </a:xfrm>
-          <a:prstGeom prst="rect">
-            <a:avLst/>
-          </a:prstGeom>
-          <a:noFill/>
-          <a:ln/>
-        </p:spPr>
-        <p:txBody>
-          <a:bodyPr wrap="square" lIns="0" tIns="0" rIns="0" bIns="0" rtlCol="0" anchor="ctr"/>
-          <a:lstStyle/>
-          <a:p>
-            <a:pPr indent="0" marL="0">
-              <a:buNone/>
-            </a:pPr>
-            <a:r>
-              <a:rPr lang="en-US" sz="950" b="1" spc="200" kern="0" dirty="0">
-                <a:solidFill>
-                  <a:srgbClr val="7EC8E3"/>
-                </a:solidFill>
-                <a:latin typeface="Arial" pitchFamily="34" charset="0"/>
-                <a:ea typeface="Arial" pitchFamily="34" charset="-122"/>
-                <a:cs typeface="Arial" pitchFamily="34" charset="-120"/>
-              </a:rPr>
-              <a:t>HEARTS AND MINDS  ·  MARK'S JOURNEY  ·  STAGE 2 OF 5</a:t>
-            </a:r>
-            <a:endParaRPr lang="en-US" sz="950" dirty="0"/>
-          </a:p>
-        </p:txBody>
-      </p:sp>
-      <p:sp>
-        <p:nvSpPr>
-          <p:cNvPr id="5" name="Text 3"/>
-          <p:cNvSpPr/>
-          <p:nvPr/>
-        </p:nvSpPr>
-        <p:spPr>
-          <a:xfrm>
-            <a:off x="457200" y="384048"/>
-            <a:ext cx="9601200" cy="411480"/>
-          </a:xfrm>
-          <a:prstGeom prst="rect">
-            <a:avLst/>
-          </a:prstGeom>
-          <a:noFill/>
-          <a:ln/>
-        </p:spPr>
-        <p:txBody>
-          <a:bodyPr wrap="square" lIns="0" tIns="0" rIns="0" bIns="0" rtlCol="0" anchor="ctr"/>
-          <a:lstStyle/>
-          <a:p>
-            <a:pPr indent="0" marL="0">
-              <a:buNone/>
-            </a:pPr>
-            <a:r>
-              <a:rPr lang="en-US" sz="2000" b="1" dirty="0">
-                <a:solidFill>
-                  <a:srgbClr val="FFFFFF"/>
-                </a:solidFill>
-                <a:latin typeface="Arial" pitchFamily="34" charset="0"/>
-                <a:ea typeface="Arial" pitchFamily="34" charset="-122"/>
-                <a:cs typeface="Arial" pitchFamily="34" charset="-120"/>
-              </a:rPr>
-              <a:t>Identification, Adam's clinic shortlists him</a:t>
-            </a:r>
-            <a:endParaRPr lang="en-US" sz="2000" dirty="0"/>
-          </a:p>
-        </p:txBody>
-      </p:sp>
       <p:pic>
         <p:nvPicPr>
-          <p:cNvPr id="6" name="Image 0" descr="/sessions/quirky-zen-galileo/mnt/outputs/deckbuild/nhs_logo.png">    </p:cNvPr>
+          <p:cNvPr id="2" name="Image 0" descr="/sessions/quirky-zen-galileo/mnt/NHS/07 Sites &amp; Repos/dtx-ecosystem/hearts-and-minds/_generators/assets/bg-band.jpg">    </p:cNvPr>
           <p:cNvPicPr>
             <a:picLocks noChangeAspect="1"/>
           </p:cNvPicPr>
@@ -4733,8 +4706,8 @@
         </p:blipFill>
         <p:spPr>
           <a:xfrm>
-            <a:off x="10774375" y="201168"/>
-            <a:ext cx="960120" cy="393192"/>
+            <a:off x="0" y="0"/>
+            <a:ext cx="12191695" cy="932688"/>
           </a:xfrm>
           <a:prstGeom prst="rect">
             <a:avLst/>
@@ -4743,119 +4716,14 @@
       </p:pic>
       <p:sp>
         <p:nvSpPr>
-          <p:cNvPr id="7" name="Text 4"/>
-          <p:cNvSpPr/>
-          <p:nvPr/>
-        </p:nvSpPr>
-        <p:spPr>
-          <a:xfrm>
-            <a:off x="429768" y="1024128"/>
-            <a:ext cx="1463040" cy="868680"/>
-          </a:xfrm>
-          <a:prstGeom prst="rect">
-            <a:avLst/>
-          </a:prstGeom>
-          <a:noFill/>
-          <a:ln/>
-        </p:spPr>
-        <p:txBody>
-          <a:bodyPr wrap="square" lIns="0" tIns="0" rIns="0" bIns="0" rtlCol="0" anchor="ctr"/>
-          <a:lstStyle/>
-          <a:p>
-            <a:pPr indent="0" marL="0">
-              <a:buNone/>
-            </a:pPr>
-            <a:r>
-              <a:rPr lang="en-US" sz="5200" b="1" dirty="0">
-                <a:solidFill>
-                  <a:srgbClr val="FFB91D"/>
-                </a:solidFill>
-                <a:latin typeface="Arial" pitchFamily="34" charset="0"/>
-                <a:ea typeface="Arial" pitchFamily="34" charset="-122"/>
-                <a:cs typeface="Arial" pitchFamily="34" charset="-120"/>
-              </a:rPr>
-              <a:t>02</a:t>
-            </a:r>
-            <a:endParaRPr lang="en-US" sz="5200" dirty="0"/>
-          </a:p>
-        </p:txBody>
-      </p:sp>
-      <p:sp>
-        <p:nvSpPr>
-          <p:cNvPr id="8" name="Text 5"/>
-          <p:cNvSpPr/>
-          <p:nvPr/>
-        </p:nvSpPr>
-        <p:spPr>
-          <a:xfrm>
-            <a:off x="457200" y="1920240"/>
-            <a:ext cx="4892040" cy="1176020"/>
-          </a:xfrm>
-          <a:prstGeom prst="rect">
-            <a:avLst/>
-          </a:prstGeom>
-          <a:noFill/>
-          <a:ln/>
-        </p:spPr>
-        <p:txBody>
-          <a:bodyPr wrap="square" lIns="0" tIns="0" rIns="0" bIns="0" rtlCol="0" anchor="t">
-            <a:normAutofit/>
-          </a:bodyPr>
-          <a:lstStyle/>
-          <a:p>
-            <a:pPr indent="0" marL="0">
-              <a:buNone/>
-            </a:pPr>
-            <a:r>
-              <a:rPr lang="en-US" sz="1400" b="1" dirty="0">
-                <a:solidFill>
-                  <a:srgbClr val="003087"/>
-                </a:solidFill>
-                <a:latin typeface="Arial" pitchFamily="34" charset="0"/>
-                <a:ea typeface="Arial" pitchFamily="34" charset="-122"/>
-                <a:cs typeface="Arial" pitchFamily="34" charset="-120"/>
-              </a:rPr>
-              <a:t>Adam reviews the cohort. Mark fits the profile for the first wave of home PSA: stable trend, comfortable with the kit idea, no clinical concerns. The shortlist of first patients is small and chosen carefully. Mark gets the conversation at the next clinic.</a:t>
-            </a:r>
-            <a:endParaRPr lang="en-US" sz="1400" dirty="0"/>
-          </a:p>
-        </p:txBody>
-      </p:sp>
-      <p:sp>
-        <p:nvSpPr>
-          <p:cNvPr id="9" name="Shape 6"/>
-          <p:cNvSpPr/>
-          <p:nvPr/>
-        </p:nvSpPr>
-        <p:spPr>
-          <a:xfrm>
-            <a:off x="457200" y="3205988"/>
-            <a:ext cx="4892040" cy="843788"/>
-          </a:xfrm>
-          <a:prstGeom prst="rect">
-            <a:avLst/>
-          </a:prstGeom>
-          <a:solidFill>
-            <a:srgbClr val="F0F4F5"/>
-          </a:solidFill>
-          <a:ln w="12700">
-            <a:solidFill>
-              <a:srgbClr val="F0F4F5"/>
-            </a:solidFill>
-            <a:prstDash val="solid"/>
-          </a:ln>
-        </p:spPr>
-      </p:sp>
-      <p:sp>
-        <p:nvSpPr>
-          <p:cNvPr id="10" name="Shape 7"/>
-          <p:cNvSpPr/>
-          <p:nvPr/>
-        </p:nvSpPr>
-        <p:spPr>
-          <a:xfrm>
-            <a:off x="457200" y="3205988"/>
-            <a:ext cx="82296" cy="843788"/>
+          <p:cNvPr id="3" name="Shape 0"/>
+          <p:cNvSpPr/>
+          <p:nvPr/>
+        </p:nvSpPr>
+        <p:spPr>
+          <a:xfrm>
+            <a:off x="0" y="932688"/>
+            <a:ext cx="12191695" cy="50292"/>
           </a:xfrm>
           <a:prstGeom prst="rect">
             <a:avLst/>
@@ -4873,23 +4741,62 @@
       </p:sp>
       <p:sp>
         <p:nvSpPr>
-          <p:cNvPr id="11" name="Text 8"/>
-          <p:cNvSpPr/>
-          <p:nvPr/>
-        </p:nvSpPr>
-        <p:spPr>
-          <a:xfrm>
-            <a:off x="685800" y="3260852"/>
-            <a:ext cx="4526280" cy="478028"/>
-          </a:xfrm>
-          <a:prstGeom prst="rect">
-            <a:avLst/>
-          </a:prstGeom>
-          <a:noFill/>
-          <a:ln/>
-        </p:spPr>
-        <p:txBody>
-          <a:bodyPr wrap="square" lIns="0" tIns="0" rIns="0" bIns="0" rtlCol="0" anchor="t">
+          <p:cNvPr id="4" name="Text 1"/>
+          <p:cNvSpPr/>
+          <p:nvPr/>
+        </p:nvSpPr>
+        <p:spPr>
+          <a:xfrm>
+            <a:off x="502920" y="137160"/>
+            <a:ext cx="8595360" cy="256032"/>
+          </a:xfrm>
+          <a:prstGeom prst="rect">
+            <a:avLst/>
+          </a:prstGeom>
+          <a:noFill/>
+          <a:ln/>
+        </p:spPr>
+        <p:txBody>
+          <a:bodyPr wrap="square" lIns="0" tIns="0" rIns="0" bIns="0" rtlCol="0" anchor="ctr"/>
+          <a:lstStyle/>
+          <a:p>
+            <a:pPr indent="0" marL="0">
+              <a:buNone/>
+            </a:pPr>
+            <a:r>
+              <a:rPr lang="en-US" sz="950" b="1" spc="240" kern="0" dirty="0">
+                <a:solidFill>
+                  <a:srgbClr val="FFD66B"/>
+                </a:solidFill>
+                <a:latin typeface="Segoe UI" pitchFamily="34" charset="0"/>
+                <a:ea typeface="Segoe UI" pitchFamily="34" charset="-122"/>
+                <a:cs typeface="Segoe UI" pitchFamily="34" charset="-120"/>
+              </a:rPr>
+              <a:t>HEARTS AND MINDS  ·  MARK’S JOURNEY  ·  STAGE 2 OF 5</a:t>
+            </a:r>
+            <a:endParaRPr lang="en-US" sz="950" dirty="0"/>
+          </a:p>
+        </p:txBody>
+      </p:sp>
+      <p:sp>
+        <p:nvSpPr>
+          <p:cNvPr id="5" name="Text 2"/>
+          <p:cNvSpPr/>
+          <p:nvPr/>
+        </p:nvSpPr>
+        <p:spPr>
+          <a:xfrm>
+            <a:off x="502920" y="402336"/>
+            <a:ext cx="9509760" cy="457200"/>
+          </a:xfrm>
+          <a:prstGeom prst="rect">
+            <a:avLst/>
+          </a:prstGeom>
+          <a:noFill/>
+          <a:ln/>
+        </p:spPr>
+        <p:txBody>
+          <a:bodyPr wrap="square" lIns="0" tIns="0" rIns="0" bIns="0" rtlCol="0" anchor="ctr">
             <a:normAutofit/>
           </a:bodyPr>
           <a:lstStyle/>
@@ -4898,62 +4805,50 @@
               <a:buNone/>
             </a:pPr>
             <a:r>
-              <a:rPr lang="en-US" sz="1100" i="1" dirty="0">
-                <a:solidFill>
-                  <a:srgbClr val="231F20"/>
-                </a:solidFill>
-                <a:latin typeface="Arial" pitchFamily="34" charset="0"/>
-                <a:ea typeface="Arial" pitchFamily="34" charset="-122"/>
-                <a:cs typeface="Arial" pitchFamily="34" charset="-120"/>
-              </a:rPr>
-              <a:t>“Adam asked me whether I would be comfortable doing the next PSA at home. I said yes before he had finished the sentence.”</a:t>
-            </a:r>
-            <a:endParaRPr lang="en-US" sz="1100" dirty="0"/>
-          </a:p>
-        </p:txBody>
-      </p:sp>
-      <p:sp>
-        <p:nvSpPr>
-          <p:cNvPr id="12" name="Text 9"/>
-          <p:cNvSpPr/>
-          <p:nvPr/>
-        </p:nvSpPr>
-        <p:spPr>
-          <a:xfrm>
-            <a:off x="685800" y="3738880"/>
-            <a:ext cx="4526280" cy="256032"/>
-          </a:xfrm>
-          <a:prstGeom prst="rect">
-            <a:avLst/>
-          </a:prstGeom>
-          <a:noFill/>
-          <a:ln/>
-        </p:spPr>
-        <p:txBody>
-          <a:bodyPr wrap="square" lIns="0" tIns="0" rIns="0" bIns="0" rtlCol="0" anchor="ctr"/>
-          <a:lstStyle/>
-          <a:p>
-            <a:pPr indent="0" marL="0">
-              <a:buNone/>
-            </a:pPr>
-            <a:r>
-              <a:rPr lang="en-US" sz="950" b="1" dirty="0">
-                <a:solidFill>
-                  <a:srgbClr val="8A6D1F"/>
-                </a:solidFill>
-                <a:latin typeface="Arial" pitchFamily="34" charset="0"/>
-                <a:ea typeface="Arial" pitchFamily="34" charset="-122"/>
-                <a:cs typeface="Arial" pitchFamily="34" charset="-120"/>
-              </a:rPr>
-              <a:t>Mark</a:t>
-            </a:r>
-            <a:endParaRPr lang="en-US" sz="950" dirty="0"/>
-          </a:p>
-        </p:txBody>
+              <a:rPr lang="en-US" sz="2100" b="1" dirty="0">
+                <a:solidFill>
+                  <a:srgbClr val="FFFFFF"/>
+                </a:solidFill>
+                <a:latin typeface="Segoe UI" pitchFamily="34" charset="0"/>
+                <a:ea typeface="Segoe UI" pitchFamily="34" charset="-122"/>
+                <a:cs typeface="Segoe UI" pitchFamily="34" charset="-120"/>
+              </a:rPr>
+              <a:t>Identification, Adam's clinic shortlists him</a:t>
+            </a:r>
+            <a:endParaRPr lang="en-US" sz="2100" dirty="0"/>
+          </a:p>
+        </p:txBody>
+      </p:sp>
+      <p:sp>
+        <p:nvSpPr>
+          <p:cNvPr id="6" name="Shape 3"/>
+          <p:cNvSpPr/>
+          <p:nvPr/>
+        </p:nvSpPr>
+        <p:spPr>
+          <a:xfrm>
+            <a:off x="10942806" y="173736"/>
+            <a:ext cx="791689" cy="605699"/>
+          </a:xfrm>
+          <a:prstGeom prst="roundRect">
+            <a:avLst>
+              <a:gd name="adj" fmla="val 12077"/>
+            </a:avLst>
+          </a:prstGeom>
+          <a:solidFill>
+            <a:srgbClr val="FFFFFF"/>
+          </a:solidFill>
+          <a:ln w="12700">
+            <a:solidFill>
+              <a:srgbClr val="FFFFFF"/>
+            </a:solidFill>
+            <a:prstDash val="solid"/>
+          </a:ln>
+        </p:spPr>
       </p:sp>
       <p:pic>
         <p:nvPicPr>
-          <p:cNvPr id="13" name="Image 1" descr="/sessions/quirky-zen-galileo/mnt/outputs/hmdecks5/img/mark-stage2.jpg">    </p:cNvPr>
+          <p:cNvPr id="7" name="Image 1" descr="/sessions/quirky-zen-galileo/mnt/NHS/07 Sites &amp; Repos/dtx-ecosystem/hearts-and-minds/_generators/assets/nhs-logo.png">    </p:cNvPr>
           <p:cNvPicPr>
             <a:picLocks noChangeAspect="1"/>
           </p:cNvPicPr>
@@ -4967,8 +4862,8 @@
         </p:blipFill>
         <p:spPr>
           <a:xfrm>
-            <a:off x="457200" y="4214368"/>
-            <a:ext cx="3720761" cy="2076704"/>
+            <a:off x="11068993" y="266273"/>
+            <a:ext cx="539315" cy="420624"/>
           </a:xfrm>
           <a:prstGeom prst="rect">
             <a:avLst/>
@@ -4977,13 +4872,246 @@
       </p:pic>
       <p:sp>
         <p:nvSpPr>
-          <p:cNvPr id="14" name="Shape 10"/>
-          <p:cNvSpPr/>
-          <p:nvPr/>
-        </p:nvSpPr>
-        <p:spPr>
-          <a:xfrm>
-            <a:off x="5669280" y="1097280"/>
+          <p:cNvPr id="8" name="Text 4"/>
+          <p:cNvSpPr/>
+          <p:nvPr/>
+        </p:nvSpPr>
+        <p:spPr>
+          <a:xfrm>
+            <a:off x="429768" y="1129284"/>
+            <a:ext cx="1463040" cy="841248"/>
+          </a:xfrm>
+          <a:prstGeom prst="rect">
+            <a:avLst/>
+          </a:prstGeom>
+          <a:noFill/>
+          <a:ln/>
+        </p:spPr>
+        <p:txBody>
+          <a:bodyPr wrap="square" lIns="0" tIns="0" rIns="0" bIns="0" rtlCol="0" anchor="ctr"/>
+          <a:lstStyle/>
+          <a:p>
+            <a:pPr indent="0" marL="0">
+              <a:buNone/>
+            </a:pPr>
+            <a:r>
+              <a:rPr lang="en-US" sz="5000" b="1" spc="-100" kern="0" dirty="0">
+                <a:solidFill>
+                  <a:srgbClr val="FFB91D"/>
+                </a:solidFill>
+                <a:latin typeface="Segoe UI" pitchFamily="34" charset="0"/>
+                <a:ea typeface="Segoe UI" pitchFamily="34" charset="-122"/>
+                <a:cs typeface="Segoe UI" pitchFamily="34" charset="-120"/>
+              </a:rPr>
+              <a:t>02</a:t>
+            </a:r>
+            <a:endParaRPr lang="en-US" sz="5000" dirty="0"/>
+          </a:p>
+        </p:txBody>
+      </p:sp>
+      <p:sp>
+        <p:nvSpPr>
+          <p:cNvPr id="9" name="Text 5"/>
+          <p:cNvSpPr/>
+          <p:nvPr/>
+        </p:nvSpPr>
+        <p:spPr>
+          <a:xfrm>
+            <a:off x="457200" y="2007108"/>
+            <a:ext cx="4892040" cy="1154430"/>
+          </a:xfrm>
+          <a:prstGeom prst="rect">
+            <a:avLst/>
+          </a:prstGeom>
+          <a:noFill/>
+          <a:ln/>
+        </p:spPr>
+        <p:txBody>
+          <a:bodyPr wrap="square" lIns="0" tIns="0" rIns="0" bIns="0" rtlCol="0" anchor="t">
+            <a:normAutofit/>
+          </a:bodyPr>
+          <a:lstStyle/>
+          <a:p>
+            <a:pPr indent="0" marL="0">
+              <a:buNone/>
+            </a:pPr>
+            <a:r>
+              <a:rPr lang="en-US" sz="1350" b="1" dirty="0">
+                <a:solidFill>
+                  <a:srgbClr val="003087"/>
+                </a:solidFill>
+                <a:latin typeface="Segoe UI" pitchFamily="34" charset="0"/>
+                <a:ea typeface="Segoe UI" pitchFamily="34" charset="-122"/>
+                <a:cs typeface="Segoe UI" pitchFamily="34" charset="-120"/>
+              </a:rPr>
+              <a:t>Adam reviews the cohort. Mark fits the profile for the first wave of home PSA: stable trend, comfortable with the kit idea, no clinical concerns. The shortlist of first patients is small and chosen carefully. Mark gets the conversation at the next clinic.</a:t>
+            </a:r>
+            <a:endParaRPr lang="en-US" sz="1350" dirty="0"/>
+          </a:p>
+        </p:txBody>
+      </p:sp>
+      <p:sp>
+        <p:nvSpPr>
+          <p:cNvPr id="10" name="Shape 6"/>
+          <p:cNvSpPr/>
+          <p:nvPr/>
+        </p:nvSpPr>
+        <p:spPr>
+          <a:xfrm>
+            <a:off x="457200" y="3289554"/>
+            <a:ext cx="4892040" cy="1051560"/>
+          </a:xfrm>
+          <a:prstGeom prst="rect">
+            <a:avLst/>
+          </a:prstGeom>
+          <a:solidFill>
+            <a:srgbClr val="F8FAFC"/>
+          </a:solidFill>
+          <a:ln w="12700">
+            <a:solidFill>
+              <a:srgbClr val="F8FAFC"/>
+            </a:solidFill>
+            <a:prstDash val="solid"/>
+          </a:ln>
+        </p:spPr>
+      </p:sp>
+      <p:sp>
+        <p:nvSpPr>
+          <p:cNvPr id="11" name="Shape 7"/>
+          <p:cNvSpPr/>
+          <p:nvPr/>
+        </p:nvSpPr>
+        <p:spPr>
+          <a:xfrm>
+            <a:off x="457200" y="3289554"/>
+            <a:ext cx="82296" cy="1051560"/>
+          </a:xfrm>
+          <a:prstGeom prst="rect">
+            <a:avLst/>
+          </a:prstGeom>
+          <a:solidFill>
+            <a:srgbClr val="FFB91D"/>
+          </a:solidFill>
+          <a:ln w="12700">
+            <a:solidFill>
+              <a:srgbClr val="FFB91D"/>
+            </a:solidFill>
+            <a:prstDash val="solid"/>
+          </a:ln>
+        </p:spPr>
+      </p:sp>
+      <p:sp>
+        <p:nvSpPr>
+          <p:cNvPr id="12" name="Text 8"/>
+          <p:cNvSpPr/>
+          <p:nvPr/>
+        </p:nvSpPr>
+        <p:spPr>
+          <a:xfrm>
+            <a:off x="694944" y="3353562"/>
+            <a:ext cx="4507992" cy="667512"/>
+          </a:xfrm>
+          <a:prstGeom prst="rect">
+            <a:avLst/>
+          </a:prstGeom>
+          <a:noFill/>
+          <a:ln/>
+        </p:spPr>
+        <p:txBody>
+          <a:bodyPr wrap="square" lIns="0" tIns="0" rIns="0" bIns="0" rtlCol="0" anchor="t">
+            <a:normAutofit/>
+          </a:bodyPr>
+          <a:lstStyle/>
+          <a:p>
+            <a:pPr indent="0" marL="0">
+              <a:buNone/>
+            </a:pPr>
+            <a:r>
+              <a:rPr lang="en-US" sz="1150" i="1" dirty="0">
+                <a:solidFill>
+                  <a:srgbClr val="212B32"/>
+                </a:solidFill>
+                <a:latin typeface="Segoe UI" pitchFamily="34" charset="0"/>
+                <a:ea typeface="Segoe UI" pitchFamily="34" charset="-122"/>
+                <a:cs typeface="Segoe UI" pitchFamily="34" charset="-120"/>
+              </a:rPr>
+              <a:t>“Adam asked me whether I would be comfortable doing the next PSA at home. I said yes before he had finished the sentence.”</a:t>
+            </a:r>
+            <a:endParaRPr lang="en-US" sz="1150" dirty="0"/>
+          </a:p>
+        </p:txBody>
+      </p:sp>
+      <p:sp>
+        <p:nvSpPr>
+          <p:cNvPr id="13" name="Text 9"/>
+          <p:cNvSpPr/>
+          <p:nvPr/>
+        </p:nvSpPr>
+        <p:spPr>
+          <a:xfrm>
+            <a:off x="694944" y="4021074"/>
+            <a:ext cx="4507992" cy="256032"/>
+          </a:xfrm>
+          <a:prstGeom prst="rect">
+            <a:avLst/>
+          </a:prstGeom>
+          <a:noFill/>
+          <a:ln/>
+        </p:spPr>
+        <p:txBody>
+          <a:bodyPr wrap="square" lIns="0" tIns="0" rIns="0" bIns="0" rtlCol="0" anchor="ctr"/>
+          <a:lstStyle/>
+          <a:p>
+            <a:pPr indent="0" marL="0">
+              <a:buNone/>
+            </a:pPr>
+            <a:r>
+              <a:rPr lang="en-US" sz="950" b="1" dirty="0">
+                <a:solidFill>
+                  <a:srgbClr val="8A6D1F"/>
+                </a:solidFill>
+                <a:latin typeface="Segoe UI" pitchFamily="34" charset="0"/>
+                <a:ea typeface="Segoe UI" pitchFamily="34" charset="-122"/>
+                <a:cs typeface="Segoe UI" pitchFamily="34" charset="-120"/>
+              </a:rPr>
+              <a:t>Mark</a:t>
+            </a:r>
+            <a:endParaRPr lang="en-US" sz="950" dirty="0"/>
+          </a:p>
+        </p:txBody>
+      </p:sp>
+      <p:pic>
+        <p:nvPicPr>
+          <p:cNvPr id="14" name="Image 2" descr="/sessions/quirky-zen-galileo/mnt/outputs/jd/img/mark-stage2.jpg">    </p:cNvPr>
+          <p:cNvPicPr>
+            <a:picLocks noChangeAspect="1"/>
+          </p:cNvPicPr>
+          <p:nvPr/>
+        </p:nvPicPr>
+        <p:blipFill>
+          <a:blip r:embed="rId3"/>
+          <a:srcRect l="0" r="0" t="0" b="0"/>
+          <a:stretch/>
+        </p:blipFill>
+        <p:spPr>
+          <a:xfrm>
+            <a:off x="457200" y="4523994"/>
+            <a:ext cx="4892040" cy="1767078"/>
+          </a:xfrm>
+          <a:prstGeom prst="rect">
+            <a:avLst/>
+          </a:prstGeom>
+        </p:spPr>
+      </p:pic>
+      <p:sp>
+        <p:nvSpPr>
+          <p:cNvPr id="15" name="Shape 10"/>
+          <p:cNvSpPr/>
+          <p:nvPr/>
+        </p:nvSpPr>
+        <p:spPr>
+          <a:xfrm>
+            <a:off x="5669280" y="1184148"/>
             <a:ext cx="6065215" cy="274320"/>
           </a:xfrm>
           <a:prstGeom prst="rect">
@@ -5002,14 +5130,14 @@
       </p:sp>
       <p:sp>
         <p:nvSpPr>
-          <p:cNvPr id="15" name="Text 11"/>
-          <p:cNvSpPr/>
-          <p:nvPr/>
-        </p:nvSpPr>
-        <p:spPr>
-          <a:xfrm>
-            <a:off x="5779008" y="1097280"/>
-            <a:ext cx="5845759" cy="274320"/>
+          <p:cNvPr id="16" name="Text 11"/>
+          <p:cNvSpPr/>
+          <p:nvPr/>
+        </p:nvSpPr>
+        <p:spPr>
+          <a:xfrm>
+            <a:off x="5788152" y="1184148"/>
+            <a:ext cx="5827471" cy="274320"/>
           </a:xfrm>
           <a:prstGeom prst="rect">
             <a:avLst/>
@@ -5029,9 +5157,9 @@
                 <a:solidFill>
                   <a:srgbClr val="FFFFFF"/>
                 </a:solidFill>
-                <a:latin typeface="Arial" pitchFamily="34" charset="0"/>
-                <a:ea typeface="Arial" pitchFamily="34" charset="-122"/>
-                <a:cs typeface="Arial" pitchFamily="34" charset="-120"/>
+                <a:latin typeface="Segoe UI" pitchFamily="34" charset="0"/>
+                <a:ea typeface="Segoe UI" pitchFamily="34" charset="-122"/>
+                <a:cs typeface="Segoe UI" pitchFamily="34" charset="-120"/>
               </a:rPr>
               <a:t>WHAT THE MODEL IS DOING UNDERNEATH</a:t>
             </a:r>
@@ -5041,14 +5169,14 @@
       </p:sp>
       <p:sp>
         <p:nvSpPr>
-          <p:cNvPr id="16" name="Shape 12"/>
-          <p:cNvSpPr/>
-          <p:nvPr/>
-        </p:nvSpPr>
-        <p:spPr>
-          <a:xfrm>
-            <a:off x="5669280" y="1371600"/>
-            <a:ext cx="6065215" cy="712470"/>
+          <p:cNvPr id="17" name="Shape 12"/>
+          <p:cNvSpPr/>
+          <p:nvPr/>
+        </p:nvSpPr>
+        <p:spPr>
+          <a:xfrm>
+            <a:off x="5669280" y="1458468"/>
+            <a:ext cx="6065215" cy="720852"/>
           </a:xfrm>
           <a:prstGeom prst="rect">
             <a:avLst/>
@@ -5066,14 +5194,14 @@
       </p:sp>
       <p:sp>
         <p:nvSpPr>
-          <p:cNvPr id="17" name="Text 13"/>
-          <p:cNvSpPr/>
-          <p:nvPr/>
-        </p:nvSpPr>
-        <p:spPr>
-          <a:xfrm>
-            <a:off x="5779008" y="1408176"/>
-            <a:ext cx="5845759" cy="657606"/>
+          <p:cNvPr id="18" name="Text 13"/>
+          <p:cNvSpPr/>
+          <p:nvPr/>
+        </p:nvSpPr>
+        <p:spPr>
+          <a:xfrm>
+            <a:off x="5788152" y="1495044"/>
+            <a:ext cx="5827471" cy="665988"/>
           </a:xfrm>
           <a:prstGeom prst="rect">
             <a:avLst/>
@@ -5091,11 +5219,11 @@
             <a:r>
               <a:rPr lang="en-US" sz="1100" dirty="0">
                 <a:solidFill>
-                  <a:srgbClr val="231F20"/>
-                </a:solidFill>
-                <a:latin typeface="Arial" pitchFamily="34" charset="0"/>
-                <a:ea typeface="Arial" pitchFamily="34" charset="-122"/>
-                <a:cs typeface="Arial" pitchFamily="34" charset="-120"/>
+                  <a:srgbClr val="212B32"/>
+                </a:solidFill>
+                <a:latin typeface="Segoe UI" pitchFamily="34" charset="0"/>
+                <a:ea typeface="Segoe UI" pitchFamily="34" charset="-122"/>
+                <a:cs typeface="Segoe UI" pitchFamily="34" charset="-120"/>
               </a:rPr>
               <a:t>The first patients are picked by the consultant, in clinic, with consent and clinical judgement. The cohort is bounded carefully. The conversation is short because the model preserves the clinical role.</a:t>
             </a:r>
@@ -5105,13 +5233,13 @@
       </p:sp>
       <p:sp>
         <p:nvSpPr>
-          <p:cNvPr id="18" name="Shape 14"/>
-          <p:cNvSpPr/>
-          <p:nvPr/>
-        </p:nvSpPr>
-        <p:spPr>
-          <a:xfrm>
-            <a:off x="5669280" y="2212086"/>
+          <p:cNvPr id="19" name="Shape 14"/>
+          <p:cNvSpPr/>
+          <p:nvPr/>
+        </p:nvSpPr>
+        <p:spPr>
+          <a:xfrm>
+            <a:off x="5669280" y="2307336"/>
             <a:ext cx="6065215" cy="274320"/>
           </a:xfrm>
           <a:prstGeom prst="rect">
@@ -5130,14 +5258,14 @@
       </p:sp>
       <p:sp>
         <p:nvSpPr>
-          <p:cNvPr id="19" name="Text 15"/>
-          <p:cNvSpPr/>
-          <p:nvPr/>
-        </p:nvSpPr>
-        <p:spPr>
-          <a:xfrm>
-            <a:off x="5779008" y="2212086"/>
-            <a:ext cx="5845759" cy="274320"/>
+          <p:cNvPr id="20" name="Text 15"/>
+          <p:cNvSpPr/>
+          <p:nvPr/>
+        </p:nvSpPr>
+        <p:spPr>
+          <a:xfrm>
+            <a:off x="5788152" y="2307336"/>
+            <a:ext cx="5827471" cy="274320"/>
           </a:xfrm>
           <a:prstGeom prst="rect">
             <a:avLst/>
@@ -5157,9 +5285,9 @@
                 <a:solidFill>
                   <a:srgbClr val="FFFFFF"/>
                 </a:solidFill>
-                <a:latin typeface="Arial" pitchFamily="34" charset="0"/>
-                <a:ea typeface="Arial" pitchFamily="34" charset="-122"/>
-                <a:cs typeface="Arial" pitchFamily="34" charset="-120"/>
+                <a:latin typeface="Segoe UI" pitchFamily="34" charset="0"/>
+                <a:ea typeface="Segoe UI" pitchFamily="34" charset="-122"/>
+                <a:cs typeface="Segoe UI" pitchFamily="34" charset="-120"/>
               </a:rPr>
               <a:t>THE OLD WAY</a:t>
             </a:r>
@@ -5169,24 +5297,24 @@
       </p:sp>
       <p:sp>
         <p:nvSpPr>
-          <p:cNvPr id="20" name="Shape 16"/>
-          <p:cNvSpPr/>
-          <p:nvPr/>
-        </p:nvSpPr>
-        <p:spPr>
-          <a:xfrm>
-            <a:off x="5669280" y="2486406"/>
-            <a:ext cx="6065215" cy="542036"/>
-          </a:xfrm>
-          <a:prstGeom prst="rect">
-            <a:avLst/>
-          </a:prstGeom>
-          <a:solidFill>
-            <a:srgbClr val="F0F4F5"/>
+          <p:cNvPr id="21" name="Shape 16"/>
+          <p:cNvSpPr/>
+          <p:nvPr/>
+        </p:nvSpPr>
+        <p:spPr>
+          <a:xfrm>
+            <a:off x="5669280" y="2581656"/>
+            <a:ext cx="6065215" cy="547624"/>
+          </a:xfrm>
+          <a:prstGeom prst="rect">
+            <a:avLst/>
+          </a:prstGeom>
+          <a:solidFill>
+            <a:srgbClr val="F8FAFC"/>
           </a:solidFill>
           <a:ln w="12700">
             <a:solidFill>
-              <a:srgbClr val="F0F4F5"/>
+              <a:srgbClr val="F8FAFC"/>
             </a:solidFill>
             <a:prstDash val="solid"/>
           </a:ln>
@@ -5194,14 +5322,14 @@
       </p:sp>
       <p:sp>
         <p:nvSpPr>
-          <p:cNvPr id="21" name="Text 17"/>
-          <p:cNvSpPr/>
-          <p:nvPr/>
-        </p:nvSpPr>
-        <p:spPr>
-          <a:xfrm>
-            <a:off x="5779008" y="2522982"/>
-            <a:ext cx="5845759" cy="487172"/>
+          <p:cNvPr id="22" name="Text 17"/>
+          <p:cNvSpPr/>
+          <p:nvPr/>
+        </p:nvSpPr>
+        <p:spPr>
+          <a:xfrm>
+            <a:off x="5788152" y="2618232"/>
+            <a:ext cx="5827471" cy="492760"/>
           </a:xfrm>
           <a:prstGeom prst="rect">
             <a:avLst/>
@@ -5219,11 +5347,11 @@
             <a:r>
               <a:rPr lang="en-US" sz="1100" dirty="0">
                 <a:solidFill>
-                  <a:srgbClr val="231F20"/>
-                </a:solidFill>
-                <a:latin typeface="Arial" pitchFamily="34" charset="0"/>
-                <a:ea typeface="Arial" pitchFamily="34" charset="-122"/>
-                <a:cs typeface="Arial" pitchFamily="34" charset="-120"/>
+                  <a:srgbClr val="212B32"/>
+                </a:solidFill>
+                <a:latin typeface="Segoe UI" pitchFamily="34" charset="0"/>
+                <a:ea typeface="Segoe UI" pitchFamily="34" charset="-122"/>
+                <a:cs typeface="Segoe UI" pitchFamily="34" charset="-120"/>
               </a:rPr>
               <a:t>Bring everyone in for everything, because there is no other model on offer. The cohort is held by clinic capacity, not clinical judgement.</a:t>
             </a:r>
@@ -5233,13 +5361,13 @@
       </p:sp>
       <p:sp>
         <p:nvSpPr>
-          <p:cNvPr id="22" name="Shape 18"/>
-          <p:cNvSpPr/>
-          <p:nvPr/>
-        </p:nvSpPr>
-        <p:spPr>
-          <a:xfrm>
-            <a:off x="5669280" y="3156458"/>
+          <p:cNvPr id="23" name="Shape 18"/>
+          <p:cNvSpPr/>
+          <p:nvPr/>
+        </p:nvSpPr>
+        <p:spPr>
+          <a:xfrm>
+            <a:off x="5669280" y="3257296"/>
             <a:ext cx="6065215" cy="274320"/>
           </a:xfrm>
           <a:prstGeom prst="rect">
@@ -5258,14 +5386,14 @@
       </p:sp>
       <p:sp>
         <p:nvSpPr>
-          <p:cNvPr id="23" name="Text 19"/>
-          <p:cNvSpPr/>
-          <p:nvPr/>
-        </p:nvSpPr>
-        <p:spPr>
-          <a:xfrm>
-            <a:off x="5779008" y="3156458"/>
-            <a:ext cx="5845759" cy="274320"/>
+          <p:cNvPr id="24" name="Text 19"/>
+          <p:cNvSpPr/>
+          <p:nvPr/>
+        </p:nvSpPr>
+        <p:spPr>
+          <a:xfrm>
+            <a:off x="5788152" y="3257296"/>
+            <a:ext cx="5827471" cy="274320"/>
           </a:xfrm>
           <a:prstGeom prst="rect">
             <a:avLst/>
@@ -5285,9 +5413,9 @@
                 <a:solidFill>
                   <a:srgbClr val="FFFFFF"/>
                 </a:solidFill>
-                <a:latin typeface="Arial" pitchFamily="34" charset="0"/>
-                <a:ea typeface="Arial" pitchFamily="34" charset="-122"/>
-                <a:cs typeface="Arial" pitchFamily="34" charset="-120"/>
+                <a:latin typeface="Segoe UI" pitchFamily="34" charset="0"/>
+                <a:ea typeface="Segoe UI" pitchFamily="34" charset="-122"/>
+                <a:cs typeface="Segoe UI" pitchFamily="34" charset="-120"/>
               </a:rPr>
               <a:t>WHAT THE CARE TEAM SEES</a:t>
             </a:r>
@@ -5297,14 +5425,14 @@
       </p:sp>
       <p:sp>
         <p:nvSpPr>
-          <p:cNvPr id="24" name="Shape 20"/>
-          <p:cNvSpPr/>
-          <p:nvPr/>
-        </p:nvSpPr>
-        <p:spPr>
-          <a:xfrm>
-            <a:off x="5669280" y="3430778"/>
-            <a:ext cx="6065215" cy="371602"/>
+          <p:cNvPr id="25" name="Shape 20"/>
+          <p:cNvSpPr/>
+          <p:nvPr/>
+        </p:nvSpPr>
+        <p:spPr>
+          <a:xfrm>
+            <a:off x="5669280" y="3531616"/>
+            <a:ext cx="6065215" cy="374396"/>
           </a:xfrm>
           <a:prstGeom prst="rect">
             <a:avLst/>
@@ -5322,14 +5450,14 @@
       </p:sp>
       <p:sp>
         <p:nvSpPr>
-          <p:cNvPr id="25" name="Text 21"/>
-          <p:cNvSpPr/>
-          <p:nvPr/>
-        </p:nvSpPr>
-        <p:spPr>
-          <a:xfrm>
-            <a:off x="5779008" y="3467354"/>
-            <a:ext cx="5845759" cy="316738"/>
+          <p:cNvPr id="26" name="Text 21"/>
+          <p:cNvSpPr/>
+          <p:nvPr/>
+        </p:nvSpPr>
+        <p:spPr>
+          <a:xfrm>
+            <a:off x="5788152" y="3568192"/>
+            <a:ext cx="5827471" cy="319532"/>
           </a:xfrm>
           <a:prstGeom prst="rect">
             <a:avLst/>
@@ -5347,11 +5475,11 @@
             <a:r>
               <a:rPr lang="en-US" sz="1100" dirty="0">
                 <a:solidFill>
-                  <a:srgbClr val="231F20"/>
-                </a:solidFill>
-                <a:latin typeface="Arial" pitchFamily="34" charset="0"/>
-                <a:ea typeface="Arial" pitchFamily="34" charset="-122"/>
-                <a:cs typeface="Arial" pitchFamily="34" charset="-120"/>
+                  <a:srgbClr val="212B32"/>
+                </a:solidFill>
+                <a:latin typeface="Segoe UI" pitchFamily="34" charset="0"/>
+                <a:ea typeface="Segoe UI" pitchFamily="34" charset="-122"/>
+                <a:cs typeface="Segoe UI" pitchFamily="34" charset="-120"/>
               </a:rPr>
               <a:t>Adam. Clinical nurse specialist. Mark.</a:t>
             </a:r>
@@ -5361,14 +5489,14 @@
       </p:sp>
       <p:sp>
         <p:nvSpPr>
-          <p:cNvPr id="27" name="Text 22"/>
-          <p:cNvSpPr/>
-          <p:nvPr/>
-        </p:nvSpPr>
-        <p:spPr>
-          <a:xfrm>
-            <a:off x="457200" y="6473952"/>
-            <a:ext cx="3108960" cy="274320"/>
+          <p:cNvPr id="28" name="Text 22"/>
+          <p:cNvSpPr/>
+          <p:nvPr/>
+        </p:nvSpPr>
+        <p:spPr>
+          <a:xfrm>
+            <a:off x="457200" y="6455664"/>
+            <a:ext cx="4206240" cy="274320"/>
           </a:xfrm>
           <a:prstGeom prst="rect">
             <a:avLst/>
@@ -5388,9 +5516,9 @@
                 <a:solidFill>
                   <a:srgbClr val="7E8B97"/>
                 </a:solidFill>
-                <a:latin typeface="Arial" pitchFamily="34" charset="0"/>
-                <a:ea typeface="Arial" pitchFamily="34" charset="-122"/>
-                <a:cs typeface="Arial" pitchFamily="34" charset="-120"/>
+                <a:latin typeface="Segoe UI" pitchFamily="34" charset="0"/>
+                <a:ea typeface="Segoe UI" pitchFamily="34" charset="-122"/>
+                <a:cs typeface="Segoe UI" pitchFamily="34" charset="-120"/>
               </a:rPr>
               <a:t>Mark  ·  Hearts and Minds</a:t>
             </a:r>
@@ -5400,14 +5528,14 @@
       </p:sp>
       <p:sp>
         <p:nvSpPr>
-          <p:cNvPr id="28" name="Text 23"/>
-          <p:cNvSpPr/>
-          <p:nvPr/>
-        </p:nvSpPr>
-        <p:spPr>
-          <a:xfrm>
-            <a:off x="3657600" y="6473952"/>
-            <a:ext cx="7528255" cy="274320"/>
+          <p:cNvPr id="29" name="Text 23"/>
+          <p:cNvSpPr/>
+          <p:nvPr/>
+        </p:nvSpPr>
+        <p:spPr>
+          <a:xfrm>
+            <a:off x="4754880" y="6455664"/>
+            <a:ext cx="6430975" cy="274320"/>
           </a:xfrm>
           <a:prstGeom prst="rect">
             <a:avLst/>
@@ -5427,9 +5555,9 @@
                 <a:solidFill>
                   <a:srgbClr val="7E8B97"/>
                 </a:solidFill>
-                <a:latin typeface="Arial" pitchFamily="34" charset="0"/>
-                <a:ea typeface="Arial" pitchFamily="34" charset="-122"/>
-                <a:cs typeface="Arial" pitchFamily="34" charset="-120"/>
+                <a:latin typeface="Segoe UI" pitchFamily="34" charset="0"/>
+                <a:ea typeface="Segoe UI" pitchFamily="34" charset="-122"/>
+                <a:cs typeface="Segoe UI" pitchFamily="34" charset="-120"/>
               </a:rPr>
               <a:t>Commercial positions are agreed in principle and remain subject to the live procurement.</a:t>
             </a:r>
@@ -5439,14 +5567,14 @@
       </p:sp>
       <p:sp>
         <p:nvSpPr>
-          <p:cNvPr id="29" name="Text 24"/>
-          <p:cNvSpPr/>
-          <p:nvPr/>
-        </p:nvSpPr>
-        <p:spPr>
-          <a:xfrm>
-            <a:off x="11368735" y="6473952"/>
-            <a:ext cx="365760" cy="274320"/>
+          <p:cNvPr id="30" name="Text 24"/>
+          <p:cNvSpPr/>
+          <p:nvPr/>
+        </p:nvSpPr>
+        <p:spPr>
+          <a:xfrm>
+            <a:off x="11323015" y="6455664"/>
+            <a:ext cx="411480" cy="274320"/>
           </a:xfrm>
           <a:prstGeom prst="rect">
             <a:avLst/>
@@ -5466,9 +5594,9 @@
                 <a:solidFill>
                   <a:srgbClr val="7E8B97"/>
                 </a:solidFill>
-                <a:latin typeface="Arial" pitchFamily="34" charset="0"/>
-                <a:ea typeface="Arial" pitchFamily="34" charset="-122"/>
-                <a:cs typeface="Arial" pitchFamily="34" charset="-120"/>
+                <a:latin typeface="Segoe UI" pitchFamily="34" charset="0"/>
+                <a:ea typeface="Segoe UI" pitchFamily="34" charset="-122"/>
+                <a:cs typeface="Segoe UI" pitchFamily="34" charset="-120"/>
               </a:rPr>
               <a:t>4</a:t>
             </a:r>
@@ -5508,137 +5636,9 @@
           <a:chExt cx="0" cy="0"/>
         </a:xfrm>
       </p:grpSpPr>
-      <p:sp>
-        <p:nvSpPr>
-          <p:cNvPr id="2" name="Shape 0"/>
-          <p:cNvSpPr/>
-          <p:nvPr/>
-        </p:nvSpPr>
-        <p:spPr>
-          <a:xfrm>
-            <a:off x="0" y="0"/>
-            <a:ext cx="12191695" cy="868680"/>
-          </a:xfrm>
-          <a:prstGeom prst="rect">
-            <a:avLst/>
-          </a:prstGeom>
-          <a:solidFill>
-            <a:srgbClr val="003087"/>
-          </a:solidFill>
-          <a:ln w="12700">
-            <a:solidFill>
-              <a:srgbClr val="003087"/>
-            </a:solidFill>
-            <a:prstDash val="solid"/>
-          </a:ln>
-        </p:spPr>
-      </p:sp>
-      <p:sp>
-        <p:nvSpPr>
-          <p:cNvPr id="3" name="Shape 1"/>
-          <p:cNvSpPr/>
-          <p:nvPr/>
-        </p:nvSpPr>
-        <p:spPr>
-          <a:xfrm>
-            <a:off x="0" y="868680"/>
-            <a:ext cx="12191695" cy="54864"/>
-          </a:xfrm>
-          <a:prstGeom prst="rect">
-            <a:avLst/>
-          </a:prstGeom>
-          <a:solidFill>
-            <a:srgbClr val="FFB91D"/>
-          </a:solidFill>
-          <a:ln w="12700">
-            <a:solidFill>
-              <a:srgbClr val="FFB91D"/>
-            </a:solidFill>
-            <a:prstDash val="solid"/>
-          </a:ln>
-        </p:spPr>
-      </p:sp>
-      <p:sp>
-        <p:nvSpPr>
-          <p:cNvPr id="4" name="Text 2"/>
-          <p:cNvSpPr/>
-          <p:nvPr/>
-        </p:nvSpPr>
-        <p:spPr>
-          <a:xfrm>
-            <a:off x="457200" y="128016"/>
-            <a:ext cx="8686800" cy="256032"/>
-          </a:xfrm>
-          <a:prstGeom prst="rect">
-            <a:avLst/>
-          </a:prstGeom>
-          <a:noFill/>
-          <a:ln/>
-        </p:spPr>
-        <p:txBody>
-          <a:bodyPr wrap="square" lIns="0" tIns="0" rIns="0" bIns="0" rtlCol="0" anchor="ctr"/>
-          <a:lstStyle/>
-          <a:p>
-            <a:pPr indent="0" marL="0">
-              <a:buNone/>
-            </a:pPr>
-            <a:r>
-              <a:rPr lang="en-US" sz="950" b="1" spc="200" kern="0" dirty="0">
-                <a:solidFill>
-                  <a:srgbClr val="7EC8E3"/>
-                </a:solidFill>
-                <a:latin typeface="Arial" pitchFamily="34" charset="0"/>
-                <a:ea typeface="Arial" pitchFamily="34" charset="-122"/>
-                <a:cs typeface="Arial" pitchFamily="34" charset="-120"/>
-              </a:rPr>
-              <a:t>HEARTS AND MINDS  ·  MARK'S JOURNEY  ·  STAGE 3 OF 5</a:t>
-            </a:r>
-            <a:endParaRPr lang="en-US" sz="950" dirty="0"/>
-          </a:p>
-        </p:txBody>
-      </p:sp>
-      <p:sp>
-        <p:nvSpPr>
-          <p:cNvPr id="5" name="Text 3"/>
-          <p:cNvSpPr/>
-          <p:nvPr/>
-        </p:nvSpPr>
-        <p:spPr>
-          <a:xfrm>
-            <a:off x="457200" y="384048"/>
-            <a:ext cx="9601200" cy="411480"/>
-          </a:xfrm>
-          <a:prstGeom prst="rect">
-            <a:avLst/>
-          </a:prstGeom>
-          <a:noFill/>
-          <a:ln/>
-        </p:spPr>
-        <p:txBody>
-          <a:bodyPr wrap="square" lIns="0" tIns="0" rIns="0" bIns="0" rtlCol="0" anchor="ctr"/>
-          <a:lstStyle/>
-          <a:p>
-            <a:pPr indent="0" marL="0">
-              <a:buNone/>
-            </a:pPr>
-            <a:r>
-              <a:rPr lang="en-US" sz="2000" b="1" dirty="0">
-                <a:solidFill>
-                  <a:srgbClr val="FFFFFF"/>
-                </a:solidFill>
-                <a:latin typeface="Arial" pitchFamily="34" charset="0"/>
-                <a:ea typeface="Arial" pitchFamily="34" charset="-122"/>
-                <a:cs typeface="Arial" pitchFamily="34" charset="-120"/>
-              </a:rPr>
-              <a:t>Diagnosis, kit out, sample back, result to the consultant first</a:t>
-            </a:r>
-            <a:endParaRPr lang="en-US" sz="2000" dirty="0"/>
-          </a:p>
-        </p:txBody>
-      </p:sp>
       <p:pic>
         <p:nvPicPr>
-          <p:cNvPr id="6" name="Image 0" descr="/sessions/quirky-zen-galileo/mnt/outputs/deckbuild/nhs_logo.png">    </p:cNvPr>
+          <p:cNvPr id="2" name="Image 0" descr="/sessions/quirky-zen-galileo/mnt/NHS/07 Sites &amp; Repos/dtx-ecosystem/hearts-and-minds/_generators/assets/bg-band.jpg">    </p:cNvPr>
           <p:cNvPicPr>
             <a:picLocks noChangeAspect="1"/>
           </p:cNvPicPr>
@@ -5652,8 +5652,8 @@
         </p:blipFill>
         <p:spPr>
           <a:xfrm>
-            <a:off x="10774375" y="201168"/>
-            <a:ext cx="960120" cy="393192"/>
+            <a:off x="0" y="0"/>
+            <a:ext cx="12191695" cy="932688"/>
           </a:xfrm>
           <a:prstGeom prst="rect">
             <a:avLst/>
@@ -5662,119 +5662,14 @@
       </p:pic>
       <p:sp>
         <p:nvSpPr>
-          <p:cNvPr id="7" name="Text 4"/>
-          <p:cNvSpPr/>
-          <p:nvPr/>
-        </p:nvSpPr>
-        <p:spPr>
-          <a:xfrm>
-            <a:off x="429768" y="1024128"/>
-            <a:ext cx="1463040" cy="868680"/>
-          </a:xfrm>
-          <a:prstGeom prst="rect">
-            <a:avLst/>
-          </a:prstGeom>
-          <a:noFill/>
-          <a:ln/>
-        </p:spPr>
-        <p:txBody>
-          <a:bodyPr wrap="square" lIns="0" tIns="0" rIns="0" bIns="0" rtlCol="0" anchor="ctr"/>
-          <a:lstStyle/>
-          <a:p>
-            <a:pPr indent="0" marL="0">
-              <a:buNone/>
-            </a:pPr>
-            <a:r>
-              <a:rPr lang="en-US" sz="5200" b="1" dirty="0">
-                <a:solidFill>
-                  <a:srgbClr val="FFB91D"/>
-                </a:solidFill>
-                <a:latin typeface="Arial" pitchFamily="34" charset="0"/>
-                <a:ea typeface="Arial" pitchFamily="34" charset="-122"/>
-                <a:cs typeface="Arial" pitchFamily="34" charset="-120"/>
-              </a:rPr>
-              <a:t>03</a:t>
-            </a:r>
-            <a:endParaRPr lang="en-US" sz="5200" dirty="0"/>
-          </a:p>
-        </p:txBody>
-      </p:sp>
-      <p:sp>
-        <p:nvSpPr>
-          <p:cNvPr id="8" name="Text 5"/>
-          <p:cNvSpPr/>
-          <p:nvPr/>
-        </p:nvSpPr>
-        <p:spPr>
-          <a:xfrm>
-            <a:off x="457200" y="1920240"/>
-            <a:ext cx="4892040" cy="1137285"/>
-          </a:xfrm>
-          <a:prstGeom prst="rect">
-            <a:avLst/>
-          </a:prstGeom>
-          <a:noFill/>
-          <a:ln/>
-        </p:spPr>
-        <p:txBody>
-          <a:bodyPr wrap="square" lIns="0" tIns="0" rIns="0" bIns="0" rtlCol="0" anchor="t">
-            <a:normAutofit/>
-          </a:bodyPr>
-          <a:lstStyle/>
-          <a:p>
-            <a:pPr indent="0" marL="0">
-              <a:buNone/>
-            </a:pPr>
-            <a:r>
-              <a:rPr lang="en-US" sz="1350" b="1" dirty="0">
-                <a:solidFill>
-                  <a:srgbClr val="003087"/>
-                </a:solidFill>
-                <a:latin typeface="Arial" pitchFamily="34" charset="0"/>
-                <a:ea typeface="Arial" pitchFamily="34" charset="-122"/>
-                <a:cs typeface="Arial" pitchFamily="34" charset="-120"/>
-              </a:rPr>
-              <a:t>The kit arrives. Mark takes the sample at home on the day the clinic would have happened. The lab processes it. The result lands in Adam's system before the next clinic, in trend, with the threshold-alert logic wired in. Mark sees the result only after Adam has read it.</a:t>
-            </a:r>
-            <a:endParaRPr lang="en-US" sz="1350" dirty="0"/>
-          </a:p>
-        </p:txBody>
-      </p:sp>
-      <p:sp>
-        <p:nvSpPr>
-          <p:cNvPr id="9" name="Shape 6"/>
-          <p:cNvSpPr/>
-          <p:nvPr/>
-        </p:nvSpPr>
-        <p:spPr>
-          <a:xfrm>
-            <a:off x="457200" y="3167253"/>
-            <a:ext cx="4892040" cy="944499"/>
-          </a:xfrm>
-          <a:prstGeom prst="rect">
-            <a:avLst/>
-          </a:prstGeom>
-          <a:solidFill>
-            <a:srgbClr val="F0F4F5"/>
-          </a:solidFill>
-          <a:ln w="12700">
-            <a:solidFill>
-              <a:srgbClr val="F0F4F5"/>
-            </a:solidFill>
-            <a:prstDash val="solid"/>
-          </a:ln>
-        </p:spPr>
-      </p:sp>
-      <p:sp>
-        <p:nvSpPr>
-          <p:cNvPr id="10" name="Shape 7"/>
-          <p:cNvSpPr/>
-          <p:nvPr/>
-        </p:nvSpPr>
-        <p:spPr>
-          <a:xfrm>
-            <a:off x="457200" y="3167253"/>
-            <a:ext cx="82296" cy="944499"/>
+          <p:cNvPr id="3" name="Shape 0"/>
+          <p:cNvSpPr/>
+          <p:nvPr/>
+        </p:nvSpPr>
+        <p:spPr>
+          <a:xfrm>
+            <a:off x="0" y="932688"/>
+            <a:ext cx="12191695" cy="50292"/>
           </a:xfrm>
           <a:prstGeom prst="rect">
             <a:avLst/>
@@ -5792,23 +5687,62 @@
       </p:sp>
       <p:sp>
         <p:nvSpPr>
-          <p:cNvPr id="11" name="Text 8"/>
-          <p:cNvSpPr/>
-          <p:nvPr/>
-        </p:nvSpPr>
-        <p:spPr>
-          <a:xfrm>
-            <a:off x="685800" y="3222117"/>
-            <a:ext cx="4526280" cy="578739"/>
-          </a:xfrm>
-          <a:prstGeom prst="rect">
-            <a:avLst/>
-          </a:prstGeom>
-          <a:noFill/>
-          <a:ln/>
-        </p:spPr>
-        <p:txBody>
-          <a:bodyPr wrap="square" lIns="0" tIns="0" rIns="0" bIns="0" rtlCol="0" anchor="t">
+          <p:cNvPr id="4" name="Text 1"/>
+          <p:cNvSpPr/>
+          <p:nvPr/>
+        </p:nvSpPr>
+        <p:spPr>
+          <a:xfrm>
+            <a:off x="502920" y="137160"/>
+            <a:ext cx="8595360" cy="256032"/>
+          </a:xfrm>
+          <a:prstGeom prst="rect">
+            <a:avLst/>
+          </a:prstGeom>
+          <a:noFill/>
+          <a:ln/>
+        </p:spPr>
+        <p:txBody>
+          <a:bodyPr wrap="square" lIns="0" tIns="0" rIns="0" bIns="0" rtlCol="0" anchor="ctr"/>
+          <a:lstStyle/>
+          <a:p>
+            <a:pPr indent="0" marL="0">
+              <a:buNone/>
+            </a:pPr>
+            <a:r>
+              <a:rPr lang="en-US" sz="950" b="1" spc="240" kern="0" dirty="0">
+                <a:solidFill>
+                  <a:srgbClr val="FFD66B"/>
+                </a:solidFill>
+                <a:latin typeface="Segoe UI" pitchFamily="34" charset="0"/>
+                <a:ea typeface="Segoe UI" pitchFamily="34" charset="-122"/>
+                <a:cs typeface="Segoe UI" pitchFamily="34" charset="-120"/>
+              </a:rPr>
+              <a:t>HEARTS AND MINDS  ·  MARK’S JOURNEY  ·  STAGE 3 OF 5</a:t>
+            </a:r>
+            <a:endParaRPr lang="en-US" sz="950" dirty="0"/>
+          </a:p>
+        </p:txBody>
+      </p:sp>
+      <p:sp>
+        <p:nvSpPr>
+          <p:cNvPr id="5" name="Text 2"/>
+          <p:cNvSpPr/>
+          <p:nvPr/>
+        </p:nvSpPr>
+        <p:spPr>
+          <a:xfrm>
+            <a:off x="502920" y="402336"/>
+            <a:ext cx="9509760" cy="457200"/>
+          </a:xfrm>
+          <a:prstGeom prst="rect">
+            <a:avLst/>
+          </a:prstGeom>
+          <a:noFill/>
+          <a:ln/>
+        </p:spPr>
+        <p:txBody>
+          <a:bodyPr wrap="square" lIns="0" tIns="0" rIns="0" bIns="0" rtlCol="0" anchor="ctr">
             <a:normAutofit/>
           </a:bodyPr>
           <a:lstStyle/>
@@ -5817,62 +5751,50 @@
               <a:buNone/>
             </a:pPr>
             <a:r>
-              <a:rPr lang="en-US" sz="950" i="1" dirty="0">
-                <a:solidFill>
-                  <a:srgbClr val="231F20"/>
-                </a:solidFill>
-                <a:latin typeface="Arial" pitchFamily="34" charset="0"/>
-                <a:ea typeface="Arial" pitchFamily="34" charset="-122"/>
-                <a:cs typeface="Arial" pitchFamily="34" charset="-120"/>
-              </a:rPr>
-              <a:t>“The kit came in the post. I did it on the Saturday morning. By the following Tuesday I knew Adam had seen the result. Same answer I would have got at the hospital. None of the driving.”</a:t>
-            </a:r>
-            <a:endParaRPr lang="en-US" sz="950" dirty="0"/>
-          </a:p>
-        </p:txBody>
-      </p:sp>
-      <p:sp>
-        <p:nvSpPr>
-          <p:cNvPr id="12" name="Text 9"/>
-          <p:cNvSpPr/>
-          <p:nvPr/>
-        </p:nvSpPr>
-        <p:spPr>
-          <a:xfrm>
-            <a:off x="685800" y="3800856"/>
-            <a:ext cx="4526280" cy="256032"/>
-          </a:xfrm>
-          <a:prstGeom prst="rect">
-            <a:avLst/>
-          </a:prstGeom>
-          <a:noFill/>
-          <a:ln/>
-        </p:spPr>
-        <p:txBody>
-          <a:bodyPr wrap="square" lIns="0" tIns="0" rIns="0" bIns="0" rtlCol="0" anchor="ctr"/>
-          <a:lstStyle/>
-          <a:p>
-            <a:pPr indent="0" marL="0">
-              <a:buNone/>
-            </a:pPr>
-            <a:r>
-              <a:rPr lang="en-US" sz="950" b="1" dirty="0">
-                <a:solidFill>
-                  <a:srgbClr val="8A6D1F"/>
-                </a:solidFill>
-                <a:latin typeface="Arial" pitchFamily="34" charset="0"/>
-                <a:ea typeface="Arial" pitchFamily="34" charset="-122"/>
-                <a:cs typeface="Arial" pitchFamily="34" charset="-120"/>
-              </a:rPr>
-              <a:t>Mark</a:t>
-            </a:r>
-            <a:endParaRPr lang="en-US" sz="950" dirty="0"/>
-          </a:p>
-        </p:txBody>
+              <a:rPr lang="en-US" sz="2100" b="1" dirty="0">
+                <a:solidFill>
+                  <a:srgbClr val="FFFFFF"/>
+                </a:solidFill>
+                <a:latin typeface="Segoe UI" pitchFamily="34" charset="0"/>
+                <a:ea typeface="Segoe UI" pitchFamily="34" charset="-122"/>
+                <a:cs typeface="Segoe UI" pitchFamily="34" charset="-120"/>
+              </a:rPr>
+              <a:t>Diagnosis, kit out, sample back, result to the consultant first</a:t>
+            </a:r>
+            <a:endParaRPr lang="en-US" sz="2100" dirty="0"/>
+          </a:p>
+        </p:txBody>
+      </p:sp>
+      <p:sp>
+        <p:nvSpPr>
+          <p:cNvPr id="6" name="Shape 3"/>
+          <p:cNvSpPr/>
+          <p:nvPr/>
+        </p:nvSpPr>
+        <p:spPr>
+          <a:xfrm>
+            <a:off x="10942806" y="173736"/>
+            <a:ext cx="791689" cy="605699"/>
+          </a:xfrm>
+          <a:prstGeom prst="roundRect">
+            <a:avLst>
+              <a:gd name="adj" fmla="val 12077"/>
+            </a:avLst>
+          </a:prstGeom>
+          <a:solidFill>
+            <a:srgbClr val="FFFFFF"/>
+          </a:solidFill>
+          <a:ln w="12700">
+            <a:solidFill>
+              <a:srgbClr val="FFFFFF"/>
+            </a:solidFill>
+            <a:prstDash val="solid"/>
+          </a:ln>
+        </p:spPr>
       </p:sp>
       <p:pic>
         <p:nvPicPr>
-          <p:cNvPr id="13" name="Image 1" descr="/sessions/quirky-zen-galileo/mnt/outputs/hmdecks5/img/mark-stage3.jpg">    </p:cNvPr>
+          <p:cNvPr id="7" name="Image 1" descr="/sessions/quirky-zen-galileo/mnt/NHS/07 Sites &amp; Repos/dtx-ecosystem/hearts-and-minds/_generators/assets/nhs-logo.png">    </p:cNvPr>
           <p:cNvPicPr>
             <a:picLocks noChangeAspect="1"/>
           </p:cNvPicPr>
@@ -5886,8 +5808,8 @@
         </p:blipFill>
         <p:spPr>
           <a:xfrm>
-            <a:off x="457200" y="4276344"/>
-            <a:ext cx="3609721" cy="2014728"/>
+            <a:off x="11068993" y="266273"/>
+            <a:ext cx="539315" cy="420624"/>
           </a:xfrm>
           <a:prstGeom prst="rect">
             <a:avLst/>
@@ -5896,13 +5818,246 @@
       </p:pic>
       <p:sp>
         <p:nvSpPr>
-          <p:cNvPr id="14" name="Shape 10"/>
-          <p:cNvSpPr/>
-          <p:nvPr/>
-        </p:nvSpPr>
-        <p:spPr>
-          <a:xfrm>
-            <a:off x="5669280" y="1097280"/>
+          <p:cNvPr id="8" name="Text 4"/>
+          <p:cNvSpPr/>
+          <p:nvPr/>
+        </p:nvSpPr>
+        <p:spPr>
+          <a:xfrm>
+            <a:off x="429768" y="1129284"/>
+            <a:ext cx="1463040" cy="841248"/>
+          </a:xfrm>
+          <a:prstGeom prst="rect">
+            <a:avLst/>
+          </a:prstGeom>
+          <a:noFill/>
+          <a:ln/>
+        </p:spPr>
+        <p:txBody>
+          <a:bodyPr wrap="square" lIns="0" tIns="0" rIns="0" bIns="0" rtlCol="0" anchor="ctr"/>
+          <a:lstStyle/>
+          <a:p>
+            <a:pPr indent="0" marL="0">
+              <a:buNone/>
+            </a:pPr>
+            <a:r>
+              <a:rPr lang="en-US" sz="5000" b="1" spc="-100" kern="0" dirty="0">
+                <a:solidFill>
+                  <a:srgbClr val="FFB91D"/>
+                </a:solidFill>
+                <a:latin typeface="Segoe UI" pitchFamily="34" charset="0"/>
+                <a:ea typeface="Segoe UI" pitchFamily="34" charset="-122"/>
+                <a:cs typeface="Segoe UI" pitchFamily="34" charset="-120"/>
+              </a:rPr>
+              <a:t>03</a:t>
+            </a:r>
+            <a:endParaRPr lang="en-US" sz="5000" dirty="0"/>
+          </a:p>
+        </p:txBody>
+      </p:sp>
+      <p:sp>
+        <p:nvSpPr>
+          <p:cNvPr id="9" name="Text 5"/>
+          <p:cNvSpPr/>
+          <p:nvPr/>
+        </p:nvSpPr>
+        <p:spPr>
+          <a:xfrm>
+            <a:off x="457200" y="2007108"/>
+            <a:ext cx="4892040" cy="1154430"/>
+          </a:xfrm>
+          <a:prstGeom prst="rect">
+            <a:avLst/>
+          </a:prstGeom>
+          <a:noFill/>
+          <a:ln/>
+        </p:spPr>
+        <p:txBody>
+          <a:bodyPr wrap="square" lIns="0" tIns="0" rIns="0" bIns="0" rtlCol="0" anchor="t">
+            <a:normAutofit/>
+          </a:bodyPr>
+          <a:lstStyle/>
+          <a:p>
+            <a:pPr indent="0" marL="0">
+              <a:buNone/>
+            </a:pPr>
+            <a:r>
+              <a:rPr lang="en-US" sz="1350" b="1" dirty="0">
+                <a:solidFill>
+                  <a:srgbClr val="003087"/>
+                </a:solidFill>
+                <a:latin typeface="Segoe UI" pitchFamily="34" charset="0"/>
+                <a:ea typeface="Segoe UI" pitchFamily="34" charset="-122"/>
+                <a:cs typeface="Segoe UI" pitchFamily="34" charset="-120"/>
+              </a:rPr>
+              <a:t>The kit arrives. Mark takes the sample at home on the day the clinic would have happened. The lab processes it. The result lands in Adam's system before the next clinic, in trend, with the threshold-alert logic wired in. Mark sees the result only after Adam has read it.</a:t>
+            </a:r>
+            <a:endParaRPr lang="en-US" sz="1350" dirty="0"/>
+          </a:p>
+        </p:txBody>
+      </p:sp>
+      <p:sp>
+        <p:nvSpPr>
+          <p:cNvPr id="10" name="Shape 6"/>
+          <p:cNvSpPr/>
+          <p:nvPr/>
+        </p:nvSpPr>
+        <p:spPr>
+          <a:xfrm>
+            <a:off x="457200" y="3289554"/>
+            <a:ext cx="4892040" cy="1008126"/>
+          </a:xfrm>
+          <a:prstGeom prst="rect">
+            <a:avLst/>
+          </a:prstGeom>
+          <a:solidFill>
+            <a:srgbClr val="F8FAFC"/>
+          </a:solidFill>
+          <a:ln w="12700">
+            <a:solidFill>
+              <a:srgbClr val="F8FAFC"/>
+            </a:solidFill>
+            <a:prstDash val="solid"/>
+          </a:ln>
+        </p:spPr>
+      </p:sp>
+      <p:sp>
+        <p:nvSpPr>
+          <p:cNvPr id="11" name="Shape 7"/>
+          <p:cNvSpPr/>
+          <p:nvPr/>
+        </p:nvSpPr>
+        <p:spPr>
+          <a:xfrm>
+            <a:off x="457200" y="3289554"/>
+            <a:ext cx="82296" cy="1008126"/>
+          </a:xfrm>
+          <a:prstGeom prst="rect">
+            <a:avLst/>
+          </a:prstGeom>
+          <a:solidFill>
+            <a:srgbClr val="FFB91D"/>
+          </a:solidFill>
+          <a:ln w="12700">
+            <a:solidFill>
+              <a:srgbClr val="FFB91D"/>
+            </a:solidFill>
+            <a:prstDash val="solid"/>
+          </a:ln>
+        </p:spPr>
+      </p:sp>
+      <p:sp>
+        <p:nvSpPr>
+          <p:cNvPr id="12" name="Text 8"/>
+          <p:cNvSpPr/>
+          <p:nvPr/>
+        </p:nvSpPr>
+        <p:spPr>
+          <a:xfrm>
+            <a:off x="694944" y="3353562"/>
+            <a:ext cx="4507992" cy="624078"/>
+          </a:xfrm>
+          <a:prstGeom prst="rect">
+            <a:avLst/>
+          </a:prstGeom>
+          <a:noFill/>
+          <a:ln/>
+        </p:spPr>
+        <p:txBody>
+          <a:bodyPr wrap="square" lIns="0" tIns="0" rIns="0" bIns="0" rtlCol="0" anchor="t">
+            <a:normAutofit/>
+          </a:bodyPr>
+          <a:lstStyle/>
+          <a:p>
+            <a:pPr indent="0" marL="0">
+              <a:buNone/>
+            </a:pPr>
+            <a:r>
+              <a:rPr lang="en-US" sz="1050" i="1" dirty="0">
+                <a:solidFill>
+                  <a:srgbClr val="212B32"/>
+                </a:solidFill>
+                <a:latin typeface="Segoe UI" pitchFamily="34" charset="0"/>
+                <a:ea typeface="Segoe UI" pitchFamily="34" charset="-122"/>
+                <a:cs typeface="Segoe UI" pitchFamily="34" charset="-120"/>
+              </a:rPr>
+              <a:t>“The kit came in the post. I did it on the Saturday morning. By the following Tuesday I knew Adam had seen the result. Same answer I would have got at the hospital. None of the driving.”</a:t>
+            </a:r>
+            <a:endParaRPr lang="en-US" sz="1050" dirty="0"/>
+          </a:p>
+        </p:txBody>
+      </p:sp>
+      <p:sp>
+        <p:nvSpPr>
+          <p:cNvPr id="13" name="Text 9"/>
+          <p:cNvSpPr/>
+          <p:nvPr/>
+        </p:nvSpPr>
+        <p:spPr>
+          <a:xfrm>
+            <a:off x="694944" y="3977640"/>
+            <a:ext cx="4507992" cy="256032"/>
+          </a:xfrm>
+          <a:prstGeom prst="rect">
+            <a:avLst/>
+          </a:prstGeom>
+          <a:noFill/>
+          <a:ln/>
+        </p:spPr>
+        <p:txBody>
+          <a:bodyPr wrap="square" lIns="0" tIns="0" rIns="0" bIns="0" rtlCol="0" anchor="ctr"/>
+          <a:lstStyle/>
+          <a:p>
+            <a:pPr indent="0" marL="0">
+              <a:buNone/>
+            </a:pPr>
+            <a:r>
+              <a:rPr lang="en-US" sz="950" b="1" dirty="0">
+                <a:solidFill>
+                  <a:srgbClr val="8A6D1F"/>
+                </a:solidFill>
+                <a:latin typeface="Segoe UI" pitchFamily="34" charset="0"/>
+                <a:ea typeface="Segoe UI" pitchFamily="34" charset="-122"/>
+                <a:cs typeface="Segoe UI" pitchFamily="34" charset="-120"/>
+              </a:rPr>
+              <a:t>Mark</a:t>
+            </a:r>
+            <a:endParaRPr lang="en-US" sz="950" dirty="0"/>
+          </a:p>
+        </p:txBody>
+      </p:sp>
+      <p:pic>
+        <p:nvPicPr>
+          <p:cNvPr id="14" name="Image 2" descr="/sessions/quirky-zen-galileo/mnt/outputs/jd/img/mark-stage3.jpg">    </p:cNvPr>
+          <p:cNvPicPr>
+            <a:picLocks noChangeAspect="1"/>
+          </p:cNvPicPr>
+          <p:nvPr/>
+        </p:nvPicPr>
+        <p:blipFill>
+          <a:blip r:embed="rId3"/>
+          <a:srcRect l="0" r="0" t="0" b="0"/>
+          <a:stretch/>
+        </p:blipFill>
+        <p:spPr>
+          <a:xfrm>
+            <a:off x="457200" y="4480560"/>
+            <a:ext cx="4892040" cy="1810512"/>
+          </a:xfrm>
+          <a:prstGeom prst="rect">
+            <a:avLst/>
+          </a:prstGeom>
+        </p:spPr>
+      </p:pic>
+      <p:sp>
+        <p:nvSpPr>
+          <p:cNvPr id="15" name="Shape 10"/>
+          <p:cNvSpPr/>
+          <p:nvPr/>
+        </p:nvSpPr>
+        <p:spPr>
+          <a:xfrm>
+            <a:off x="5669280" y="1184148"/>
             <a:ext cx="6065215" cy="274320"/>
           </a:xfrm>
           <a:prstGeom prst="rect">
@@ -5921,14 +6076,14 @@
       </p:sp>
       <p:sp>
         <p:nvSpPr>
-          <p:cNvPr id="15" name="Text 11"/>
-          <p:cNvSpPr/>
-          <p:nvPr/>
-        </p:nvSpPr>
-        <p:spPr>
-          <a:xfrm>
-            <a:off x="5779008" y="1097280"/>
-            <a:ext cx="5845759" cy="274320"/>
+          <p:cNvPr id="16" name="Text 11"/>
+          <p:cNvSpPr/>
+          <p:nvPr/>
+        </p:nvSpPr>
+        <p:spPr>
+          <a:xfrm>
+            <a:off x="5788152" y="1184148"/>
+            <a:ext cx="5827471" cy="274320"/>
           </a:xfrm>
           <a:prstGeom prst="rect">
             <a:avLst/>
@@ -5948,9 +6103,9 @@
                 <a:solidFill>
                   <a:srgbClr val="FFFFFF"/>
                 </a:solidFill>
-                <a:latin typeface="Arial" pitchFamily="34" charset="0"/>
-                <a:ea typeface="Arial" pitchFamily="34" charset="-122"/>
-                <a:cs typeface="Arial" pitchFamily="34" charset="-120"/>
+                <a:latin typeface="Segoe UI" pitchFamily="34" charset="0"/>
+                <a:ea typeface="Segoe UI" pitchFamily="34" charset="-122"/>
+                <a:cs typeface="Segoe UI" pitchFamily="34" charset="-120"/>
               </a:rPr>
               <a:t>WHAT THE MODEL IS DOING UNDERNEATH</a:t>
             </a:r>
@@ -5960,14 +6115,14 @@
       </p:sp>
       <p:sp>
         <p:nvSpPr>
-          <p:cNvPr id="16" name="Shape 12"/>
-          <p:cNvSpPr/>
-          <p:nvPr/>
-        </p:nvSpPr>
-        <p:spPr>
-          <a:xfrm>
-            <a:off x="5669280" y="1371600"/>
-            <a:ext cx="6065215" cy="712470"/>
+          <p:cNvPr id="17" name="Shape 12"/>
+          <p:cNvSpPr/>
+          <p:nvPr/>
+        </p:nvSpPr>
+        <p:spPr>
+          <a:xfrm>
+            <a:off x="5669280" y="1458468"/>
+            <a:ext cx="6065215" cy="720852"/>
           </a:xfrm>
           <a:prstGeom prst="rect">
             <a:avLst/>
@@ -5985,14 +6140,14 @@
       </p:sp>
       <p:sp>
         <p:nvSpPr>
-          <p:cNvPr id="17" name="Text 13"/>
-          <p:cNvSpPr/>
-          <p:nvPr/>
-        </p:nvSpPr>
-        <p:spPr>
-          <a:xfrm>
-            <a:off x="5779008" y="1408176"/>
-            <a:ext cx="5845759" cy="657606"/>
+          <p:cNvPr id="18" name="Text 13"/>
+          <p:cNvSpPr/>
+          <p:nvPr/>
+        </p:nvSpPr>
+        <p:spPr>
+          <a:xfrm>
+            <a:off x="5788152" y="1495044"/>
+            <a:ext cx="5827471" cy="665988"/>
           </a:xfrm>
           <a:prstGeom prst="rect">
             <a:avLst/>
@@ -6010,11 +6165,11 @@
             <a:r>
               <a:rPr lang="en-US" sz="1100" dirty="0">
                 <a:solidFill>
-                  <a:srgbClr val="231F20"/>
-                </a:solidFill>
-                <a:latin typeface="Arial" pitchFamily="34" charset="0"/>
-                <a:ea typeface="Arial" pitchFamily="34" charset="-122"/>
-                <a:cs typeface="Arial" pitchFamily="34" charset="-120"/>
+                  <a:srgbClr val="212B32"/>
+                </a:solidFill>
+                <a:latin typeface="Segoe UI" pitchFamily="34" charset="0"/>
+                <a:ea typeface="Segoe UI" pitchFamily="34" charset="-122"/>
+                <a:cs typeface="Segoe UI" pitchFamily="34" charset="-120"/>
               </a:rPr>
               <a:t>1.25 billion NHS pathology test requests per year, growing ~5.5% annually. Home capillary PSA is the same biochemical assay run on the same lab platform. The clinical interpretation is preserved.</a:t>
             </a:r>
@@ -6024,13 +6179,13 @@
       </p:sp>
       <p:sp>
         <p:nvSpPr>
-          <p:cNvPr id="18" name="Shape 14"/>
-          <p:cNvSpPr/>
-          <p:nvPr/>
-        </p:nvSpPr>
-        <p:spPr>
-          <a:xfrm>
-            <a:off x="5669280" y="2212086"/>
+          <p:cNvPr id="19" name="Shape 14"/>
+          <p:cNvSpPr/>
+          <p:nvPr/>
+        </p:nvSpPr>
+        <p:spPr>
+          <a:xfrm>
+            <a:off x="5669280" y="2307336"/>
             <a:ext cx="6065215" cy="274320"/>
           </a:xfrm>
           <a:prstGeom prst="rect">
@@ -6049,14 +6204,14 @@
       </p:sp>
       <p:sp>
         <p:nvSpPr>
-          <p:cNvPr id="19" name="Text 15"/>
-          <p:cNvSpPr/>
-          <p:nvPr/>
-        </p:nvSpPr>
-        <p:spPr>
-          <a:xfrm>
-            <a:off x="5779008" y="2212086"/>
-            <a:ext cx="5845759" cy="274320"/>
+          <p:cNvPr id="20" name="Text 15"/>
+          <p:cNvSpPr/>
+          <p:nvPr/>
+        </p:nvSpPr>
+        <p:spPr>
+          <a:xfrm>
+            <a:off x="5788152" y="2307336"/>
+            <a:ext cx="5827471" cy="274320"/>
           </a:xfrm>
           <a:prstGeom prst="rect">
             <a:avLst/>
@@ -6076,9 +6231,9 @@
                 <a:solidFill>
                   <a:srgbClr val="FFFFFF"/>
                 </a:solidFill>
-                <a:latin typeface="Arial" pitchFamily="34" charset="0"/>
-                <a:ea typeface="Arial" pitchFamily="34" charset="-122"/>
-                <a:cs typeface="Arial" pitchFamily="34" charset="-120"/>
+                <a:latin typeface="Segoe UI" pitchFamily="34" charset="0"/>
+                <a:ea typeface="Segoe UI" pitchFamily="34" charset="-122"/>
+                <a:cs typeface="Segoe UI" pitchFamily="34" charset="-120"/>
               </a:rPr>
               <a:t>THE OLD WAY</a:t>
             </a:r>
@@ -6088,24 +6243,24 @@
       </p:sp>
       <p:sp>
         <p:nvSpPr>
-          <p:cNvPr id="20" name="Shape 16"/>
-          <p:cNvSpPr/>
-          <p:nvPr/>
-        </p:nvSpPr>
-        <p:spPr>
-          <a:xfrm>
-            <a:off x="5669280" y="2486406"/>
-            <a:ext cx="6065215" cy="542036"/>
-          </a:xfrm>
-          <a:prstGeom prst="rect">
-            <a:avLst/>
-          </a:prstGeom>
-          <a:solidFill>
-            <a:srgbClr val="F0F4F5"/>
+          <p:cNvPr id="21" name="Shape 16"/>
+          <p:cNvSpPr/>
+          <p:nvPr/>
+        </p:nvSpPr>
+        <p:spPr>
+          <a:xfrm>
+            <a:off x="5669280" y="2581656"/>
+            <a:ext cx="6065215" cy="547624"/>
+          </a:xfrm>
+          <a:prstGeom prst="rect">
+            <a:avLst/>
+          </a:prstGeom>
+          <a:solidFill>
+            <a:srgbClr val="F8FAFC"/>
           </a:solidFill>
           <a:ln w="12700">
             <a:solidFill>
-              <a:srgbClr val="F0F4F5"/>
+              <a:srgbClr val="F8FAFC"/>
             </a:solidFill>
             <a:prstDash val="solid"/>
           </a:ln>
@@ -6113,14 +6268,14 @@
       </p:sp>
       <p:sp>
         <p:nvSpPr>
-          <p:cNvPr id="21" name="Text 17"/>
-          <p:cNvSpPr/>
-          <p:nvPr/>
-        </p:nvSpPr>
-        <p:spPr>
-          <a:xfrm>
-            <a:off x="5779008" y="2522982"/>
-            <a:ext cx="5845759" cy="487172"/>
+          <p:cNvPr id="22" name="Text 17"/>
+          <p:cNvSpPr/>
+          <p:nvPr/>
+        </p:nvSpPr>
+        <p:spPr>
+          <a:xfrm>
+            <a:off x="5788152" y="2618232"/>
+            <a:ext cx="5827471" cy="492760"/>
           </a:xfrm>
           <a:prstGeom prst="rect">
             <a:avLst/>
@@ -6138,11 +6293,11 @@
             <a:r>
               <a:rPr lang="en-US" sz="1100" dirty="0">
                 <a:solidFill>
-                  <a:srgbClr val="231F20"/>
-                </a:solidFill>
-                <a:latin typeface="Arial" pitchFamily="34" charset="0"/>
-                <a:ea typeface="Arial" pitchFamily="34" charset="-122"/>
-                <a:cs typeface="Arial" pitchFamily="34" charset="-120"/>
+                  <a:srgbClr val="212B32"/>
+                </a:solidFill>
+                <a:latin typeface="Segoe UI" pitchFamily="34" charset="0"/>
+                <a:ea typeface="Segoe UI" pitchFamily="34" charset="-122"/>
+                <a:cs typeface="Segoe UI" pitchFamily="34" charset="-120"/>
               </a:rPr>
               <a:t>Two trips to the hospital, phlebotomy for the blood, second trip for the result. Or, on a bad cycle, a missed appointment and a quietly delayed surveillance round.</a:t>
             </a:r>
@@ -6152,13 +6307,13 @@
       </p:sp>
       <p:sp>
         <p:nvSpPr>
-          <p:cNvPr id="22" name="Shape 18"/>
-          <p:cNvSpPr/>
-          <p:nvPr/>
-        </p:nvSpPr>
-        <p:spPr>
-          <a:xfrm>
-            <a:off x="5669280" y="3156458"/>
+          <p:cNvPr id="23" name="Shape 18"/>
+          <p:cNvSpPr/>
+          <p:nvPr/>
+        </p:nvSpPr>
+        <p:spPr>
+          <a:xfrm>
+            <a:off x="5669280" y="3257296"/>
             <a:ext cx="6065215" cy="274320"/>
           </a:xfrm>
           <a:prstGeom prst="rect">
@@ -6177,14 +6332,14 @@
       </p:sp>
       <p:sp>
         <p:nvSpPr>
-          <p:cNvPr id="23" name="Text 19"/>
-          <p:cNvSpPr/>
-          <p:nvPr/>
-        </p:nvSpPr>
-        <p:spPr>
-          <a:xfrm>
-            <a:off x="5779008" y="3156458"/>
-            <a:ext cx="5845759" cy="274320"/>
+          <p:cNvPr id="24" name="Text 19"/>
+          <p:cNvSpPr/>
+          <p:nvPr/>
+        </p:nvSpPr>
+        <p:spPr>
+          <a:xfrm>
+            <a:off x="5788152" y="3257296"/>
+            <a:ext cx="5827471" cy="274320"/>
           </a:xfrm>
           <a:prstGeom prst="rect">
             <a:avLst/>
@@ -6204,9 +6359,9 @@
                 <a:solidFill>
                   <a:srgbClr val="FFFFFF"/>
                 </a:solidFill>
-                <a:latin typeface="Arial" pitchFamily="34" charset="0"/>
-                <a:ea typeface="Arial" pitchFamily="34" charset="-122"/>
-                <a:cs typeface="Arial" pitchFamily="34" charset="-120"/>
+                <a:latin typeface="Segoe UI" pitchFamily="34" charset="0"/>
+                <a:ea typeface="Segoe UI" pitchFamily="34" charset="-122"/>
+                <a:cs typeface="Segoe UI" pitchFamily="34" charset="-120"/>
               </a:rPr>
               <a:t>WHAT THE CARE TEAM SEES</a:t>
             </a:r>
@@ -6216,14 +6371,14 @@
       </p:sp>
       <p:sp>
         <p:nvSpPr>
-          <p:cNvPr id="24" name="Shape 20"/>
-          <p:cNvSpPr/>
-          <p:nvPr/>
-        </p:nvSpPr>
-        <p:spPr>
-          <a:xfrm>
-            <a:off x="5669280" y="3430778"/>
-            <a:ext cx="6065215" cy="542036"/>
+          <p:cNvPr id="25" name="Shape 20"/>
+          <p:cNvSpPr/>
+          <p:nvPr/>
+        </p:nvSpPr>
+        <p:spPr>
+          <a:xfrm>
+            <a:off x="5669280" y="3531616"/>
+            <a:ext cx="6065215" cy="547624"/>
           </a:xfrm>
           <a:prstGeom prst="rect">
             <a:avLst/>
@@ -6241,14 +6396,14 @@
       </p:sp>
       <p:sp>
         <p:nvSpPr>
-          <p:cNvPr id="25" name="Text 21"/>
-          <p:cNvSpPr/>
-          <p:nvPr/>
-        </p:nvSpPr>
-        <p:spPr>
-          <a:xfrm>
-            <a:off x="5779008" y="3467354"/>
-            <a:ext cx="5845759" cy="487172"/>
+          <p:cNvPr id="26" name="Text 21"/>
+          <p:cNvSpPr/>
+          <p:nvPr/>
+        </p:nvSpPr>
+        <p:spPr>
+          <a:xfrm>
+            <a:off x="5788152" y="3568192"/>
+            <a:ext cx="5827471" cy="492760"/>
           </a:xfrm>
           <a:prstGeom prst="rect">
             <a:avLst/>
@@ -6266,11 +6421,11 @@
             <a:r>
               <a:rPr lang="en-US" sz="1100" dirty="0">
                 <a:solidFill>
-                  <a:srgbClr val="231F20"/>
-                </a:solidFill>
-                <a:latin typeface="Arial" pitchFamily="34" charset="0"/>
-                <a:ea typeface="Arial" pitchFamily="34" charset="-122"/>
-                <a:cs typeface="Arial" pitchFamily="34" charset="-120"/>
+                  <a:srgbClr val="212B32"/>
+                </a:solidFill>
+                <a:latin typeface="Segoe UI" pitchFamily="34" charset="0"/>
+                <a:ea typeface="Segoe UI" pitchFamily="34" charset="-122"/>
+                <a:cs typeface="Segoe UI" pitchFamily="34" charset="-120"/>
               </a:rPr>
               <a:t>The supplier shipping the kit. UKAS-accredited lab. Platform writing the result back to the Trust EPR. Adam reading the trend.</a:t>
             </a:r>
@@ -6280,14 +6435,14 @@
       </p:sp>
       <p:sp>
         <p:nvSpPr>
-          <p:cNvPr id="27" name="Text 22"/>
-          <p:cNvSpPr/>
-          <p:nvPr/>
-        </p:nvSpPr>
-        <p:spPr>
-          <a:xfrm>
-            <a:off x="457200" y="6473952"/>
-            <a:ext cx="3108960" cy="274320"/>
+          <p:cNvPr id="28" name="Text 22"/>
+          <p:cNvSpPr/>
+          <p:nvPr/>
+        </p:nvSpPr>
+        <p:spPr>
+          <a:xfrm>
+            <a:off x="457200" y="6455664"/>
+            <a:ext cx="4206240" cy="274320"/>
           </a:xfrm>
           <a:prstGeom prst="rect">
             <a:avLst/>
@@ -6307,9 +6462,9 @@
                 <a:solidFill>
                   <a:srgbClr val="7E8B97"/>
                 </a:solidFill>
-                <a:latin typeface="Arial" pitchFamily="34" charset="0"/>
-                <a:ea typeface="Arial" pitchFamily="34" charset="-122"/>
-                <a:cs typeface="Arial" pitchFamily="34" charset="-120"/>
+                <a:latin typeface="Segoe UI" pitchFamily="34" charset="0"/>
+                <a:ea typeface="Segoe UI" pitchFamily="34" charset="-122"/>
+                <a:cs typeface="Segoe UI" pitchFamily="34" charset="-120"/>
               </a:rPr>
               <a:t>Mark  ·  Hearts and Minds</a:t>
             </a:r>
@@ -6319,14 +6474,14 @@
       </p:sp>
       <p:sp>
         <p:nvSpPr>
-          <p:cNvPr id="28" name="Text 23"/>
-          <p:cNvSpPr/>
-          <p:nvPr/>
-        </p:nvSpPr>
-        <p:spPr>
-          <a:xfrm>
-            <a:off x="3657600" y="6473952"/>
-            <a:ext cx="7528255" cy="274320"/>
+          <p:cNvPr id="29" name="Text 23"/>
+          <p:cNvSpPr/>
+          <p:nvPr/>
+        </p:nvSpPr>
+        <p:spPr>
+          <a:xfrm>
+            <a:off x="4754880" y="6455664"/>
+            <a:ext cx="6430975" cy="274320"/>
           </a:xfrm>
           <a:prstGeom prst="rect">
             <a:avLst/>
@@ -6346,9 +6501,9 @@
                 <a:solidFill>
                   <a:srgbClr val="7E8B97"/>
                 </a:solidFill>
-                <a:latin typeface="Arial" pitchFamily="34" charset="0"/>
-                <a:ea typeface="Arial" pitchFamily="34" charset="-122"/>
-                <a:cs typeface="Arial" pitchFamily="34" charset="-120"/>
+                <a:latin typeface="Segoe UI" pitchFamily="34" charset="0"/>
+                <a:ea typeface="Segoe UI" pitchFamily="34" charset="-122"/>
+                <a:cs typeface="Segoe UI" pitchFamily="34" charset="-120"/>
               </a:rPr>
               <a:t>Commercial positions are agreed in principle and remain subject to the live procurement.</a:t>
             </a:r>
@@ -6358,14 +6513,14 @@
       </p:sp>
       <p:sp>
         <p:nvSpPr>
-          <p:cNvPr id="29" name="Text 24"/>
-          <p:cNvSpPr/>
-          <p:nvPr/>
-        </p:nvSpPr>
-        <p:spPr>
-          <a:xfrm>
-            <a:off x="11368735" y="6473952"/>
-            <a:ext cx="365760" cy="274320"/>
+          <p:cNvPr id="30" name="Text 24"/>
+          <p:cNvSpPr/>
+          <p:nvPr/>
+        </p:nvSpPr>
+        <p:spPr>
+          <a:xfrm>
+            <a:off x="11323015" y="6455664"/>
+            <a:ext cx="411480" cy="274320"/>
           </a:xfrm>
           <a:prstGeom prst="rect">
             <a:avLst/>
@@ -6385,9 +6540,9 @@
                 <a:solidFill>
                   <a:srgbClr val="7E8B97"/>
                 </a:solidFill>
-                <a:latin typeface="Arial" pitchFamily="34" charset="0"/>
-                <a:ea typeface="Arial" pitchFamily="34" charset="-122"/>
-                <a:cs typeface="Arial" pitchFamily="34" charset="-120"/>
+                <a:latin typeface="Segoe UI" pitchFamily="34" charset="0"/>
+                <a:ea typeface="Segoe UI" pitchFamily="34" charset="-122"/>
+                <a:cs typeface="Segoe UI" pitchFamily="34" charset="-120"/>
               </a:rPr>
               <a:t>5</a:t>
             </a:r>
@@ -6427,137 +6582,9 @@
           <a:chExt cx="0" cy="0"/>
         </a:xfrm>
       </p:grpSpPr>
-      <p:sp>
-        <p:nvSpPr>
-          <p:cNvPr id="2" name="Shape 0"/>
-          <p:cNvSpPr/>
-          <p:nvPr/>
-        </p:nvSpPr>
-        <p:spPr>
-          <a:xfrm>
-            <a:off x="0" y="0"/>
-            <a:ext cx="12191695" cy="868680"/>
-          </a:xfrm>
-          <a:prstGeom prst="rect">
-            <a:avLst/>
-          </a:prstGeom>
-          <a:solidFill>
-            <a:srgbClr val="003087"/>
-          </a:solidFill>
-          <a:ln w="12700">
-            <a:solidFill>
-              <a:srgbClr val="003087"/>
-            </a:solidFill>
-            <a:prstDash val="solid"/>
-          </a:ln>
-        </p:spPr>
-      </p:sp>
-      <p:sp>
-        <p:nvSpPr>
-          <p:cNvPr id="3" name="Shape 1"/>
-          <p:cNvSpPr/>
-          <p:nvPr/>
-        </p:nvSpPr>
-        <p:spPr>
-          <a:xfrm>
-            <a:off x="0" y="868680"/>
-            <a:ext cx="12191695" cy="54864"/>
-          </a:xfrm>
-          <a:prstGeom prst="rect">
-            <a:avLst/>
-          </a:prstGeom>
-          <a:solidFill>
-            <a:srgbClr val="FFB91D"/>
-          </a:solidFill>
-          <a:ln w="12700">
-            <a:solidFill>
-              <a:srgbClr val="FFB91D"/>
-            </a:solidFill>
-            <a:prstDash val="solid"/>
-          </a:ln>
-        </p:spPr>
-      </p:sp>
-      <p:sp>
-        <p:nvSpPr>
-          <p:cNvPr id="4" name="Text 2"/>
-          <p:cNvSpPr/>
-          <p:nvPr/>
-        </p:nvSpPr>
-        <p:spPr>
-          <a:xfrm>
-            <a:off x="457200" y="128016"/>
-            <a:ext cx="8686800" cy="256032"/>
-          </a:xfrm>
-          <a:prstGeom prst="rect">
-            <a:avLst/>
-          </a:prstGeom>
-          <a:noFill/>
-          <a:ln/>
-        </p:spPr>
-        <p:txBody>
-          <a:bodyPr wrap="square" lIns="0" tIns="0" rIns="0" bIns="0" rtlCol="0" anchor="ctr"/>
-          <a:lstStyle/>
-          <a:p>
-            <a:pPr indent="0" marL="0">
-              <a:buNone/>
-            </a:pPr>
-            <a:r>
-              <a:rPr lang="en-US" sz="950" b="1" spc="200" kern="0" dirty="0">
-                <a:solidFill>
-                  <a:srgbClr val="7EC8E3"/>
-                </a:solidFill>
-                <a:latin typeface="Arial" pitchFamily="34" charset="0"/>
-                <a:ea typeface="Arial" pitchFamily="34" charset="-122"/>
-                <a:cs typeface="Arial" pitchFamily="34" charset="-120"/>
-              </a:rPr>
-              <a:t>HEARTS AND MINDS  ·  MARK'S JOURNEY  ·  STAGE 4 OF 5</a:t>
-            </a:r>
-            <a:endParaRPr lang="en-US" sz="950" dirty="0"/>
-          </a:p>
-        </p:txBody>
-      </p:sp>
-      <p:sp>
-        <p:nvSpPr>
-          <p:cNvPr id="5" name="Text 3"/>
-          <p:cNvSpPr/>
-          <p:nvPr/>
-        </p:nvSpPr>
-        <p:spPr>
-          <a:xfrm>
-            <a:off x="457200" y="384048"/>
-            <a:ext cx="9601200" cy="411480"/>
-          </a:xfrm>
-          <a:prstGeom prst="rect">
-            <a:avLst/>
-          </a:prstGeom>
-          <a:noFill/>
-          <a:ln/>
-        </p:spPr>
-        <p:txBody>
-          <a:bodyPr wrap="square" lIns="0" tIns="0" rIns="0" bIns="0" rtlCol="0" anchor="ctr"/>
-          <a:lstStyle/>
-          <a:p>
-            <a:pPr indent="0" marL="0">
-              <a:buNone/>
-            </a:pPr>
-            <a:r>
-              <a:rPr lang="en-US" sz="2000" b="1" dirty="0">
-                <a:solidFill>
-                  <a:srgbClr val="FFFFFF"/>
-                </a:solidFill>
-                <a:latin typeface="Arial" pitchFamily="34" charset="0"/>
-                <a:ea typeface="Arial" pitchFamily="34" charset="-122"/>
-                <a:cs typeface="Arial" pitchFamily="34" charset="-120"/>
-              </a:rPr>
-              <a:t>Treatment, the surveillance itself</a:t>
-            </a:r>
-            <a:endParaRPr lang="en-US" sz="2000" dirty="0"/>
-          </a:p>
-        </p:txBody>
-      </p:sp>
       <p:pic>
         <p:nvPicPr>
-          <p:cNvPr id="6" name="Image 0" descr="/sessions/quirky-zen-galileo/mnt/outputs/deckbuild/nhs_logo.png">    </p:cNvPr>
+          <p:cNvPr id="2" name="Image 0" descr="/sessions/quirky-zen-galileo/mnt/NHS/07 Sites &amp; Repos/dtx-ecosystem/hearts-and-minds/_generators/assets/bg-band.jpg">    </p:cNvPr>
           <p:cNvPicPr>
             <a:picLocks noChangeAspect="1"/>
           </p:cNvPicPr>
@@ -6571,8 +6598,8 @@
         </p:blipFill>
         <p:spPr>
           <a:xfrm>
-            <a:off x="10774375" y="201168"/>
-            <a:ext cx="960120" cy="393192"/>
+            <a:off x="0" y="0"/>
+            <a:ext cx="12191695" cy="932688"/>
           </a:xfrm>
           <a:prstGeom prst="rect">
             <a:avLst/>
@@ -6581,119 +6608,14 @@
       </p:pic>
       <p:sp>
         <p:nvSpPr>
-          <p:cNvPr id="7" name="Text 4"/>
-          <p:cNvSpPr/>
-          <p:nvPr/>
-        </p:nvSpPr>
-        <p:spPr>
-          <a:xfrm>
-            <a:off x="429768" y="1024128"/>
-            <a:ext cx="1463040" cy="868680"/>
-          </a:xfrm>
-          <a:prstGeom prst="rect">
-            <a:avLst/>
-          </a:prstGeom>
-          <a:noFill/>
-          <a:ln/>
-        </p:spPr>
-        <p:txBody>
-          <a:bodyPr wrap="square" lIns="0" tIns="0" rIns="0" bIns="0" rtlCol="0" anchor="ctr"/>
-          <a:lstStyle/>
-          <a:p>
-            <a:pPr indent="0" marL="0">
-              <a:buNone/>
-            </a:pPr>
-            <a:r>
-              <a:rPr lang="en-US" sz="5200" b="1" dirty="0">
-                <a:solidFill>
-                  <a:srgbClr val="FFB91D"/>
-                </a:solidFill>
-                <a:latin typeface="Arial" pitchFamily="34" charset="0"/>
-                <a:ea typeface="Arial" pitchFamily="34" charset="-122"/>
-                <a:cs typeface="Arial" pitchFamily="34" charset="-120"/>
-              </a:rPr>
-              <a:t>04</a:t>
-            </a:r>
-            <a:endParaRPr lang="en-US" sz="5200" dirty="0"/>
-          </a:p>
-        </p:txBody>
-      </p:sp>
-      <p:sp>
-        <p:nvSpPr>
-          <p:cNvPr id="8" name="Text 5"/>
-          <p:cNvSpPr/>
-          <p:nvPr/>
-        </p:nvSpPr>
-        <p:spPr>
-          <a:xfrm>
-            <a:off x="457200" y="1920240"/>
-            <a:ext cx="4892040" cy="1021080"/>
-          </a:xfrm>
-          <a:prstGeom prst="rect">
-            <a:avLst/>
-          </a:prstGeom>
-          <a:noFill/>
-          <a:ln/>
-        </p:spPr>
-        <p:txBody>
-          <a:bodyPr wrap="square" lIns="0" tIns="0" rIns="0" bIns="0" rtlCol="0" anchor="t">
-            <a:normAutofit/>
-          </a:bodyPr>
-          <a:lstStyle/>
-          <a:p>
-            <a:pPr indent="0" marL="0">
-              <a:buNone/>
-            </a:pPr>
-            <a:r>
-              <a:rPr lang="en-US" sz="1200" b="1" dirty="0">
-                <a:solidFill>
-                  <a:srgbClr val="003087"/>
-                </a:solidFill>
-                <a:latin typeface="Arial" pitchFamily="34" charset="0"/>
-                <a:ea typeface="Arial" pitchFamily="34" charset="-122"/>
-                <a:cs typeface="Arial" pitchFamily="34" charset="-120"/>
-              </a:rPr>
-              <a:t>Active surveillance IS the treatment. The clinical work is the trend interpretation. Adam reads Mark's PSA in the context of every prior reading and the imaging cycle. Most cycles, nothing changes. The model has not removed the clinical decision; it has removed the unnecessary clinical visit.</a:t>
-            </a:r>
-            <a:endParaRPr lang="en-US" sz="1200" dirty="0"/>
-          </a:p>
-        </p:txBody>
-      </p:sp>
-      <p:sp>
-        <p:nvSpPr>
-          <p:cNvPr id="9" name="Shape 6"/>
-          <p:cNvSpPr/>
-          <p:nvPr/>
-        </p:nvSpPr>
-        <p:spPr>
-          <a:xfrm>
-            <a:off x="457200" y="3051048"/>
-            <a:ext cx="4892040" cy="944499"/>
-          </a:xfrm>
-          <a:prstGeom prst="rect">
-            <a:avLst/>
-          </a:prstGeom>
-          <a:solidFill>
-            <a:srgbClr val="F0F4F5"/>
-          </a:solidFill>
-          <a:ln w="12700">
-            <a:solidFill>
-              <a:srgbClr val="F0F4F5"/>
-            </a:solidFill>
-            <a:prstDash val="solid"/>
-          </a:ln>
-        </p:spPr>
-      </p:sp>
-      <p:sp>
-        <p:nvSpPr>
-          <p:cNvPr id="10" name="Shape 7"/>
-          <p:cNvSpPr/>
-          <p:nvPr/>
-        </p:nvSpPr>
-        <p:spPr>
-          <a:xfrm>
-            <a:off x="457200" y="3051048"/>
-            <a:ext cx="82296" cy="944499"/>
+          <p:cNvPr id="3" name="Shape 0"/>
+          <p:cNvSpPr/>
+          <p:nvPr/>
+        </p:nvSpPr>
+        <p:spPr>
+          <a:xfrm>
+            <a:off x="0" y="932688"/>
+            <a:ext cx="12191695" cy="50292"/>
           </a:xfrm>
           <a:prstGeom prst="rect">
             <a:avLst/>
@@ -6711,23 +6633,62 @@
       </p:sp>
       <p:sp>
         <p:nvSpPr>
-          <p:cNvPr id="11" name="Text 8"/>
-          <p:cNvSpPr/>
-          <p:nvPr/>
-        </p:nvSpPr>
-        <p:spPr>
-          <a:xfrm>
-            <a:off x="685800" y="3105912"/>
-            <a:ext cx="4526280" cy="578739"/>
-          </a:xfrm>
-          <a:prstGeom prst="rect">
-            <a:avLst/>
-          </a:prstGeom>
-          <a:noFill/>
-          <a:ln/>
-        </p:spPr>
-        <p:txBody>
-          <a:bodyPr wrap="square" lIns="0" tIns="0" rIns="0" bIns="0" rtlCol="0" anchor="t">
+          <p:cNvPr id="4" name="Text 1"/>
+          <p:cNvSpPr/>
+          <p:nvPr/>
+        </p:nvSpPr>
+        <p:spPr>
+          <a:xfrm>
+            <a:off x="502920" y="137160"/>
+            <a:ext cx="8595360" cy="256032"/>
+          </a:xfrm>
+          <a:prstGeom prst="rect">
+            <a:avLst/>
+          </a:prstGeom>
+          <a:noFill/>
+          <a:ln/>
+        </p:spPr>
+        <p:txBody>
+          <a:bodyPr wrap="square" lIns="0" tIns="0" rIns="0" bIns="0" rtlCol="0" anchor="ctr"/>
+          <a:lstStyle/>
+          <a:p>
+            <a:pPr indent="0" marL="0">
+              <a:buNone/>
+            </a:pPr>
+            <a:r>
+              <a:rPr lang="en-US" sz="950" b="1" spc="240" kern="0" dirty="0">
+                <a:solidFill>
+                  <a:srgbClr val="FFD66B"/>
+                </a:solidFill>
+                <a:latin typeface="Segoe UI" pitchFamily="34" charset="0"/>
+                <a:ea typeface="Segoe UI" pitchFamily="34" charset="-122"/>
+                <a:cs typeface="Segoe UI" pitchFamily="34" charset="-120"/>
+              </a:rPr>
+              <a:t>HEARTS AND MINDS  ·  MARK’S JOURNEY  ·  STAGE 4 OF 5</a:t>
+            </a:r>
+            <a:endParaRPr lang="en-US" sz="950" dirty="0"/>
+          </a:p>
+        </p:txBody>
+      </p:sp>
+      <p:sp>
+        <p:nvSpPr>
+          <p:cNvPr id="5" name="Text 2"/>
+          <p:cNvSpPr/>
+          <p:nvPr/>
+        </p:nvSpPr>
+        <p:spPr>
+          <a:xfrm>
+            <a:off x="502920" y="402336"/>
+            <a:ext cx="9509760" cy="457200"/>
+          </a:xfrm>
+          <a:prstGeom prst="rect">
+            <a:avLst/>
+          </a:prstGeom>
+          <a:noFill/>
+          <a:ln/>
+        </p:spPr>
+        <p:txBody>
+          <a:bodyPr wrap="square" lIns="0" tIns="0" rIns="0" bIns="0" rtlCol="0" anchor="ctr">
             <a:normAutofit/>
           </a:bodyPr>
           <a:lstStyle/>
@@ -6736,62 +6697,50 @@
               <a:buNone/>
             </a:pPr>
             <a:r>
-              <a:rPr lang="en-US" sz="950" i="1" dirty="0">
-                <a:solidFill>
-                  <a:srgbClr val="231F20"/>
-                </a:solidFill>
-                <a:latin typeface="Arial" pitchFamily="34" charset="0"/>
-                <a:ea typeface="Arial" pitchFamily="34" charset="-122"/>
-                <a:cs typeface="Arial" pitchFamily="34" charset="-120"/>
-              </a:rPr>
-              <a:t>“I felt a bit guilty at first that I had not been in to see him. Then I realised the visit was never the bit that mattered. He was always reading the number, not me.”</a:t>
-            </a:r>
-            <a:endParaRPr lang="en-US" sz="950" dirty="0"/>
-          </a:p>
-        </p:txBody>
-      </p:sp>
-      <p:sp>
-        <p:nvSpPr>
-          <p:cNvPr id="12" name="Text 9"/>
-          <p:cNvSpPr/>
-          <p:nvPr/>
-        </p:nvSpPr>
-        <p:spPr>
-          <a:xfrm>
-            <a:off x="685800" y="3684651"/>
-            <a:ext cx="4526280" cy="256032"/>
-          </a:xfrm>
-          <a:prstGeom prst="rect">
-            <a:avLst/>
-          </a:prstGeom>
-          <a:noFill/>
-          <a:ln/>
-        </p:spPr>
-        <p:txBody>
-          <a:bodyPr wrap="square" lIns="0" tIns="0" rIns="0" bIns="0" rtlCol="0" anchor="ctr"/>
-          <a:lstStyle/>
-          <a:p>
-            <a:pPr indent="0" marL="0">
-              <a:buNone/>
-            </a:pPr>
-            <a:r>
-              <a:rPr lang="en-US" sz="950" b="1" dirty="0">
-                <a:solidFill>
-                  <a:srgbClr val="8A6D1F"/>
-                </a:solidFill>
-                <a:latin typeface="Arial" pitchFamily="34" charset="0"/>
-                <a:ea typeface="Arial" pitchFamily="34" charset="-122"/>
-                <a:cs typeface="Arial" pitchFamily="34" charset="-120"/>
-              </a:rPr>
-              <a:t>Mark</a:t>
-            </a:r>
-            <a:endParaRPr lang="en-US" sz="950" dirty="0"/>
-          </a:p>
-        </p:txBody>
+              <a:rPr lang="en-US" sz="2100" b="1" dirty="0">
+                <a:solidFill>
+                  <a:srgbClr val="FFFFFF"/>
+                </a:solidFill>
+                <a:latin typeface="Segoe UI" pitchFamily="34" charset="0"/>
+                <a:ea typeface="Segoe UI" pitchFamily="34" charset="-122"/>
+                <a:cs typeface="Segoe UI" pitchFamily="34" charset="-120"/>
+              </a:rPr>
+              <a:t>Treatment, the surveillance itself</a:t>
+            </a:r>
+            <a:endParaRPr lang="en-US" sz="2100" dirty="0"/>
+          </a:p>
+        </p:txBody>
+      </p:sp>
+      <p:sp>
+        <p:nvSpPr>
+          <p:cNvPr id="6" name="Shape 3"/>
+          <p:cNvSpPr/>
+          <p:nvPr/>
+        </p:nvSpPr>
+        <p:spPr>
+          <a:xfrm>
+            <a:off x="10942806" y="173736"/>
+            <a:ext cx="791689" cy="605699"/>
+          </a:xfrm>
+          <a:prstGeom prst="roundRect">
+            <a:avLst>
+              <a:gd name="adj" fmla="val 12077"/>
+            </a:avLst>
+          </a:prstGeom>
+          <a:solidFill>
+            <a:srgbClr val="FFFFFF"/>
+          </a:solidFill>
+          <a:ln w="12700">
+            <a:solidFill>
+              <a:srgbClr val="FFFFFF"/>
+            </a:solidFill>
+            <a:prstDash val="solid"/>
+          </a:ln>
+        </p:spPr>
       </p:sp>
       <p:pic>
         <p:nvPicPr>
-          <p:cNvPr id="13" name="Image 1" descr="/sessions/quirky-zen-galileo/mnt/outputs/hmdecks5/img/mark-stage4.jpg">    </p:cNvPr>
+          <p:cNvPr id="7" name="Image 1" descr="/sessions/quirky-zen-galileo/mnt/NHS/07 Sites &amp; Repos/dtx-ecosystem/hearts-and-minds/_generators/assets/nhs-logo.png">    </p:cNvPr>
           <p:cNvPicPr>
             <a:picLocks noChangeAspect="1"/>
           </p:cNvPicPr>
@@ -6805,8 +6754,8 @@
         </p:blipFill>
         <p:spPr>
           <a:xfrm>
-            <a:off x="457200" y="4160139"/>
-            <a:ext cx="3817922" cy="2130933"/>
+            <a:off x="11068993" y="266273"/>
+            <a:ext cx="539315" cy="420624"/>
           </a:xfrm>
           <a:prstGeom prst="rect">
             <a:avLst/>
@@ -6815,13 +6764,246 @@
       </p:pic>
       <p:sp>
         <p:nvSpPr>
-          <p:cNvPr id="14" name="Shape 10"/>
-          <p:cNvSpPr/>
-          <p:nvPr/>
-        </p:nvSpPr>
-        <p:spPr>
-          <a:xfrm>
-            <a:off x="5669280" y="1097280"/>
+          <p:cNvPr id="8" name="Text 4"/>
+          <p:cNvSpPr/>
+          <p:nvPr/>
+        </p:nvSpPr>
+        <p:spPr>
+          <a:xfrm>
+            <a:off x="429768" y="1129284"/>
+            <a:ext cx="1463040" cy="841248"/>
+          </a:xfrm>
+          <a:prstGeom prst="rect">
+            <a:avLst/>
+          </a:prstGeom>
+          <a:noFill/>
+          <a:ln/>
+        </p:spPr>
+        <p:txBody>
+          <a:bodyPr wrap="square" lIns="0" tIns="0" rIns="0" bIns="0" rtlCol="0" anchor="ctr"/>
+          <a:lstStyle/>
+          <a:p>
+            <a:pPr indent="0" marL="0">
+              <a:buNone/>
+            </a:pPr>
+            <a:r>
+              <a:rPr lang="en-US" sz="5000" b="1" spc="-100" kern="0" dirty="0">
+                <a:solidFill>
+                  <a:srgbClr val="FFB91D"/>
+                </a:solidFill>
+                <a:latin typeface="Segoe UI" pitchFamily="34" charset="0"/>
+                <a:ea typeface="Segoe UI" pitchFamily="34" charset="-122"/>
+                <a:cs typeface="Segoe UI" pitchFamily="34" charset="-120"/>
+              </a:rPr>
+              <a:t>04</a:t>
+            </a:r>
+            <a:endParaRPr lang="en-US" sz="5000" dirty="0"/>
+          </a:p>
+        </p:txBody>
+      </p:sp>
+      <p:sp>
+        <p:nvSpPr>
+          <p:cNvPr id="9" name="Text 5"/>
+          <p:cNvSpPr/>
+          <p:nvPr/>
+        </p:nvSpPr>
+        <p:spPr>
+          <a:xfrm>
+            <a:off x="457200" y="2007108"/>
+            <a:ext cx="4892040" cy="1036320"/>
+          </a:xfrm>
+          <a:prstGeom prst="rect">
+            <a:avLst/>
+          </a:prstGeom>
+          <a:noFill/>
+          <a:ln/>
+        </p:spPr>
+        <p:txBody>
+          <a:bodyPr wrap="square" lIns="0" tIns="0" rIns="0" bIns="0" rtlCol="0" anchor="t">
+            <a:normAutofit/>
+          </a:bodyPr>
+          <a:lstStyle/>
+          <a:p>
+            <a:pPr indent="0" marL="0">
+              <a:buNone/>
+            </a:pPr>
+            <a:r>
+              <a:rPr lang="en-US" sz="1200" b="1" dirty="0">
+                <a:solidFill>
+                  <a:srgbClr val="003087"/>
+                </a:solidFill>
+                <a:latin typeface="Segoe UI" pitchFamily="34" charset="0"/>
+                <a:ea typeface="Segoe UI" pitchFamily="34" charset="-122"/>
+                <a:cs typeface="Segoe UI" pitchFamily="34" charset="-120"/>
+              </a:rPr>
+              <a:t>Active surveillance IS the treatment. The clinical work is the trend interpretation. Adam reads Mark's PSA in the context of every prior reading and the imaging cycle. Most cycles, nothing changes. The model has not removed the clinical decision; it has removed the unnecessary clinical visit.</a:t>
+            </a:r>
+            <a:endParaRPr lang="en-US" sz="1200" dirty="0"/>
+          </a:p>
+        </p:txBody>
+      </p:sp>
+      <p:sp>
+        <p:nvSpPr>
+          <p:cNvPr id="10" name="Shape 6"/>
+          <p:cNvSpPr/>
+          <p:nvPr/>
+        </p:nvSpPr>
+        <p:spPr>
+          <a:xfrm>
+            <a:off x="457200" y="3171444"/>
+            <a:ext cx="4892040" cy="1051560"/>
+          </a:xfrm>
+          <a:prstGeom prst="rect">
+            <a:avLst/>
+          </a:prstGeom>
+          <a:solidFill>
+            <a:srgbClr val="F8FAFC"/>
+          </a:solidFill>
+          <a:ln w="12700">
+            <a:solidFill>
+              <a:srgbClr val="F8FAFC"/>
+            </a:solidFill>
+            <a:prstDash val="solid"/>
+          </a:ln>
+        </p:spPr>
+      </p:sp>
+      <p:sp>
+        <p:nvSpPr>
+          <p:cNvPr id="11" name="Shape 7"/>
+          <p:cNvSpPr/>
+          <p:nvPr/>
+        </p:nvSpPr>
+        <p:spPr>
+          <a:xfrm>
+            <a:off x="457200" y="3171444"/>
+            <a:ext cx="82296" cy="1051560"/>
+          </a:xfrm>
+          <a:prstGeom prst="rect">
+            <a:avLst/>
+          </a:prstGeom>
+          <a:solidFill>
+            <a:srgbClr val="FFB91D"/>
+          </a:solidFill>
+          <a:ln w="12700">
+            <a:solidFill>
+              <a:srgbClr val="FFB91D"/>
+            </a:solidFill>
+            <a:prstDash val="solid"/>
+          </a:ln>
+        </p:spPr>
+      </p:sp>
+      <p:sp>
+        <p:nvSpPr>
+          <p:cNvPr id="12" name="Text 8"/>
+          <p:cNvSpPr/>
+          <p:nvPr/>
+        </p:nvSpPr>
+        <p:spPr>
+          <a:xfrm>
+            <a:off x="694944" y="3235452"/>
+            <a:ext cx="4507992" cy="667512"/>
+          </a:xfrm>
+          <a:prstGeom prst="rect">
+            <a:avLst/>
+          </a:prstGeom>
+          <a:noFill/>
+          <a:ln/>
+        </p:spPr>
+        <p:txBody>
+          <a:bodyPr wrap="square" lIns="0" tIns="0" rIns="0" bIns="0" rtlCol="0" anchor="t">
+            <a:normAutofit/>
+          </a:bodyPr>
+          <a:lstStyle/>
+          <a:p>
+            <a:pPr indent="0" marL="0">
+              <a:buNone/>
+            </a:pPr>
+            <a:r>
+              <a:rPr lang="en-US" sz="1150" i="1" dirty="0">
+                <a:solidFill>
+                  <a:srgbClr val="212B32"/>
+                </a:solidFill>
+                <a:latin typeface="Segoe UI" pitchFamily="34" charset="0"/>
+                <a:ea typeface="Segoe UI" pitchFamily="34" charset="-122"/>
+                <a:cs typeface="Segoe UI" pitchFamily="34" charset="-120"/>
+              </a:rPr>
+              <a:t>“I felt a bit guilty at first that I had not been in to see him. Then I realised the visit was never the bit that mattered. He was always reading the number, not me.”</a:t>
+            </a:r>
+            <a:endParaRPr lang="en-US" sz="1150" dirty="0"/>
+          </a:p>
+        </p:txBody>
+      </p:sp>
+      <p:sp>
+        <p:nvSpPr>
+          <p:cNvPr id="13" name="Text 9"/>
+          <p:cNvSpPr/>
+          <p:nvPr/>
+        </p:nvSpPr>
+        <p:spPr>
+          <a:xfrm>
+            <a:off x="694944" y="3902964"/>
+            <a:ext cx="4507992" cy="256032"/>
+          </a:xfrm>
+          <a:prstGeom prst="rect">
+            <a:avLst/>
+          </a:prstGeom>
+          <a:noFill/>
+          <a:ln/>
+        </p:spPr>
+        <p:txBody>
+          <a:bodyPr wrap="square" lIns="0" tIns="0" rIns="0" bIns="0" rtlCol="0" anchor="ctr"/>
+          <a:lstStyle/>
+          <a:p>
+            <a:pPr indent="0" marL="0">
+              <a:buNone/>
+            </a:pPr>
+            <a:r>
+              <a:rPr lang="en-US" sz="950" b="1" dirty="0">
+                <a:solidFill>
+                  <a:srgbClr val="8A6D1F"/>
+                </a:solidFill>
+                <a:latin typeface="Segoe UI" pitchFamily="34" charset="0"/>
+                <a:ea typeface="Segoe UI" pitchFamily="34" charset="-122"/>
+                <a:cs typeface="Segoe UI" pitchFamily="34" charset="-120"/>
+              </a:rPr>
+              <a:t>Mark</a:t>
+            </a:r>
+            <a:endParaRPr lang="en-US" sz="950" dirty="0"/>
+          </a:p>
+        </p:txBody>
+      </p:sp>
+      <p:pic>
+        <p:nvPicPr>
+          <p:cNvPr id="14" name="Image 2" descr="/sessions/quirky-zen-galileo/mnt/outputs/jd/img/mark-stage4.jpg">    </p:cNvPr>
+          <p:cNvPicPr>
+            <a:picLocks noChangeAspect="1"/>
+          </p:cNvPicPr>
+          <p:nvPr/>
+        </p:nvPicPr>
+        <p:blipFill>
+          <a:blip r:embed="rId3"/>
+          <a:srcRect l="0" r="0" t="0" b="0"/>
+          <a:stretch/>
+        </p:blipFill>
+        <p:spPr>
+          <a:xfrm>
+            <a:off x="457200" y="4405884"/>
+            <a:ext cx="4892040" cy="1885188"/>
+          </a:xfrm>
+          <a:prstGeom prst="rect">
+            <a:avLst/>
+          </a:prstGeom>
+        </p:spPr>
+      </p:pic>
+      <p:sp>
+        <p:nvSpPr>
+          <p:cNvPr id="15" name="Shape 10"/>
+          <p:cNvSpPr/>
+          <p:nvPr/>
+        </p:nvSpPr>
+        <p:spPr>
+          <a:xfrm>
+            <a:off x="5669280" y="1184148"/>
             <a:ext cx="6065215" cy="274320"/>
           </a:xfrm>
           <a:prstGeom prst="rect">
@@ -6840,14 +7022,14 @@
       </p:sp>
       <p:sp>
         <p:nvSpPr>
-          <p:cNvPr id="15" name="Text 11"/>
-          <p:cNvSpPr/>
-          <p:nvPr/>
-        </p:nvSpPr>
-        <p:spPr>
-          <a:xfrm>
-            <a:off x="5779008" y="1097280"/>
-            <a:ext cx="5845759" cy="274320"/>
+          <p:cNvPr id="16" name="Text 11"/>
+          <p:cNvSpPr/>
+          <p:nvPr/>
+        </p:nvSpPr>
+        <p:spPr>
+          <a:xfrm>
+            <a:off x="5788152" y="1184148"/>
+            <a:ext cx="5827471" cy="274320"/>
           </a:xfrm>
           <a:prstGeom prst="rect">
             <a:avLst/>
@@ -6867,9 +7049,9 @@
                 <a:solidFill>
                   <a:srgbClr val="FFFFFF"/>
                 </a:solidFill>
-                <a:latin typeface="Arial" pitchFamily="34" charset="0"/>
-                <a:ea typeface="Arial" pitchFamily="34" charset="-122"/>
-                <a:cs typeface="Arial" pitchFamily="34" charset="-120"/>
+                <a:latin typeface="Segoe UI" pitchFamily="34" charset="0"/>
+                <a:ea typeface="Segoe UI" pitchFamily="34" charset="-122"/>
+                <a:cs typeface="Segoe UI" pitchFamily="34" charset="-120"/>
               </a:rPr>
               <a:t>WHAT THE MODEL IS DOING UNDERNEATH</a:t>
             </a:r>
@@ -6879,14 +7061,14 @@
       </p:sp>
       <p:sp>
         <p:nvSpPr>
-          <p:cNvPr id="16" name="Shape 12"/>
-          <p:cNvSpPr/>
-          <p:nvPr/>
-        </p:nvSpPr>
-        <p:spPr>
-          <a:xfrm>
-            <a:off x="5669280" y="1371600"/>
-            <a:ext cx="6065215" cy="712470"/>
+          <p:cNvPr id="17" name="Shape 12"/>
+          <p:cNvSpPr/>
+          <p:nvPr/>
+        </p:nvSpPr>
+        <p:spPr>
+          <a:xfrm>
+            <a:off x="5669280" y="1458468"/>
+            <a:ext cx="6065215" cy="720852"/>
           </a:xfrm>
           <a:prstGeom prst="rect">
             <a:avLst/>
@@ -6904,14 +7086,14 @@
       </p:sp>
       <p:sp>
         <p:nvSpPr>
-          <p:cNvPr id="17" name="Text 13"/>
-          <p:cNvSpPr/>
-          <p:nvPr/>
-        </p:nvSpPr>
-        <p:spPr>
-          <a:xfrm>
-            <a:off x="5779008" y="1408176"/>
-            <a:ext cx="5845759" cy="657606"/>
+          <p:cNvPr id="18" name="Text 13"/>
+          <p:cNvSpPr/>
+          <p:nvPr/>
+        </p:nvSpPr>
+        <p:spPr>
+          <a:xfrm>
+            <a:off x="5788152" y="1495044"/>
+            <a:ext cx="5827471" cy="665988"/>
           </a:xfrm>
           <a:prstGeom prst="rect">
             <a:avLst/>
@@ -6929,11 +7111,11 @@
             <a:r>
               <a:rPr lang="en-US" sz="1100" dirty="0">
                 <a:solidFill>
-                  <a:srgbClr val="231F20"/>
-                </a:solidFill>
-                <a:latin typeface="Arial" pitchFamily="34" charset="0"/>
-                <a:ea typeface="Arial" pitchFamily="34" charset="-122"/>
-                <a:cs typeface="Arial" pitchFamily="34" charset="-120"/>
+                  <a:srgbClr val="212B32"/>
+                </a:solidFill>
+                <a:latin typeface="Segoe UI" pitchFamily="34" charset="0"/>
+                <a:ea typeface="Segoe UI" pitchFamily="34" charset="-122"/>
+                <a:cs typeface="Segoe UI" pitchFamily="34" charset="-120"/>
               </a:rPr>
               <a:t>The surveillance protocol per NICE NG131 is unchanged. Threshold breaches escalate to MDT review and additional imaging. Stable trends roll through routine review without consuming clinic time.</a:t>
             </a:r>
@@ -6943,13 +7125,13 @@
       </p:sp>
       <p:sp>
         <p:nvSpPr>
-          <p:cNvPr id="18" name="Shape 14"/>
-          <p:cNvSpPr/>
-          <p:nvPr/>
-        </p:nvSpPr>
-        <p:spPr>
-          <a:xfrm>
-            <a:off x="5669280" y="2212086"/>
+          <p:cNvPr id="19" name="Shape 14"/>
+          <p:cNvSpPr/>
+          <p:nvPr/>
+        </p:nvSpPr>
+        <p:spPr>
+          <a:xfrm>
+            <a:off x="5669280" y="2307336"/>
             <a:ext cx="6065215" cy="274320"/>
           </a:xfrm>
           <a:prstGeom prst="rect">
@@ -6968,14 +7150,14 @@
       </p:sp>
       <p:sp>
         <p:nvSpPr>
-          <p:cNvPr id="19" name="Text 15"/>
-          <p:cNvSpPr/>
-          <p:nvPr/>
-        </p:nvSpPr>
-        <p:spPr>
-          <a:xfrm>
-            <a:off x="5779008" y="2212086"/>
-            <a:ext cx="5845759" cy="274320"/>
+          <p:cNvPr id="20" name="Text 15"/>
+          <p:cNvSpPr/>
+          <p:nvPr/>
+        </p:nvSpPr>
+        <p:spPr>
+          <a:xfrm>
+            <a:off x="5788152" y="2307336"/>
+            <a:ext cx="5827471" cy="274320"/>
           </a:xfrm>
           <a:prstGeom prst="rect">
             <a:avLst/>
@@ -6995,9 +7177,9 @@
                 <a:solidFill>
                   <a:srgbClr val="FFFFFF"/>
                 </a:solidFill>
-                <a:latin typeface="Arial" pitchFamily="34" charset="0"/>
-                <a:ea typeface="Arial" pitchFamily="34" charset="-122"/>
-                <a:cs typeface="Arial" pitchFamily="34" charset="-120"/>
+                <a:latin typeface="Segoe UI" pitchFamily="34" charset="0"/>
+                <a:ea typeface="Segoe UI" pitchFamily="34" charset="-122"/>
+                <a:cs typeface="Segoe UI" pitchFamily="34" charset="-120"/>
               </a:rPr>
               <a:t>THE OLD WAY</a:t>
             </a:r>
@@ -7007,24 +7189,24 @@
       </p:sp>
       <p:sp>
         <p:nvSpPr>
-          <p:cNvPr id="20" name="Shape 16"/>
-          <p:cNvSpPr/>
-          <p:nvPr/>
-        </p:nvSpPr>
-        <p:spPr>
-          <a:xfrm>
-            <a:off x="5669280" y="2486406"/>
-            <a:ext cx="6065215" cy="712470"/>
-          </a:xfrm>
-          <a:prstGeom prst="rect">
-            <a:avLst/>
-          </a:prstGeom>
-          <a:solidFill>
-            <a:srgbClr val="F0F4F5"/>
+          <p:cNvPr id="21" name="Shape 16"/>
+          <p:cNvSpPr/>
+          <p:nvPr/>
+        </p:nvSpPr>
+        <p:spPr>
+          <a:xfrm>
+            <a:off x="5669280" y="2581656"/>
+            <a:ext cx="6065215" cy="720852"/>
+          </a:xfrm>
+          <a:prstGeom prst="rect">
+            <a:avLst/>
+          </a:prstGeom>
+          <a:solidFill>
+            <a:srgbClr val="F8FAFC"/>
           </a:solidFill>
           <a:ln w="12700">
             <a:solidFill>
-              <a:srgbClr val="F0F4F5"/>
+              <a:srgbClr val="F8FAFC"/>
             </a:solidFill>
             <a:prstDash val="solid"/>
           </a:ln>
@@ -7032,14 +7214,14 @@
       </p:sp>
       <p:sp>
         <p:nvSpPr>
-          <p:cNvPr id="21" name="Text 17"/>
-          <p:cNvSpPr/>
-          <p:nvPr/>
-        </p:nvSpPr>
-        <p:spPr>
-          <a:xfrm>
-            <a:off x="5779008" y="2522982"/>
-            <a:ext cx="5845759" cy="657606"/>
+          <p:cNvPr id="22" name="Text 17"/>
+          <p:cNvSpPr/>
+          <p:nvPr/>
+        </p:nvSpPr>
+        <p:spPr>
+          <a:xfrm>
+            <a:off x="5788152" y="2618232"/>
+            <a:ext cx="5827471" cy="665988"/>
           </a:xfrm>
           <a:prstGeom prst="rect">
             <a:avLst/>
@@ -7057,11 +7239,11 @@
             <a:r>
               <a:rPr lang="en-US" sz="1100" dirty="0">
                 <a:solidFill>
-                  <a:srgbClr val="231F20"/>
-                </a:solidFill>
-                <a:latin typeface="Arial" pitchFamily="34" charset="0"/>
-                <a:ea typeface="Arial" pitchFamily="34" charset="-122"/>
-                <a:cs typeface="Arial" pitchFamily="34" charset="-120"/>
+                  <a:srgbClr val="212B32"/>
+                </a:solidFill>
+                <a:latin typeface="Segoe UI" pitchFamily="34" charset="0"/>
+                <a:ea typeface="Segoe UI" pitchFamily="34" charset="-122"/>
+                <a:cs typeface="Segoe UI" pitchFamily="34" charset="-120"/>
               </a:rPr>
               <a:t>Every patient in clinic every quarter, regardless of trend. The signal-to-noise of clinic visits was always poor; routine stability was confirmed in person at the cost of the patients who clinically needed clinic.</a:t>
             </a:r>
@@ -7071,13 +7253,13 @@
       </p:sp>
       <p:sp>
         <p:nvSpPr>
-          <p:cNvPr id="22" name="Shape 18"/>
-          <p:cNvSpPr/>
-          <p:nvPr/>
-        </p:nvSpPr>
-        <p:spPr>
-          <a:xfrm>
-            <a:off x="5669280" y="3326892"/>
+          <p:cNvPr id="23" name="Shape 18"/>
+          <p:cNvSpPr/>
+          <p:nvPr/>
+        </p:nvSpPr>
+        <p:spPr>
+          <a:xfrm>
+            <a:off x="5669280" y="3430524"/>
             <a:ext cx="6065215" cy="274320"/>
           </a:xfrm>
           <a:prstGeom prst="rect">
@@ -7096,14 +7278,14 @@
       </p:sp>
       <p:sp>
         <p:nvSpPr>
-          <p:cNvPr id="23" name="Text 19"/>
-          <p:cNvSpPr/>
-          <p:nvPr/>
-        </p:nvSpPr>
-        <p:spPr>
-          <a:xfrm>
-            <a:off x="5779008" y="3326892"/>
-            <a:ext cx="5845759" cy="274320"/>
+          <p:cNvPr id="24" name="Text 19"/>
+          <p:cNvSpPr/>
+          <p:nvPr/>
+        </p:nvSpPr>
+        <p:spPr>
+          <a:xfrm>
+            <a:off x="5788152" y="3430524"/>
+            <a:ext cx="5827471" cy="274320"/>
           </a:xfrm>
           <a:prstGeom prst="rect">
             <a:avLst/>
@@ -7123,9 +7305,9 @@
                 <a:solidFill>
                   <a:srgbClr val="FFFFFF"/>
                 </a:solidFill>
-                <a:latin typeface="Arial" pitchFamily="34" charset="0"/>
-                <a:ea typeface="Arial" pitchFamily="34" charset="-122"/>
-                <a:cs typeface="Arial" pitchFamily="34" charset="-120"/>
+                <a:latin typeface="Segoe UI" pitchFamily="34" charset="0"/>
+                <a:ea typeface="Segoe UI" pitchFamily="34" charset="-122"/>
+                <a:cs typeface="Segoe UI" pitchFamily="34" charset="-120"/>
               </a:rPr>
               <a:t>WHAT THE CARE TEAM SEES</a:t>
             </a:r>
@@ -7135,14 +7317,14 @@
       </p:sp>
       <p:sp>
         <p:nvSpPr>
-          <p:cNvPr id="24" name="Shape 20"/>
-          <p:cNvSpPr/>
-          <p:nvPr/>
-        </p:nvSpPr>
-        <p:spPr>
-          <a:xfrm>
-            <a:off x="5669280" y="3601212"/>
-            <a:ext cx="6065215" cy="371602"/>
+          <p:cNvPr id="25" name="Shape 20"/>
+          <p:cNvSpPr/>
+          <p:nvPr/>
+        </p:nvSpPr>
+        <p:spPr>
+          <a:xfrm>
+            <a:off x="5669280" y="3704844"/>
+            <a:ext cx="6065215" cy="374396"/>
           </a:xfrm>
           <a:prstGeom prst="rect">
             <a:avLst/>
@@ -7160,14 +7342,14 @@
       </p:sp>
       <p:sp>
         <p:nvSpPr>
-          <p:cNvPr id="25" name="Text 21"/>
-          <p:cNvSpPr/>
-          <p:nvPr/>
-        </p:nvSpPr>
-        <p:spPr>
-          <a:xfrm>
-            <a:off x="5779008" y="3637788"/>
-            <a:ext cx="5845759" cy="316738"/>
+          <p:cNvPr id="26" name="Text 21"/>
+          <p:cNvSpPr/>
+          <p:nvPr/>
+        </p:nvSpPr>
+        <p:spPr>
+          <a:xfrm>
+            <a:off x="5788152" y="3741420"/>
+            <a:ext cx="5827471" cy="319532"/>
           </a:xfrm>
           <a:prstGeom prst="rect">
             <a:avLst/>
@@ -7185,11 +7367,11 @@
             <a:r>
               <a:rPr lang="en-US" sz="1100" dirty="0">
                 <a:solidFill>
-                  <a:srgbClr val="231F20"/>
-                </a:solidFill>
-                <a:latin typeface="Arial" pitchFamily="34" charset="0"/>
-                <a:ea typeface="Arial" pitchFamily="34" charset="-122"/>
-                <a:cs typeface="Arial" pitchFamily="34" charset="-120"/>
+                  <a:srgbClr val="212B32"/>
+                </a:solidFill>
+                <a:latin typeface="Segoe UI" pitchFamily="34" charset="0"/>
+                <a:ea typeface="Segoe UI" pitchFamily="34" charset="-122"/>
+                <a:cs typeface="Segoe UI" pitchFamily="34" charset="-120"/>
               </a:rPr>
               <a:t>Adam. The MDT. The radiologist on the imaging cycle.</a:t>
             </a:r>
@@ -7199,14 +7381,14 @@
       </p:sp>
       <p:sp>
         <p:nvSpPr>
-          <p:cNvPr id="27" name="Text 22"/>
-          <p:cNvSpPr/>
-          <p:nvPr/>
-        </p:nvSpPr>
-        <p:spPr>
-          <a:xfrm>
-            <a:off x="457200" y="6473952"/>
-            <a:ext cx="3108960" cy="274320"/>
+          <p:cNvPr id="28" name="Text 22"/>
+          <p:cNvSpPr/>
+          <p:nvPr/>
+        </p:nvSpPr>
+        <p:spPr>
+          <a:xfrm>
+            <a:off x="457200" y="6455664"/>
+            <a:ext cx="4206240" cy="274320"/>
           </a:xfrm>
           <a:prstGeom prst="rect">
             <a:avLst/>
@@ -7226,9 +7408,9 @@
                 <a:solidFill>
                   <a:srgbClr val="7E8B97"/>
                 </a:solidFill>
-                <a:latin typeface="Arial" pitchFamily="34" charset="0"/>
-                <a:ea typeface="Arial" pitchFamily="34" charset="-122"/>
-                <a:cs typeface="Arial" pitchFamily="34" charset="-120"/>
+                <a:latin typeface="Segoe UI" pitchFamily="34" charset="0"/>
+                <a:ea typeface="Segoe UI" pitchFamily="34" charset="-122"/>
+                <a:cs typeface="Segoe UI" pitchFamily="34" charset="-120"/>
               </a:rPr>
               <a:t>Mark  ·  Hearts and Minds</a:t>
             </a:r>
@@ -7238,14 +7420,14 @@
       </p:sp>
       <p:sp>
         <p:nvSpPr>
-          <p:cNvPr id="28" name="Text 23"/>
-          <p:cNvSpPr/>
-          <p:nvPr/>
-        </p:nvSpPr>
-        <p:spPr>
-          <a:xfrm>
-            <a:off x="3657600" y="6473952"/>
-            <a:ext cx="7528255" cy="274320"/>
+          <p:cNvPr id="29" name="Text 23"/>
+          <p:cNvSpPr/>
+          <p:nvPr/>
+        </p:nvSpPr>
+        <p:spPr>
+          <a:xfrm>
+            <a:off x="4754880" y="6455664"/>
+            <a:ext cx="6430975" cy="274320"/>
           </a:xfrm>
           <a:prstGeom prst="rect">
             <a:avLst/>
@@ -7265,9 +7447,9 @@
                 <a:solidFill>
                   <a:srgbClr val="7E8B97"/>
                 </a:solidFill>
-                <a:latin typeface="Arial" pitchFamily="34" charset="0"/>
-                <a:ea typeface="Arial" pitchFamily="34" charset="-122"/>
-                <a:cs typeface="Arial" pitchFamily="34" charset="-120"/>
+                <a:latin typeface="Segoe UI" pitchFamily="34" charset="0"/>
+                <a:ea typeface="Segoe UI" pitchFamily="34" charset="-122"/>
+                <a:cs typeface="Segoe UI" pitchFamily="34" charset="-120"/>
               </a:rPr>
               <a:t>Commercial positions are agreed in principle and remain subject to the live procurement.</a:t>
             </a:r>
@@ -7277,14 +7459,14 @@
       </p:sp>
       <p:sp>
         <p:nvSpPr>
-          <p:cNvPr id="29" name="Text 24"/>
-          <p:cNvSpPr/>
-          <p:nvPr/>
-        </p:nvSpPr>
-        <p:spPr>
-          <a:xfrm>
-            <a:off x="11368735" y="6473952"/>
-            <a:ext cx="365760" cy="274320"/>
+          <p:cNvPr id="30" name="Text 24"/>
+          <p:cNvSpPr/>
+          <p:nvPr/>
+        </p:nvSpPr>
+        <p:spPr>
+          <a:xfrm>
+            <a:off x="11323015" y="6455664"/>
+            <a:ext cx="411480" cy="274320"/>
           </a:xfrm>
           <a:prstGeom prst="rect">
             <a:avLst/>
@@ -7304,9 +7486,9 @@
                 <a:solidFill>
                   <a:srgbClr val="7E8B97"/>
                 </a:solidFill>
-                <a:latin typeface="Arial" pitchFamily="34" charset="0"/>
-                <a:ea typeface="Arial" pitchFamily="34" charset="-122"/>
-                <a:cs typeface="Arial" pitchFamily="34" charset="-120"/>
+                <a:latin typeface="Segoe UI" pitchFamily="34" charset="0"/>
+                <a:ea typeface="Segoe UI" pitchFamily="34" charset="-122"/>
+                <a:cs typeface="Segoe UI" pitchFamily="34" charset="-120"/>
               </a:rPr>
               <a:t>6</a:t>
             </a:r>
@@ -7346,137 +7528,9 @@
           <a:chExt cx="0" cy="0"/>
         </a:xfrm>
       </p:grpSpPr>
-      <p:sp>
-        <p:nvSpPr>
-          <p:cNvPr id="2" name="Shape 0"/>
-          <p:cNvSpPr/>
-          <p:nvPr/>
-        </p:nvSpPr>
-        <p:spPr>
-          <a:xfrm>
-            <a:off x="0" y="0"/>
-            <a:ext cx="12191695" cy="868680"/>
-          </a:xfrm>
-          <a:prstGeom prst="rect">
-            <a:avLst/>
-          </a:prstGeom>
-          <a:solidFill>
-            <a:srgbClr val="003087"/>
-          </a:solidFill>
-          <a:ln w="12700">
-            <a:solidFill>
-              <a:srgbClr val="003087"/>
-            </a:solidFill>
-            <a:prstDash val="solid"/>
-          </a:ln>
-        </p:spPr>
-      </p:sp>
-      <p:sp>
-        <p:nvSpPr>
-          <p:cNvPr id="3" name="Shape 1"/>
-          <p:cNvSpPr/>
-          <p:nvPr/>
-        </p:nvSpPr>
-        <p:spPr>
-          <a:xfrm>
-            <a:off x="0" y="868680"/>
-            <a:ext cx="12191695" cy="54864"/>
-          </a:xfrm>
-          <a:prstGeom prst="rect">
-            <a:avLst/>
-          </a:prstGeom>
-          <a:solidFill>
-            <a:srgbClr val="FFB91D"/>
-          </a:solidFill>
-          <a:ln w="12700">
-            <a:solidFill>
-              <a:srgbClr val="FFB91D"/>
-            </a:solidFill>
-            <a:prstDash val="solid"/>
-          </a:ln>
-        </p:spPr>
-      </p:sp>
-      <p:sp>
-        <p:nvSpPr>
-          <p:cNvPr id="4" name="Text 2"/>
-          <p:cNvSpPr/>
-          <p:nvPr/>
-        </p:nvSpPr>
-        <p:spPr>
-          <a:xfrm>
-            <a:off x="457200" y="128016"/>
-            <a:ext cx="8686800" cy="256032"/>
-          </a:xfrm>
-          <a:prstGeom prst="rect">
-            <a:avLst/>
-          </a:prstGeom>
-          <a:noFill/>
-          <a:ln/>
-        </p:spPr>
-        <p:txBody>
-          <a:bodyPr wrap="square" lIns="0" tIns="0" rIns="0" bIns="0" rtlCol="0" anchor="ctr"/>
-          <a:lstStyle/>
-          <a:p>
-            <a:pPr indent="0" marL="0">
-              <a:buNone/>
-            </a:pPr>
-            <a:r>
-              <a:rPr lang="en-US" sz="950" b="1" spc="200" kern="0" dirty="0">
-                <a:solidFill>
-                  <a:srgbClr val="7EC8E3"/>
-                </a:solidFill>
-                <a:latin typeface="Arial" pitchFamily="34" charset="0"/>
-                <a:ea typeface="Arial" pitchFamily="34" charset="-122"/>
-                <a:cs typeface="Arial" pitchFamily="34" charset="-120"/>
-              </a:rPr>
-              <a:t>HEARTS AND MINDS  ·  MARK'S JOURNEY  ·  STAGE 5 OF 5</a:t>
-            </a:r>
-            <a:endParaRPr lang="en-US" sz="950" dirty="0"/>
-          </a:p>
-        </p:txBody>
-      </p:sp>
-      <p:sp>
-        <p:nvSpPr>
-          <p:cNvPr id="5" name="Text 3"/>
-          <p:cNvSpPr/>
-          <p:nvPr/>
-        </p:nvSpPr>
-        <p:spPr>
-          <a:xfrm>
-            <a:off x="457200" y="384048"/>
-            <a:ext cx="9601200" cy="411480"/>
-          </a:xfrm>
-          <a:prstGeom prst="rect">
-            <a:avLst/>
-          </a:prstGeom>
-          <a:noFill/>
-          <a:ln/>
-        </p:spPr>
-        <p:txBody>
-          <a:bodyPr wrap="square" lIns="0" tIns="0" rIns="0" bIns="0" rtlCol="0" anchor="ctr"/>
-          <a:lstStyle/>
-          <a:p>
-            <a:pPr indent="0" marL="0">
-              <a:buNone/>
-            </a:pPr>
-            <a:r>
-              <a:rPr lang="en-US" sz="2000" b="1" dirty="0">
-                <a:solidFill>
-                  <a:srgbClr val="FFFFFF"/>
-                </a:solidFill>
-                <a:latin typeface="Arial" pitchFamily="34" charset="0"/>
-                <a:ea typeface="Arial" pitchFamily="34" charset="-122"/>
-                <a:cs typeface="Arial" pitchFamily="34" charset="-120"/>
-              </a:rPr>
-              <a:t>Long-term optimisation, the surveillance that keeps him in surveillance</a:t>
-            </a:r>
-            <a:endParaRPr lang="en-US" sz="2000" dirty="0"/>
-          </a:p>
-        </p:txBody>
-      </p:sp>
       <p:pic>
         <p:nvPicPr>
-          <p:cNvPr id="6" name="Image 0" descr="/sessions/quirky-zen-galileo/mnt/outputs/deckbuild/nhs_logo.png">    </p:cNvPr>
+          <p:cNvPr id="2" name="Image 0" descr="/sessions/quirky-zen-galileo/mnt/NHS/07 Sites &amp; Repos/dtx-ecosystem/hearts-and-minds/_generators/assets/bg-band.jpg">    </p:cNvPr>
           <p:cNvPicPr>
             <a:picLocks noChangeAspect="1"/>
           </p:cNvPicPr>
@@ -7490,8 +7544,8 @@
         </p:blipFill>
         <p:spPr>
           <a:xfrm>
-            <a:off x="10774375" y="201168"/>
-            <a:ext cx="960120" cy="393192"/>
+            <a:off x="0" y="0"/>
+            <a:ext cx="12191695" cy="932688"/>
           </a:xfrm>
           <a:prstGeom prst="rect">
             <a:avLst/>
@@ -7500,119 +7554,14 @@
       </p:pic>
       <p:sp>
         <p:nvSpPr>
-          <p:cNvPr id="7" name="Text 4"/>
-          <p:cNvSpPr/>
-          <p:nvPr/>
-        </p:nvSpPr>
-        <p:spPr>
-          <a:xfrm>
-            <a:off x="429768" y="1024128"/>
-            <a:ext cx="1463040" cy="868680"/>
-          </a:xfrm>
-          <a:prstGeom prst="rect">
-            <a:avLst/>
-          </a:prstGeom>
-          <a:noFill/>
-          <a:ln/>
-        </p:spPr>
-        <p:txBody>
-          <a:bodyPr wrap="square" lIns="0" tIns="0" rIns="0" bIns="0" rtlCol="0" anchor="ctr"/>
-          <a:lstStyle/>
-          <a:p>
-            <a:pPr indent="0" marL="0">
-              <a:buNone/>
-            </a:pPr>
-            <a:r>
-              <a:rPr lang="en-US" sz="5200" b="1" dirty="0">
-                <a:solidFill>
-                  <a:srgbClr val="FFB91D"/>
-                </a:solidFill>
-                <a:latin typeface="Arial" pitchFamily="34" charset="0"/>
-                <a:ea typeface="Arial" pitchFamily="34" charset="-122"/>
-                <a:cs typeface="Arial" pitchFamily="34" charset="-120"/>
-              </a:rPr>
-              <a:t>05</a:t>
-            </a:r>
-            <a:endParaRPr lang="en-US" sz="5200" dirty="0"/>
-          </a:p>
-        </p:txBody>
-      </p:sp>
-      <p:sp>
-        <p:nvSpPr>
-          <p:cNvPr id="8" name="Text 5"/>
-          <p:cNvSpPr/>
-          <p:nvPr/>
-        </p:nvSpPr>
-        <p:spPr>
-          <a:xfrm>
-            <a:off x="457200" y="1920240"/>
-            <a:ext cx="4892040" cy="1214755"/>
-          </a:xfrm>
-          <a:prstGeom prst="rect">
-            <a:avLst/>
-          </a:prstGeom>
-          <a:noFill/>
-          <a:ln/>
-        </p:spPr>
-        <p:txBody>
-          <a:bodyPr wrap="square" lIns="0" tIns="0" rIns="0" bIns="0" rtlCol="0" anchor="t">
-            <a:normAutofit/>
-          </a:bodyPr>
-          <a:lstStyle/>
-          <a:p>
-            <a:pPr indent="0" marL="0">
-              <a:buNone/>
-            </a:pPr>
-            <a:r>
-              <a:rPr lang="en-US" sz="1450" b="1" dirty="0">
-                <a:solidFill>
-                  <a:srgbClr val="003087"/>
-                </a:solidFill>
-                <a:latin typeface="Arial" pitchFamily="34" charset="0"/>
-                <a:ea typeface="Arial" pitchFamily="34" charset="-122"/>
-                <a:cs typeface="Arial" pitchFamily="34" charset="-120"/>
-              </a:rPr>
-              <a:t>Mark stays in the cohort. The quarterly PSA happens at home. The annual imaging happens in clinic. The trend stays stable. The cohort grows. Adam holds more patients in surveillance than the clinic-only model could have, and Mark is one of them.</a:t>
-            </a:r>
-            <a:endParaRPr lang="en-US" sz="1450" dirty="0"/>
-          </a:p>
-        </p:txBody>
-      </p:sp>
-      <p:sp>
-        <p:nvSpPr>
-          <p:cNvPr id="9" name="Shape 6"/>
-          <p:cNvSpPr/>
-          <p:nvPr/>
-        </p:nvSpPr>
-        <p:spPr>
-          <a:xfrm>
-            <a:off x="457200" y="3244723"/>
-            <a:ext cx="4892040" cy="944499"/>
-          </a:xfrm>
-          <a:prstGeom prst="rect">
-            <a:avLst/>
-          </a:prstGeom>
-          <a:solidFill>
-            <a:srgbClr val="F0F4F5"/>
-          </a:solidFill>
-          <a:ln w="12700">
-            <a:solidFill>
-              <a:srgbClr val="F0F4F5"/>
-            </a:solidFill>
-            <a:prstDash val="solid"/>
-          </a:ln>
-        </p:spPr>
-      </p:sp>
-      <p:sp>
-        <p:nvSpPr>
-          <p:cNvPr id="10" name="Shape 7"/>
-          <p:cNvSpPr/>
-          <p:nvPr/>
-        </p:nvSpPr>
-        <p:spPr>
-          <a:xfrm>
-            <a:off x="457200" y="3244723"/>
-            <a:ext cx="82296" cy="944499"/>
+          <p:cNvPr id="3" name="Shape 0"/>
+          <p:cNvSpPr/>
+          <p:nvPr/>
+        </p:nvSpPr>
+        <p:spPr>
+          <a:xfrm>
+            <a:off x="0" y="932688"/>
+            <a:ext cx="12191695" cy="50292"/>
           </a:xfrm>
           <a:prstGeom prst="rect">
             <a:avLst/>
@@ -7630,23 +7579,62 @@
       </p:sp>
       <p:sp>
         <p:nvSpPr>
-          <p:cNvPr id="11" name="Text 8"/>
-          <p:cNvSpPr/>
-          <p:nvPr/>
-        </p:nvSpPr>
-        <p:spPr>
-          <a:xfrm>
-            <a:off x="685800" y="3299587"/>
-            <a:ext cx="4526280" cy="578739"/>
-          </a:xfrm>
-          <a:prstGeom prst="rect">
-            <a:avLst/>
-          </a:prstGeom>
-          <a:noFill/>
-          <a:ln/>
-        </p:spPr>
-        <p:txBody>
-          <a:bodyPr wrap="square" lIns="0" tIns="0" rIns="0" bIns="0" rtlCol="0" anchor="t">
+          <p:cNvPr id="4" name="Text 1"/>
+          <p:cNvSpPr/>
+          <p:nvPr/>
+        </p:nvSpPr>
+        <p:spPr>
+          <a:xfrm>
+            <a:off x="502920" y="137160"/>
+            <a:ext cx="8595360" cy="256032"/>
+          </a:xfrm>
+          <a:prstGeom prst="rect">
+            <a:avLst/>
+          </a:prstGeom>
+          <a:noFill/>
+          <a:ln/>
+        </p:spPr>
+        <p:txBody>
+          <a:bodyPr wrap="square" lIns="0" tIns="0" rIns="0" bIns="0" rtlCol="0" anchor="ctr"/>
+          <a:lstStyle/>
+          <a:p>
+            <a:pPr indent="0" marL="0">
+              <a:buNone/>
+            </a:pPr>
+            <a:r>
+              <a:rPr lang="en-US" sz="950" b="1" spc="240" kern="0" dirty="0">
+                <a:solidFill>
+                  <a:srgbClr val="FFD66B"/>
+                </a:solidFill>
+                <a:latin typeface="Segoe UI" pitchFamily="34" charset="0"/>
+                <a:ea typeface="Segoe UI" pitchFamily="34" charset="-122"/>
+                <a:cs typeface="Segoe UI" pitchFamily="34" charset="-120"/>
+              </a:rPr>
+              <a:t>HEARTS AND MINDS  ·  MARK’S JOURNEY  ·  STAGE 5 OF 5</a:t>
+            </a:r>
+            <a:endParaRPr lang="en-US" sz="950" dirty="0"/>
+          </a:p>
+        </p:txBody>
+      </p:sp>
+      <p:sp>
+        <p:nvSpPr>
+          <p:cNvPr id="5" name="Text 2"/>
+          <p:cNvSpPr/>
+          <p:nvPr/>
+        </p:nvSpPr>
+        <p:spPr>
+          <a:xfrm>
+            <a:off x="502920" y="402336"/>
+            <a:ext cx="9509760" cy="457200"/>
+          </a:xfrm>
+          <a:prstGeom prst="rect">
+            <a:avLst/>
+          </a:prstGeom>
+          <a:noFill/>
+          <a:ln/>
+        </p:spPr>
+        <p:txBody>
+          <a:bodyPr wrap="square" lIns="0" tIns="0" rIns="0" bIns="0" rtlCol="0" anchor="ctr">
             <a:normAutofit/>
           </a:bodyPr>
           <a:lstStyle/>
@@ -7655,62 +7643,50 @@
               <a:buNone/>
             </a:pPr>
             <a:r>
-              <a:rPr lang="en-US" sz="950" i="1" dirty="0">
-                <a:solidFill>
-                  <a:srgbClr val="231F20"/>
-                </a:solidFill>
-                <a:latin typeface="Arial" pitchFamily="34" charset="0"/>
-                <a:ea typeface="Arial" pitchFamily="34" charset="-122"/>
-                <a:cs typeface="Arial" pitchFamily="34" charset="-120"/>
-              </a:rPr>
-              <a:t>“It is just part of life now. The kit comes when it is supposed to, I do it, I get on with my week. The hospital is for when something actually needs me there.”</a:t>
-            </a:r>
-            <a:endParaRPr lang="en-US" sz="950" dirty="0"/>
-          </a:p>
-        </p:txBody>
-      </p:sp>
-      <p:sp>
-        <p:nvSpPr>
-          <p:cNvPr id="12" name="Text 9"/>
-          <p:cNvSpPr/>
-          <p:nvPr/>
-        </p:nvSpPr>
-        <p:spPr>
-          <a:xfrm>
-            <a:off x="685800" y="3878326"/>
-            <a:ext cx="4526280" cy="256032"/>
-          </a:xfrm>
-          <a:prstGeom prst="rect">
-            <a:avLst/>
-          </a:prstGeom>
-          <a:noFill/>
-          <a:ln/>
-        </p:spPr>
-        <p:txBody>
-          <a:bodyPr wrap="square" lIns="0" tIns="0" rIns="0" bIns="0" rtlCol="0" anchor="ctr"/>
-          <a:lstStyle/>
-          <a:p>
-            <a:pPr indent="0" marL="0">
-              <a:buNone/>
-            </a:pPr>
-            <a:r>
-              <a:rPr lang="en-US" sz="950" b="1" dirty="0">
-                <a:solidFill>
-                  <a:srgbClr val="8A6D1F"/>
-                </a:solidFill>
-                <a:latin typeface="Arial" pitchFamily="34" charset="0"/>
-                <a:ea typeface="Arial" pitchFamily="34" charset="-122"/>
-                <a:cs typeface="Arial" pitchFamily="34" charset="-120"/>
-              </a:rPr>
-              <a:t>Mark</a:t>
-            </a:r>
-            <a:endParaRPr lang="en-US" sz="950" dirty="0"/>
-          </a:p>
-        </p:txBody>
+              <a:rPr lang="en-US" sz="2050" b="1" dirty="0">
+                <a:solidFill>
+                  <a:srgbClr val="FFFFFF"/>
+                </a:solidFill>
+                <a:latin typeface="Segoe UI" pitchFamily="34" charset="0"/>
+                <a:ea typeface="Segoe UI" pitchFamily="34" charset="-122"/>
+                <a:cs typeface="Segoe UI" pitchFamily="34" charset="-120"/>
+              </a:rPr>
+              <a:t>Long-term optimisation, the surveillance that keeps him in surveillance</a:t>
+            </a:r>
+            <a:endParaRPr lang="en-US" sz="2050" dirty="0"/>
+          </a:p>
+        </p:txBody>
+      </p:sp>
+      <p:sp>
+        <p:nvSpPr>
+          <p:cNvPr id="6" name="Shape 3"/>
+          <p:cNvSpPr/>
+          <p:nvPr/>
+        </p:nvSpPr>
+        <p:spPr>
+          <a:xfrm>
+            <a:off x="10942806" y="173736"/>
+            <a:ext cx="791689" cy="605699"/>
+          </a:xfrm>
+          <a:prstGeom prst="roundRect">
+            <a:avLst>
+              <a:gd name="adj" fmla="val 12077"/>
+            </a:avLst>
+          </a:prstGeom>
+          <a:solidFill>
+            <a:srgbClr val="FFFFFF"/>
+          </a:solidFill>
+          <a:ln w="12700">
+            <a:solidFill>
+              <a:srgbClr val="FFFFFF"/>
+            </a:solidFill>
+            <a:prstDash val="solid"/>
+          </a:ln>
+        </p:spPr>
       </p:sp>
       <p:pic>
         <p:nvPicPr>
-          <p:cNvPr id="13" name="Image 1" descr="/sessions/quirky-zen-galileo/mnt/outputs/hmdecks5/img/mark-stage5.jpg">    </p:cNvPr>
+          <p:cNvPr id="7" name="Image 1" descr="/sessions/quirky-zen-galileo/mnt/NHS/07 Sites &amp; Repos/dtx-ecosystem/hearts-and-minds/_generators/assets/nhs-logo.png">    </p:cNvPr>
           <p:cNvPicPr>
             <a:picLocks noChangeAspect="1"/>
           </p:cNvPicPr>
@@ -7724,8 +7700,8 @@
         </p:blipFill>
         <p:spPr>
           <a:xfrm>
-            <a:off x="457200" y="4353814"/>
-            <a:ext cx="3470921" cy="1937258"/>
+            <a:off x="11068993" y="266273"/>
+            <a:ext cx="539315" cy="420624"/>
           </a:xfrm>
           <a:prstGeom prst="rect">
             <a:avLst/>
@@ -7734,13 +7710,246 @@
       </p:pic>
       <p:sp>
         <p:nvSpPr>
-          <p:cNvPr id="14" name="Shape 10"/>
-          <p:cNvSpPr/>
-          <p:nvPr/>
-        </p:nvSpPr>
-        <p:spPr>
-          <a:xfrm>
-            <a:off x="5669280" y="1097280"/>
+          <p:cNvPr id="8" name="Text 4"/>
+          <p:cNvSpPr/>
+          <p:nvPr/>
+        </p:nvSpPr>
+        <p:spPr>
+          <a:xfrm>
+            <a:off x="429768" y="1129284"/>
+            <a:ext cx="1463040" cy="841248"/>
+          </a:xfrm>
+          <a:prstGeom prst="rect">
+            <a:avLst/>
+          </a:prstGeom>
+          <a:noFill/>
+          <a:ln/>
+        </p:spPr>
+        <p:txBody>
+          <a:bodyPr wrap="square" lIns="0" tIns="0" rIns="0" bIns="0" rtlCol="0" anchor="ctr"/>
+          <a:lstStyle/>
+          <a:p>
+            <a:pPr indent="0" marL="0">
+              <a:buNone/>
+            </a:pPr>
+            <a:r>
+              <a:rPr lang="en-US" sz="5000" b="1" spc="-100" kern="0" dirty="0">
+                <a:solidFill>
+                  <a:srgbClr val="FFB91D"/>
+                </a:solidFill>
+                <a:latin typeface="Segoe UI" pitchFamily="34" charset="0"/>
+                <a:ea typeface="Segoe UI" pitchFamily="34" charset="-122"/>
+                <a:cs typeface="Segoe UI" pitchFamily="34" charset="-120"/>
+              </a:rPr>
+              <a:t>05</a:t>
+            </a:r>
+            <a:endParaRPr lang="en-US" sz="5000" dirty="0"/>
+          </a:p>
+        </p:txBody>
+      </p:sp>
+      <p:sp>
+        <p:nvSpPr>
+          <p:cNvPr id="9" name="Text 5"/>
+          <p:cNvSpPr/>
+          <p:nvPr/>
+        </p:nvSpPr>
+        <p:spPr>
+          <a:xfrm>
+            <a:off x="457200" y="2007108"/>
+            <a:ext cx="4892040" cy="1154430"/>
+          </a:xfrm>
+          <a:prstGeom prst="rect">
+            <a:avLst/>
+          </a:prstGeom>
+          <a:noFill/>
+          <a:ln/>
+        </p:spPr>
+        <p:txBody>
+          <a:bodyPr wrap="square" lIns="0" tIns="0" rIns="0" bIns="0" rtlCol="0" anchor="t">
+            <a:normAutofit/>
+          </a:bodyPr>
+          <a:lstStyle/>
+          <a:p>
+            <a:pPr indent="0" marL="0">
+              <a:buNone/>
+            </a:pPr>
+            <a:r>
+              <a:rPr lang="en-US" sz="1350" b="1" dirty="0">
+                <a:solidFill>
+                  <a:srgbClr val="003087"/>
+                </a:solidFill>
+                <a:latin typeface="Segoe UI" pitchFamily="34" charset="0"/>
+                <a:ea typeface="Segoe UI" pitchFamily="34" charset="-122"/>
+                <a:cs typeface="Segoe UI" pitchFamily="34" charset="-120"/>
+              </a:rPr>
+              <a:t>Mark stays in the cohort. The quarterly PSA happens at home. The annual imaging happens in clinic. The trend stays stable. The cohort grows. Adam holds more patients in surveillance than the clinic-only model could have, and Mark is one of them.</a:t>
+            </a:r>
+            <a:endParaRPr lang="en-US" sz="1350" dirty="0"/>
+          </a:p>
+        </p:txBody>
+      </p:sp>
+      <p:sp>
+        <p:nvSpPr>
+          <p:cNvPr id="10" name="Shape 6"/>
+          <p:cNvSpPr/>
+          <p:nvPr/>
+        </p:nvSpPr>
+        <p:spPr>
+          <a:xfrm>
+            <a:off x="457200" y="3289554"/>
+            <a:ext cx="4892040" cy="1051560"/>
+          </a:xfrm>
+          <a:prstGeom prst="rect">
+            <a:avLst/>
+          </a:prstGeom>
+          <a:solidFill>
+            <a:srgbClr val="F8FAFC"/>
+          </a:solidFill>
+          <a:ln w="12700">
+            <a:solidFill>
+              <a:srgbClr val="F8FAFC"/>
+            </a:solidFill>
+            <a:prstDash val="solid"/>
+          </a:ln>
+        </p:spPr>
+      </p:sp>
+      <p:sp>
+        <p:nvSpPr>
+          <p:cNvPr id="11" name="Shape 7"/>
+          <p:cNvSpPr/>
+          <p:nvPr/>
+        </p:nvSpPr>
+        <p:spPr>
+          <a:xfrm>
+            <a:off x="457200" y="3289554"/>
+            <a:ext cx="82296" cy="1051560"/>
+          </a:xfrm>
+          <a:prstGeom prst="rect">
+            <a:avLst/>
+          </a:prstGeom>
+          <a:solidFill>
+            <a:srgbClr val="FFB91D"/>
+          </a:solidFill>
+          <a:ln w="12700">
+            <a:solidFill>
+              <a:srgbClr val="FFB91D"/>
+            </a:solidFill>
+            <a:prstDash val="solid"/>
+          </a:ln>
+        </p:spPr>
+      </p:sp>
+      <p:sp>
+        <p:nvSpPr>
+          <p:cNvPr id="12" name="Text 8"/>
+          <p:cNvSpPr/>
+          <p:nvPr/>
+        </p:nvSpPr>
+        <p:spPr>
+          <a:xfrm>
+            <a:off x="694944" y="3353562"/>
+            <a:ext cx="4507992" cy="667512"/>
+          </a:xfrm>
+          <a:prstGeom prst="rect">
+            <a:avLst/>
+          </a:prstGeom>
+          <a:noFill/>
+          <a:ln/>
+        </p:spPr>
+        <p:txBody>
+          <a:bodyPr wrap="square" lIns="0" tIns="0" rIns="0" bIns="0" rtlCol="0" anchor="t">
+            <a:normAutofit/>
+          </a:bodyPr>
+          <a:lstStyle/>
+          <a:p>
+            <a:pPr indent="0" marL="0">
+              <a:buNone/>
+            </a:pPr>
+            <a:r>
+              <a:rPr lang="en-US" sz="1150" i="1" dirty="0">
+                <a:solidFill>
+                  <a:srgbClr val="212B32"/>
+                </a:solidFill>
+                <a:latin typeface="Segoe UI" pitchFamily="34" charset="0"/>
+                <a:ea typeface="Segoe UI" pitchFamily="34" charset="-122"/>
+                <a:cs typeface="Segoe UI" pitchFamily="34" charset="-120"/>
+              </a:rPr>
+              <a:t>“It is just part of life now. The kit comes when it is supposed to, I do it, I get on with my week. The hospital is for when something actually needs me there.”</a:t>
+            </a:r>
+            <a:endParaRPr lang="en-US" sz="1150" dirty="0"/>
+          </a:p>
+        </p:txBody>
+      </p:sp>
+      <p:sp>
+        <p:nvSpPr>
+          <p:cNvPr id="13" name="Text 9"/>
+          <p:cNvSpPr/>
+          <p:nvPr/>
+        </p:nvSpPr>
+        <p:spPr>
+          <a:xfrm>
+            <a:off x="694944" y="4021074"/>
+            <a:ext cx="4507992" cy="256032"/>
+          </a:xfrm>
+          <a:prstGeom prst="rect">
+            <a:avLst/>
+          </a:prstGeom>
+          <a:noFill/>
+          <a:ln/>
+        </p:spPr>
+        <p:txBody>
+          <a:bodyPr wrap="square" lIns="0" tIns="0" rIns="0" bIns="0" rtlCol="0" anchor="ctr"/>
+          <a:lstStyle/>
+          <a:p>
+            <a:pPr indent="0" marL="0">
+              <a:buNone/>
+            </a:pPr>
+            <a:r>
+              <a:rPr lang="en-US" sz="950" b="1" dirty="0">
+                <a:solidFill>
+                  <a:srgbClr val="8A6D1F"/>
+                </a:solidFill>
+                <a:latin typeface="Segoe UI" pitchFamily="34" charset="0"/>
+                <a:ea typeface="Segoe UI" pitchFamily="34" charset="-122"/>
+                <a:cs typeface="Segoe UI" pitchFamily="34" charset="-120"/>
+              </a:rPr>
+              <a:t>Mark</a:t>
+            </a:r>
+            <a:endParaRPr lang="en-US" sz="950" dirty="0"/>
+          </a:p>
+        </p:txBody>
+      </p:sp>
+      <p:pic>
+        <p:nvPicPr>
+          <p:cNvPr id="14" name="Image 2" descr="/sessions/quirky-zen-galileo/mnt/outputs/jd/img/mark-stage5.jpg">    </p:cNvPr>
+          <p:cNvPicPr>
+            <a:picLocks noChangeAspect="1"/>
+          </p:cNvPicPr>
+          <p:nvPr/>
+        </p:nvPicPr>
+        <p:blipFill>
+          <a:blip r:embed="rId3"/>
+          <a:srcRect l="0" r="0" t="0" b="0"/>
+          <a:stretch/>
+        </p:blipFill>
+        <p:spPr>
+          <a:xfrm>
+            <a:off x="457200" y="4523994"/>
+            <a:ext cx="4892040" cy="1767078"/>
+          </a:xfrm>
+          <a:prstGeom prst="rect">
+            <a:avLst/>
+          </a:prstGeom>
+        </p:spPr>
+      </p:pic>
+      <p:sp>
+        <p:nvSpPr>
+          <p:cNvPr id="15" name="Shape 10"/>
+          <p:cNvSpPr/>
+          <p:nvPr/>
+        </p:nvSpPr>
+        <p:spPr>
+          <a:xfrm>
+            <a:off x="5669280" y="1184148"/>
             <a:ext cx="6065215" cy="274320"/>
           </a:xfrm>
           <a:prstGeom prst="rect">
@@ -7759,14 +7968,14 @@
       </p:sp>
       <p:sp>
         <p:nvSpPr>
-          <p:cNvPr id="15" name="Text 11"/>
-          <p:cNvSpPr/>
-          <p:nvPr/>
-        </p:nvSpPr>
-        <p:spPr>
-          <a:xfrm>
-            <a:off x="5779008" y="1097280"/>
-            <a:ext cx="5845759" cy="274320"/>
+          <p:cNvPr id="16" name="Text 11"/>
+          <p:cNvSpPr/>
+          <p:nvPr/>
+        </p:nvSpPr>
+        <p:spPr>
+          <a:xfrm>
+            <a:off x="5788152" y="1184148"/>
+            <a:ext cx="5827471" cy="274320"/>
           </a:xfrm>
           <a:prstGeom prst="rect">
             <a:avLst/>
@@ -7786,9 +7995,9 @@
                 <a:solidFill>
                   <a:srgbClr val="FFFFFF"/>
                 </a:solidFill>
-                <a:latin typeface="Arial" pitchFamily="34" charset="0"/>
-                <a:ea typeface="Arial" pitchFamily="34" charset="-122"/>
-                <a:cs typeface="Arial" pitchFamily="34" charset="-120"/>
+                <a:latin typeface="Segoe UI" pitchFamily="34" charset="0"/>
+                <a:ea typeface="Segoe UI" pitchFamily="34" charset="-122"/>
+                <a:cs typeface="Segoe UI" pitchFamily="34" charset="-120"/>
               </a:rPr>
               <a:t>WHAT THE MODEL IS DOING UNDERNEATH</a:t>
             </a:r>
@@ -7798,14 +8007,14 @@
       </p:sp>
       <p:sp>
         <p:nvSpPr>
-          <p:cNvPr id="16" name="Shape 12"/>
-          <p:cNvSpPr/>
-          <p:nvPr/>
-        </p:nvSpPr>
-        <p:spPr>
-          <a:xfrm>
-            <a:off x="5669280" y="1371600"/>
-            <a:ext cx="6065215" cy="712470"/>
+          <p:cNvPr id="17" name="Shape 12"/>
+          <p:cNvSpPr/>
+          <p:nvPr/>
+        </p:nvSpPr>
+        <p:spPr>
+          <a:xfrm>
+            <a:off x="5669280" y="1458468"/>
+            <a:ext cx="6065215" cy="720852"/>
           </a:xfrm>
           <a:prstGeom prst="rect">
             <a:avLst/>
@@ -7823,14 +8032,14 @@
       </p:sp>
       <p:sp>
         <p:nvSpPr>
-          <p:cNvPr id="17" name="Text 13"/>
-          <p:cNvSpPr/>
-          <p:nvPr/>
-        </p:nvSpPr>
-        <p:spPr>
-          <a:xfrm>
-            <a:off x="5779008" y="1408176"/>
-            <a:ext cx="5845759" cy="657606"/>
+          <p:cNvPr id="18" name="Text 13"/>
+          <p:cNvSpPr/>
+          <p:nvPr/>
+        </p:nvSpPr>
+        <p:spPr>
+          <a:xfrm>
+            <a:off x="5788152" y="1495044"/>
+            <a:ext cx="5827471" cy="665988"/>
           </a:xfrm>
           <a:prstGeom prst="rect">
             <a:avLst/>
@@ -7848,11 +8057,11 @@
             <a:r>
               <a:rPr lang="en-US" sz="1100" dirty="0">
                 <a:solidFill>
-                  <a:srgbClr val="231F20"/>
-                </a:solidFill>
-                <a:latin typeface="Arial" pitchFamily="34" charset="0"/>
-                <a:ea typeface="Arial" pitchFamily="34" charset="-122"/>
-                <a:cs typeface="Arial" pitchFamily="34" charset="-120"/>
+                  <a:srgbClr val="212B32"/>
+                </a:solidFill>
+                <a:latin typeface="Segoe UI" pitchFamily="34" charset="0"/>
+                <a:ea typeface="Segoe UI" pitchFamily="34" charset="-122"/>
+                <a:cs typeface="Segoe UI" pitchFamily="34" charset="-120"/>
               </a:rPr>
               <a:t>Active surveillance retention is the metric that matters: holding patients in the protocol so disease progression is caught early. Home PSA flattens the drop-out curve and keeps the cohort visible to the clinical team.</a:t>
             </a:r>
@@ -7862,13 +8071,13 @@
       </p:sp>
       <p:sp>
         <p:nvSpPr>
-          <p:cNvPr id="18" name="Shape 14"/>
-          <p:cNvSpPr/>
-          <p:nvPr/>
-        </p:nvSpPr>
-        <p:spPr>
-          <a:xfrm>
-            <a:off x="5669280" y="2212086"/>
+          <p:cNvPr id="19" name="Shape 14"/>
+          <p:cNvSpPr/>
+          <p:nvPr/>
+        </p:nvSpPr>
+        <p:spPr>
+          <a:xfrm>
+            <a:off x="5669280" y="2307336"/>
             <a:ext cx="6065215" cy="274320"/>
           </a:xfrm>
           <a:prstGeom prst="rect">
@@ -7887,14 +8096,14 @@
       </p:sp>
       <p:sp>
         <p:nvSpPr>
-          <p:cNvPr id="19" name="Text 15"/>
-          <p:cNvSpPr/>
-          <p:nvPr/>
-        </p:nvSpPr>
-        <p:spPr>
-          <a:xfrm>
-            <a:off x="5779008" y="2212086"/>
-            <a:ext cx="5845759" cy="274320"/>
+          <p:cNvPr id="20" name="Text 15"/>
+          <p:cNvSpPr/>
+          <p:nvPr/>
+        </p:nvSpPr>
+        <p:spPr>
+          <a:xfrm>
+            <a:off x="5788152" y="2307336"/>
+            <a:ext cx="5827471" cy="274320"/>
           </a:xfrm>
           <a:prstGeom prst="rect">
             <a:avLst/>
@@ -7914,9 +8123,9 @@
                 <a:solidFill>
                   <a:srgbClr val="FFFFFF"/>
                 </a:solidFill>
-                <a:latin typeface="Arial" pitchFamily="34" charset="0"/>
-                <a:ea typeface="Arial" pitchFamily="34" charset="-122"/>
-                <a:cs typeface="Arial" pitchFamily="34" charset="-120"/>
+                <a:latin typeface="Segoe UI" pitchFamily="34" charset="0"/>
+                <a:ea typeface="Segoe UI" pitchFamily="34" charset="-122"/>
+                <a:cs typeface="Segoe UI" pitchFamily="34" charset="-120"/>
               </a:rPr>
               <a:t>THE OLD WAY</a:t>
             </a:r>
@@ -7926,24 +8135,24 @@
       </p:sp>
       <p:sp>
         <p:nvSpPr>
-          <p:cNvPr id="20" name="Shape 16"/>
-          <p:cNvSpPr/>
-          <p:nvPr/>
-        </p:nvSpPr>
-        <p:spPr>
-          <a:xfrm>
-            <a:off x="5669280" y="2486406"/>
-            <a:ext cx="6065215" cy="712470"/>
-          </a:xfrm>
-          <a:prstGeom prst="rect">
-            <a:avLst/>
-          </a:prstGeom>
-          <a:solidFill>
-            <a:srgbClr val="F0F4F5"/>
+          <p:cNvPr id="21" name="Shape 16"/>
+          <p:cNvSpPr/>
+          <p:nvPr/>
+        </p:nvSpPr>
+        <p:spPr>
+          <a:xfrm>
+            <a:off x="5669280" y="2581656"/>
+            <a:ext cx="6065215" cy="720852"/>
+          </a:xfrm>
+          <a:prstGeom prst="rect">
+            <a:avLst/>
+          </a:prstGeom>
+          <a:solidFill>
+            <a:srgbClr val="F8FAFC"/>
           </a:solidFill>
           <a:ln w="12700">
             <a:solidFill>
-              <a:srgbClr val="F0F4F5"/>
+              <a:srgbClr val="F8FAFC"/>
             </a:solidFill>
             <a:prstDash val="solid"/>
           </a:ln>
@@ -7951,14 +8160,14 @@
       </p:sp>
       <p:sp>
         <p:nvSpPr>
-          <p:cNvPr id="21" name="Text 17"/>
-          <p:cNvSpPr/>
-          <p:nvPr/>
-        </p:nvSpPr>
-        <p:spPr>
-          <a:xfrm>
-            <a:off x="5779008" y="2522982"/>
-            <a:ext cx="5845759" cy="657606"/>
+          <p:cNvPr id="22" name="Text 17"/>
+          <p:cNvSpPr/>
+          <p:nvPr/>
+        </p:nvSpPr>
+        <p:spPr>
+          <a:xfrm>
+            <a:off x="5788152" y="2618232"/>
+            <a:ext cx="5827471" cy="665988"/>
           </a:xfrm>
           <a:prstGeom prst="rect">
             <a:avLst/>
@@ -7976,11 +8185,11 @@
             <a:r>
               <a:rPr lang="en-US" sz="1100" dirty="0">
                 <a:solidFill>
-                  <a:srgbClr val="231F20"/>
-                </a:solidFill>
-                <a:latin typeface="Arial" pitchFamily="34" charset="0"/>
-                <a:ea typeface="Arial" pitchFamily="34" charset="-122"/>
-                <a:cs typeface="Arial" pitchFamily="34" charset="-120"/>
+                  <a:srgbClr val="212B32"/>
+                </a:solidFill>
+                <a:latin typeface="Segoe UI" pitchFamily="34" charset="0"/>
+                <a:ea typeface="Segoe UI" pitchFamily="34" charset="-122"/>
+                <a:cs typeface="Segoe UI" pitchFamily="34" charset="-120"/>
               </a:rPr>
               <a:t>Drop out of surveillance, progress unmonitored, present later with a different staging and a different prognosis. The clinical risk was always in the venue, not the patient.</a:t>
             </a:r>
@@ -7990,13 +8199,13 @@
       </p:sp>
       <p:sp>
         <p:nvSpPr>
-          <p:cNvPr id="22" name="Shape 18"/>
-          <p:cNvSpPr/>
-          <p:nvPr/>
-        </p:nvSpPr>
-        <p:spPr>
-          <a:xfrm>
-            <a:off x="5669280" y="3326892"/>
+          <p:cNvPr id="23" name="Shape 18"/>
+          <p:cNvSpPr/>
+          <p:nvPr/>
+        </p:nvSpPr>
+        <p:spPr>
+          <a:xfrm>
+            <a:off x="5669280" y="3430524"/>
             <a:ext cx="6065215" cy="274320"/>
           </a:xfrm>
           <a:prstGeom prst="rect">
@@ -8015,14 +8224,14 @@
       </p:sp>
       <p:sp>
         <p:nvSpPr>
-          <p:cNvPr id="23" name="Text 19"/>
-          <p:cNvSpPr/>
-          <p:nvPr/>
-        </p:nvSpPr>
-        <p:spPr>
-          <a:xfrm>
-            <a:off x="5779008" y="3326892"/>
-            <a:ext cx="5845759" cy="274320"/>
+          <p:cNvPr id="24" name="Text 19"/>
+          <p:cNvSpPr/>
+          <p:nvPr/>
+        </p:nvSpPr>
+        <p:spPr>
+          <a:xfrm>
+            <a:off x="5788152" y="3430524"/>
+            <a:ext cx="5827471" cy="274320"/>
           </a:xfrm>
           <a:prstGeom prst="rect">
             <a:avLst/>
@@ -8042,9 +8251,9 @@
                 <a:solidFill>
                   <a:srgbClr val="FFFFFF"/>
                 </a:solidFill>
-                <a:latin typeface="Arial" pitchFamily="34" charset="0"/>
-                <a:ea typeface="Arial" pitchFamily="34" charset="-122"/>
-                <a:cs typeface="Arial" pitchFamily="34" charset="-120"/>
+                <a:latin typeface="Segoe UI" pitchFamily="34" charset="0"/>
+                <a:ea typeface="Segoe UI" pitchFamily="34" charset="-122"/>
+                <a:cs typeface="Segoe UI" pitchFamily="34" charset="-120"/>
               </a:rPr>
               <a:t>WHAT THE CARE TEAM SEES</a:t>
             </a:r>
@@ -8054,14 +8263,14 @@
       </p:sp>
       <p:sp>
         <p:nvSpPr>
-          <p:cNvPr id="24" name="Shape 20"/>
-          <p:cNvSpPr/>
-          <p:nvPr/>
-        </p:nvSpPr>
-        <p:spPr>
-          <a:xfrm>
-            <a:off x="5669280" y="3601212"/>
-            <a:ext cx="6065215" cy="371602"/>
+          <p:cNvPr id="25" name="Shape 20"/>
+          <p:cNvSpPr/>
+          <p:nvPr/>
+        </p:nvSpPr>
+        <p:spPr>
+          <a:xfrm>
+            <a:off x="5669280" y="3704844"/>
+            <a:ext cx="6065215" cy="374396"/>
           </a:xfrm>
           <a:prstGeom prst="rect">
             <a:avLst/>
@@ -8079,14 +8288,14 @@
       </p:sp>
       <p:sp>
         <p:nvSpPr>
-          <p:cNvPr id="25" name="Text 21"/>
-          <p:cNvSpPr/>
-          <p:nvPr/>
-        </p:nvSpPr>
-        <p:spPr>
-          <a:xfrm>
-            <a:off x="5779008" y="3637788"/>
-            <a:ext cx="5845759" cy="316738"/>
+          <p:cNvPr id="26" name="Text 21"/>
+          <p:cNvSpPr/>
+          <p:nvPr/>
+        </p:nvSpPr>
+        <p:spPr>
+          <a:xfrm>
+            <a:off x="5788152" y="3741420"/>
+            <a:ext cx="5827471" cy="319532"/>
           </a:xfrm>
           <a:prstGeom prst="rect">
             <a:avLst/>
@@ -8104,11 +8313,11 @@
             <a:r>
               <a:rPr lang="en-US" sz="1100" dirty="0">
                 <a:solidFill>
-                  <a:srgbClr val="231F20"/>
-                </a:solidFill>
-                <a:latin typeface="Arial" pitchFamily="34" charset="0"/>
-                <a:ea typeface="Arial" pitchFamily="34" charset="-122"/>
-                <a:cs typeface="Arial" pitchFamily="34" charset="-120"/>
+                  <a:srgbClr val="212B32"/>
+                </a:solidFill>
+                <a:latin typeface="Segoe UI" pitchFamily="34" charset="0"/>
+                <a:ea typeface="Segoe UI" pitchFamily="34" charset="-122"/>
+                <a:cs typeface="Segoe UI" pitchFamily="34" charset="-120"/>
               </a:rPr>
               <a:t>Adam. The MDT. Mark.</a:t>
             </a:r>
@@ -8118,14 +8327,14 @@
       </p:sp>
       <p:sp>
         <p:nvSpPr>
-          <p:cNvPr id="27" name="Text 22"/>
-          <p:cNvSpPr/>
-          <p:nvPr/>
-        </p:nvSpPr>
-        <p:spPr>
-          <a:xfrm>
-            <a:off x="457200" y="6473952"/>
-            <a:ext cx="3108960" cy="274320"/>
+          <p:cNvPr id="28" name="Text 22"/>
+          <p:cNvSpPr/>
+          <p:nvPr/>
+        </p:nvSpPr>
+        <p:spPr>
+          <a:xfrm>
+            <a:off x="457200" y="6455664"/>
+            <a:ext cx="4206240" cy="274320"/>
           </a:xfrm>
           <a:prstGeom prst="rect">
             <a:avLst/>
@@ -8145,9 +8354,9 @@
                 <a:solidFill>
                   <a:srgbClr val="7E8B97"/>
                 </a:solidFill>
-                <a:latin typeface="Arial" pitchFamily="34" charset="0"/>
-                <a:ea typeface="Arial" pitchFamily="34" charset="-122"/>
-                <a:cs typeface="Arial" pitchFamily="34" charset="-120"/>
+                <a:latin typeface="Segoe UI" pitchFamily="34" charset="0"/>
+                <a:ea typeface="Segoe UI" pitchFamily="34" charset="-122"/>
+                <a:cs typeface="Segoe UI" pitchFamily="34" charset="-120"/>
               </a:rPr>
               <a:t>Mark  ·  Hearts and Minds</a:t>
             </a:r>
@@ -8157,14 +8366,14 @@
       </p:sp>
       <p:sp>
         <p:nvSpPr>
-          <p:cNvPr id="28" name="Text 23"/>
-          <p:cNvSpPr/>
-          <p:nvPr/>
-        </p:nvSpPr>
-        <p:spPr>
-          <a:xfrm>
-            <a:off x="3657600" y="6473952"/>
-            <a:ext cx="7528255" cy="274320"/>
+          <p:cNvPr id="29" name="Text 23"/>
+          <p:cNvSpPr/>
+          <p:nvPr/>
+        </p:nvSpPr>
+        <p:spPr>
+          <a:xfrm>
+            <a:off x="4754880" y="6455664"/>
+            <a:ext cx="6430975" cy="274320"/>
           </a:xfrm>
           <a:prstGeom prst="rect">
             <a:avLst/>
@@ -8184,9 +8393,9 @@
                 <a:solidFill>
                   <a:srgbClr val="7E8B97"/>
                 </a:solidFill>
-                <a:latin typeface="Arial" pitchFamily="34" charset="0"/>
-                <a:ea typeface="Arial" pitchFamily="34" charset="-122"/>
-                <a:cs typeface="Arial" pitchFamily="34" charset="-120"/>
+                <a:latin typeface="Segoe UI" pitchFamily="34" charset="0"/>
+                <a:ea typeface="Segoe UI" pitchFamily="34" charset="-122"/>
+                <a:cs typeface="Segoe UI" pitchFamily="34" charset="-120"/>
               </a:rPr>
               <a:t>Commercial positions are agreed in principle and remain subject to the live procurement.</a:t>
             </a:r>
@@ -8196,14 +8405,14 @@
       </p:sp>
       <p:sp>
         <p:nvSpPr>
-          <p:cNvPr id="29" name="Text 24"/>
-          <p:cNvSpPr/>
-          <p:nvPr/>
-        </p:nvSpPr>
-        <p:spPr>
-          <a:xfrm>
-            <a:off x="11368735" y="6473952"/>
-            <a:ext cx="365760" cy="274320"/>
+          <p:cNvPr id="30" name="Text 24"/>
+          <p:cNvSpPr/>
+          <p:nvPr/>
+        </p:nvSpPr>
+        <p:spPr>
+          <a:xfrm>
+            <a:off x="11323015" y="6455664"/>
+            <a:ext cx="411480" cy="274320"/>
           </a:xfrm>
           <a:prstGeom prst="rect">
             <a:avLst/>
@@ -8223,9 +8432,9 @@
                 <a:solidFill>
                   <a:srgbClr val="7E8B97"/>
                 </a:solidFill>
-                <a:latin typeface="Arial" pitchFamily="34" charset="0"/>
-                <a:ea typeface="Arial" pitchFamily="34" charset="-122"/>
-                <a:cs typeface="Arial" pitchFamily="34" charset="-120"/>
+                <a:latin typeface="Segoe UI" pitchFamily="34" charset="0"/>
+                <a:ea typeface="Segoe UI" pitchFamily="34" charset="-122"/>
+                <a:cs typeface="Segoe UI" pitchFamily="34" charset="-120"/>
               </a:rPr>
               <a:t>7</a:t>
             </a:r>
@@ -8265,137 +8474,9 @@
           <a:chExt cx="0" cy="0"/>
         </a:xfrm>
       </p:grpSpPr>
-      <p:sp>
-        <p:nvSpPr>
-          <p:cNvPr id="2" name="Shape 0"/>
-          <p:cNvSpPr/>
-          <p:nvPr/>
-        </p:nvSpPr>
-        <p:spPr>
-          <a:xfrm>
-            <a:off x="0" y="0"/>
-            <a:ext cx="12191695" cy="868680"/>
-          </a:xfrm>
-          <a:prstGeom prst="rect">
-            <a:avLst/>
-          </a:prstGeom>
-          <a:solidFill>
-            <a:srgbClr val="003087"/>
-          </a:solidFill>
-          <a:ln w="12700">
-            <a:solidFill>
-              <a:srgbClr val="003087"/>
-            </a:solidFill>
-            <a:prstDash val="solid"/>
-          </a:ln>
-        </p:spPr>
-      </p:sp>
-      <p:sp>
-        <p:nvSpPr>
-          <p:cNvPr id="3" name="Shape 1"/>
-          <p:cNvSpPr/>
-          <p:nvPr/>
-        </p:nvSpPr>
-        <p:spPr>
-          <a:xfrm>
-            <a:off x="0" y="868680"/>
-            <a:ext cx="12191695" cy="54864"/>
-          </a:xfrm>
-          <a:prstGeom prst="rect">
-            <a:avLst/>
-          </a:prstGeom>
-          <a:solidFill>
-            <a:srgbClr val="FFB91D"/>
-          </a:solidFill>
-          <a:ln w="12700">
-            <a:solidFill>
-              <a:srgbClr val="FFB91D"/>
-            </a:solidFill>
-            <a:prstDash val="solid"/>
-          </a:ln>
-        </p:spPr>
-      </p:sp>
-      <p:sp>
-        <p:nvSpPr>
-          <p:cNvPr id="4" name="Text 2"/>
-          <p:cNvSpPr/>
-          <p:nvPr/>
-        </p:nvSpPr>
-        <p:spPr>
-          <a:xfrm>
-            <a:off x="457200" y="128016"/>
-            <a:ext cx="8686800" cy="256032"/>
-          </a:xfrm>
-          <a:prstGeom prst="rect">
-            <a:avLst/>
-          </a:prstGeom>
-          <a:noFill/>
-          <a:ln/>
-        </p:spPr>
-        <p:txBody>
-          <a:bodyPr wrap="square" lIns="0" tIns="0" rIns="0" bIns="0" rtlCol="0" anchor="ctr"/>
-          <a:lstStyle/>
-          <a:p>
-            <a:pPr indent="0" marL="0">
-              <a:buNone/>
-            </a:pPr>
-            <a:r>
-              <a:rPr lang="en-US" sz="950" b="1" spc="200" kern="0" dirty="0">
-                <a:solidFill>
-                  <a:srgbClr val="7EC8E3"/>
-                </a:solidFill>
-                <a:latin typeface="Arial" pitchFamily="34" charset="0"/>
-                <a:ea typeface="Arial" pitchFamily="34" charset="-122"/>
-                <a:cs typeface="Arial" pitchFamily="34" charset="-120"/>
-              </a:rPr>
-              <a:t>HEARTS AND MINDS  ·  MARK'S JOURNEY  ·  THE OUTCOME</a:t>
-            </a:r>
-            <a:endParaRPr lang="en-US" sz="950" dirty="0"/>
-          </a:p>
-        </p:txBody>
-      </p:sp>
-      <p:sp>
-        <p:nvSpPr>
-          <p:cNvPr id="5" name="Text 3"/>
-          <p:cNvSpPr/>
-          <p:nvPr/>
-        </p:nvSpPr>
-        <p:spPr>
-          <a:xfrm>
-            <a:off x="457200" y="384048"/>
-            <a:ext cx="9601200" cy="411480"/>
-          </a:xfrm>
-          <a:prstGeom prst="rect">
-            <a:avLst/>
-          </a:prstGeom>
-          <a:noFill/>
-          <a:ln/>
-        </p:spPr>
-        <p:txBody>
-          <a:bodyPr wrap="square" lIns="0" tIns="0" rIns="0" bIns="0" rtlCol="0" anchor="ctr"/>
-          <a:lstStyle/>
-          <a:p>
-            <a:pPr indent="0" marL="0">
-              <a:buNone/>
-            </a:pPr>
-            <a:r>
-              <a:rPr lang="en-US" sz="2000" b="1" dirty="0">
-                <a:solidFill>
-                  <a:srgbClr val="FFFFFF"/>
-                </a:solidFill>
-                <a:latin typeface="Arial" pitchFamily="34" charset="0"/>
-                <a:ea typeface="Arial" pitchFamily="34" charset="-122"/>
-                <a:cs typeface="Arial" pitchFamily="34" charset="-120"/>
-              </a:rPr>
-              <a:t>Mark's win</a:t>
-            </a:r>
-            <a:endParaRPr lang="en-US" sz="2000" dirty="0"/>
-          </a:p>
-        </p:txBody>
-      </p:sp>
       <p:pic>
         <p:nvPicPr>
-          <p:cNvPr id="6" name="Image 0" descr="/sessions/quirky-zen-galileo/mnt/outputs/deckbuild/nhs_logo.png">    </p:cNvPr>
+          <p:cNvPr id="2" name="Image 0" descr="/sessions/quirky-zen-galileo/mnt/NHS/07 Sites &amp; Repos/dtx-ecosystem/hearts-and-minds/_generators/assets/bg-band.jpg">    </p:cNvPr>
           <p:cNvPicPr>
             <a:picLocks noChangeAspect="1"/>
           </p:cNvPicPr>
@@ -8409,8 +8490,8 @@
         </p:blipFill>
         <p:spPr>
           <a:xfrm>
-            <a:off x="10774375" y="201168"/>
-            <a:ext cx="960120" cy="393192"/>
+            <a:off x="0" y="0"/>
+            <a:ext cx="12191695" cy="932688"/>
           </a:xfrm>
           <a:prstGeom prst="rect">
             <a:avLst/>
@@ -8419,14 +8500,170 @@
       </p:pic>
       <p:sp>
         <p:nvSpPr>
-          <p:cNvPr id="7" name="Text 4"/>
-          <p:cNvSpPr/>
-          <p:nvPr/>
-        </p:nvSpPr>
-        <p:spPr>
-          <a:xfrm>
-            <a:off x="457200" y="1143000"/>
-            <a:ext cx="11277295" cy="822960"/>
+          <p:cNvPr id="3" name="Shape 0"/>
+          <p:cNvSpPr/>
+          <p:nvPr/>
+        </p:nvSpPr>
+        <p:spPr>
+          <a:xfrm>
+            <a:off x="0" y="932688"/>
+            <a:ext cx="12191695" cy="50292"/>
+          </a:xfrm>
+          <a:prstGeom prst="rect">
+            <a:avLst/>
+          </a:prstGeom>
+          <a:solidFill>
+            <a:srgbClr val="FFB91D"/>
+          </a:solidFill>
+          <a:ln w="12700">
+            <a:solidFill>
+              <a:srgbClr val="FFB91D"/>
+            </a:solidFill>
+            <a:prstDash val="solid"/>
+          </a:ln>
+        </p:spPr>
+      </p:sp>
+      <p:sp>
+        <p:nvSpPr>
+          <p:cNvPr id="4" name="Text 1"/>
+          <p:cNvSpPr/>
+          <p:nvPr/>
+        </p:nvSpPr>
+        <p:spPr>
+          <a:xfrm>
+            <a:off x="502920" y="137160"/>
+            <a:ext cx="8595360" cy="256032"/>
+          </a:xfrm>
+          <a:prstGeom prst="rect">
+            <a:avLst/>
+          </a:prstGeom>
+          <a:noFill/>
+          <a:ln/>
+        </p:spPr>
+        <p:txBody>
+          <a:bodyPr wrap="square" lIns="0" tIns="0" rIns="0" bIns="0" rtlCol="0" anchor="ctr"/>
+          <a:lstStyle/>
+          <a:p>
+            <a:pPr indent="0" marL="0">
+              <a:buNone/>
+            </a:pPr>
+            <a:r>
+              <a:rPr lang="en-US" sz="950" b="1" spc="240" kern="0" dirty="0">
+                <a:solidFill>
+                  <a:srgbClr val="FFD66B"/>
+                </a:solidFill>
+                <a:latin typeface="Segoe UI" pitchFamily="34" charset="0"/>
+                <a:ea typeface="Segoe UI" pitchFamily="34" charset="-122"/>
+                <a:cs typeface="Segoe UI" pitchFamily="34" charset="-120"/>
+              </a:rPr>
+              <a:t>HEARTS AND MINDS  ·  MARK’S JOURNEY  ·  THE OUTCOME</a:t>
+            </a:r>
+            <a:endParaRPr lang="en-US" sz="950" dirty="0"/>
+          </a:p>
+        </p:txBody>
+      </p:sp>
+      <p:sp>
+        <p:nvSpPr>
+          <p:cNvPr id="5" name="Text 2"/>
+          <p:cNvSpPr/>
+          <p:nvPr/>
+        </p:nvSpPr>
+        <p:spPr>
+          <a:xfrm>
+            <a:off x="502920" y="402336"/>
+            <a:ext cx="9509760" cy="457200"/>
+          </a:xfrm>
+          <a:prstGeom prst="rect">
+            <a:avLst/>
+          </a:prstGeom>
+          <a:noFill/>
+          <a:ln/>
+        </p:spPr>
+        <p:txBody>
+          <a:bodyPr wrap="square" lIns="0" tIns="0" rIns="0" bIns="0" rtlCol="0" anchor="ctr">
+            <a:normAutofit/>
+          </a:bodyPr>
+          <a:lstStyle/>
+          <a:p>
+            <a:pPr indent="0" marL="0">
+              <a:buNone/>
+            </a:pPr>
+            <a:r>
+              <a:rPr lang="en-US" sz="2100" b="1" dirty="0">
+                <a:solidFill>
+                  <a:srgbClr val="FFFFFF"/>
+                </a:solidFill>
+                <a:latin typeface="Segoe UI" pitchFamily="34" charset="0"/>
+                <a:ea typeface="Segoe UI" pitchFamily="34" charset="-122"/>
+                <a:cs typeface="Segoe UI" pitchFamily="34" charset="-120"/>
+              </a:rPr>
+              <a:t>Mark's win</a:t>
+            </a:r>
+            <a:endParaRPr lang="en-US" sz="2100" dirty="0"/>
+          </a:p>
+        </p:txBody>
+      </p:sp>
+      <p:sp>
+        <p:nvSpPr>
+          <p:cNvPr id="6" name="Shape 3"/>
+          <p:cNvSpPr/>
+          <p:nvPr/>
+        </p:nvSpPr>
+        <p:spPr>
+          <a:xfrm>
+            <a:off x="10942806" y="173736"/>
+            <a:ext cx="791689" cy="605699"/>
+          </a:xfrm>
+          <a:prstGeom prst="roundRect">
+            <a:avLst>
+              <a:gd name="adj" fmla="val 12077"/>
+            </a:avLst>
+          </a:prstGeom>
+          <a:solidFill>
+            <a:srgbClr val="FFFFFF"/>
+          </a:solidFill>
+          <a:ln w="12700">
+            <a:solidFill>
+              <a:srgbClr val="FFFFFF"/>
+            </a:solidFill>
+            <a:prstDash val="solid"/>
+          </a:ln>
+        </p:spPr>
+      </p:sp>
+      <p:pic>
+        <p:nvPicPr>
+          <p:cNvPr id="7" name="Image 1" descr="/sessions/quirky-zen-galileo/mnt/NHS/07 Sites &amp; Repos/dtx-ecosystem/hearts-and-minds/_generators/assets/nhs-logo.png">    </p:cNvPr>
+          <p:cNvPicPr>
+            <a:picLocks noChangeAspect="1"/>
+          </p:cNvPicPr>
+          <p:nvPr/>
+        </p:nvPicPr>
+        <p:blipFill>
+          <a:blip r:embed="rId2"/>
+          <a:stretch>
+            <a:fillRect/>
+          </a:stretch>
+        </p:blipFill>
+        <p:spPr>
+          <a:xfrm>
+            <a:off x="11068993" y="266273"/>
+            <a:ext cx="539315" cy="420624"/>
+          </a:xfrm>
+          <a:prstGeom prst="rect">
+            <a:avLst/>
+          </a:prstGeom>
+        </p:spPr>
+      </p:pic>
+      <p:sp>
+        <p:nvSpPr>
+          <p:cNvPr id="8" name="Text 4"/>
+          <p:cNvSpPr/>
+          <p:nvPr/>
+        </p:nvSpPr>
+        <p:spPr>
+          <a:xfrm>
+            <a:off x="457200" y="1239012"/>
+            <a:ext cx="11277295" cy="766064"/>
           </a:xfrm>
           <a:prstGeom prst="rect">
             <a:avLst/>
@@ -8448,9 +8685,9 @@
                 <a:solidFill>
                   <a:srgbClr val="003087"/>
                 </a:solidFill>
-                <a:latin typeface="Arial" pitchFamily="34" charset="0"/>
-                <a:ea typeface="Arial" pitchFamily="34" charset="-122"/>
-                <a:cs typeface="Arial" pitchFamily="34" charset="-120"/>
+                <a:latin typeface="Segoe UI" pitchFamily="34" charset="0"/>
+                <a:ea typeface="Segoe UI" pitchFamily="34" charset="-122"/>
+                <a:cs typeface="Segoe UI" pitchFamily="34" charset="-120"/>
               </a:rPr>
               <a:t>The same surveillance, on time, on a Saturday morning. Adam still holding the cohort. The hospital saved for the moment it is actually needed.</a:t>
             </a:r>
@@ -8460,14 +8697,14 @@
       </p:sp>
       <p:sp>
         <p:nvSpPr>
-          <p:cNvPr id="8" name="Text 5"/>
-          <p:cNvSpPr/>
-          <p:nvPr/>
-        </p:nvSpPr>
-        <p:spPr>
-          <a:xfrm>
-            <a:off x="457200" y="2011680"/>
-            <a:ext cx="11277295" cy="463296"/>
+          <p:cNvPr id="9" name="Text 5"/>
+          <p:cNvSpPr/>
+          <p:nvPr/>
+        </p:nvSpPr>
+        <p:spPr>
+          <a:xfrm>
+            <a:off x="457200" y="2206244"/>
+            <a:ext cx="11277295" cy="451104"/>
           </a:xfrm>
           <a:prstGeom prst="rect">
             <a:avLst/>
@@ -8487,11 +8724,11 @@
             <a:r>
               <a:rPr lang="en-US" sz="1200" dirty="0">
                 <a:solidFill>
-                  <a:srgbClr val="231F20"/>
-                </a:solidFill>
-                <a:latin typeface="Arial" pitchFamily="34" charset="0"/>
-                <a:ea typeface="Arial" pitchFamily="34" charset="-122"/>
-                <a:cs typeface="Arial" pitchFamily="34" charset="-120"/>
+                  <a:srgbClr val="212B32"/>
+                </a:solidFill>
+                <a:latin typeface="Segoe UI" pitchFamily="34" charset="0"/>
+                <a:ea typeface="Segoe UI" pitchFamily="34" charset="-122"/>
+                <a:cs typeface="Segoe UI" pitchFamily="34" charset="-120"/>
               </a:rPr>
               <a:t>Mark does not see procurement or pathways. He sees a kit through the door and a result his consultant has already read. </a:t>
             </a:r>
@@ -8501,11 +8738,11 @@
             <a:r>
               <a:rPr lang="en-US" sz="1200" b="1" dirty="0">
                 <a:solidFill>
-                  <a:srgbClr val="231F20"/>
-                </a:solidFill>
-                <a:latin typeface="Arial" pitchFamily="34" charset="0"/>
-                <a:ea typeface="Arial" pitchFamily="34" charset="-122"/>
-                <a:cs typeface="Arial" pitchFamily="34" charset="-120"/>
+                  <a:srgbClr val="212B32"/>
+                </a:solidFill>
+                <a:latin typeface="Segoe UI" pitchFamily="34" charset="0"/>
+                <a:ea typeface="Segoe UI" pitchFamily="34" charset="-122"/>
+                <a:cs typeface="Segoe UI" pitchFamily="34" charset="-120"/>
               </a:rPr>
               <a:t>The clinic visit that did not happen is the clinic visit Adam did not have capacity for anyway.</a:t>
             </a:r>
@@ -8515,11 +8752,11 @@
             <a:r>
               <a:rPr lang="en-US" sz="1200" dirty="0">
                 <a:solidFill>
-                  <a:srgbClr val="231F20"/>
-                </a:solidFill>
-                <a:latin typeface="Arial" pitchFamily="34" charset="0"/>
-                <a:ea typeface="Arial" pitchFamily="34" charset="-122"/>
-                <a:cs typeface="Arial" pitchFamily="34" charset="-120"/>
+                  <a:srgbClr val="212B32"/>
+                </a:solidFill>
+                <a:latin typeface="Segoe UI" pitchFamily="34" charset="0"/>
+                <a:ea typeface="Segoe UI" pitchFamily="34" charset="-122"/>
+                <a:cs typeface="Segoe UI" pitchFamily="34" charset="-120"/>
               </a:rPr>
               <a:t> Mark stays in surveillance. The cohort grows.</a:t>
             </a:r>
@@ -8529,18 +8766,18 @@
       </p:sp>
       <p:sp>
         <p:nvSpPr>
-          <p:cNvPr id="9" name="Shape 6"/>
-          <p:cNvSpPr/>
-          <p:nvPr/>
-        </p:nvSpPr>
-        <p:spPr>
-          <a:xfrm>
-            <a:off x="457200" y="2749296"/>
-            <a:ext cx="11277295" cy="1874012"/>
+          <p:cNvPr id="10" name="Shape 6"/>
+          <p:cNvSpPr/>
+          <p:nvPr/>
+        </p:nvSpPr>
+        <p:spPr>
+          <a:xfrm>
+            <a:off x="457200" y="2913380"/>
+            <a:ext cx="11277295" cy="1757680"/>
           </a:xfrm>
           <a:prstGeom prst="roundRect">
             <a:avLst>
-              <a:gd name="adj" fmla="val 4879"/>
+              <a:gd name="adj" fmla="val 5202"/>
             </a:avLst>
           </a:prstGeom>
           <a:solidFill>
@@ -8548,7 +8785,7 @@
           </a:solidFill>
           <a:ln w="9525">
             <a:solidFill>
-              <a:srgbClr val="DDE3E8"/>
+              <a:srgbClr val="EBEEF1"/>
             </a:solidFill>
             <a:prstDash val="solid"/>
           </a:ln>
@@ -8556,14 +8793,14 @@
       </p:sp>
       <p:sp>
         <p:nvSpPr>
-          <p:cNvPr id="10" name="Shape 7"/>
-          <p:cNvSpPr/>
-          <p:nvPr/>
-        </p:nvSpPr>
-        <p:spPr>
-          <a:xfrm>
-            <a:off x="457200" y="2749296"/>
-            <a:ext cx="11277295" cy="73152"/>
+          <p:cNvPr id="11" name="Shape 7"/>
+          <p:cNvSpPr/>
+          <p:nvPr/>
+        </p:nvSpPr>
+        <p:spPr>
+          <a:xfrm>
+            <a:off x="457200" y="2913380"/>
+            <a:ext cx="11277295" cy="64008"/>
           </a:xfrm>
           <a:prstGeom prst="rect">
             <a:avLst/>
@@ -8581,14 +8818,14 @@
       </p:sp>
       <p:sp>
         <p:nvSpPr>
-          <p:cNvPr id="11" name="Text 8"/>
-          <p:cNvSpPr/>
-          <p:nvPr/>
-        </p:nvSpPr>
-        <p:spPr>
-          <a:xfrm>
-            <a:off x="731520" y="2932176"/>
-            <a:ext cx="5486400" cy="274320"/>
+          <p:cNvPr id="12" name="Text 8"/>
+          <p:cNvSpPr/>
+          <p:nvPr/>
+        </p:nvSpPr>
+        <p:spPr>
+          <a:xfrm>
+            <a:off x="731520" y="3087116"/>
+            <a:ext cx="5486400" cy="256032"/>
           </a:xfrm>
           <a:prstGeom prst="rect">
             <a:avLst/>
@@ -8608,9 +8845,9 @@
                 <a:solidFill>
                   <a:srgbClr val="006747"/>
                 </a:solidFill>
-                <a:latin typeface="Arial" pitchFamily="34" charset="0"/>
-                <a:ea typeface="Arial" pitchFamily="34" charset="-122"/>
-                <a:cs typeface="Arial" pitchFamily="34" charset="-120"/>
+                <a:latin typeface="Segoe UI" pitchFamily="34" charset="0"/>
+                <a:ea typeface="Segoe UI" pitchFamily="34" charset="-122"/>
+                <a:cs typeface="Segoe UI" pitchFamily="34" charset="-120"/>
               </a:rPr>
               <a:t>THE MONEY IN THIS STORY</a:t>
             </a:r>
@@ -8620,14 +8857,14 @@
       </p:sp>
       <p:sp>
         <p:nvSpPr>
-          <p:cNvPr id="12" name="Text 9"/>
-          <p:cNvSpPr/>
-          <p:nvPr/>
-        </p:nvSpPr>
-        <p:spPr>
-          <a:xfrm>
-            <a:off x="731520" y="3252216"/>
-            <a:ext cx="10728655" cy="913892"/>
+          <p:cNvPr id="13" name="Text 9"/>
+          <p:cNvSpPr/>
+          <p:nvPr/>
+        </p:nvSpPr>
+        <p:spPr>
+          <a:xfrm>
+            <a:off x="731520" y="3388868"/>
+            <a:ext cx="10728655" cy="870712"/>
           </a:xfrm>
           <a:prstGeom prst="rect">
             <a:avLst/>
@@ -8643,7 +8880,7 @@
           <a:p>
             <a:pPr indent="0" marL="0">
               <a:spcAft>
-                <a:spcPts val="600"/>
+                <a:spcPts val="500"/>
               </a:spcAft>
               <a:buNone/>
             </a:pPr>
@@ -8652,9 +8889,9 @@
                 <a:solidFill>
                   <a:srgbClr val="4C6272"/>
                 </a:solidFill>
-                <a:latin typeface="Arial" pitchFamily="34" charset="0"/>
-                <a:ea typeface="Arial" pitchFamily="34" charset="-122"/>
-                <a:cs typeface="Arial" pitchFamily="34" charset="-120"/>
+                <a:latin typeface="Segoe UI" pitchFamily="34" charset="0"/>
+                <a:ea typeface="Segoe UI" pitchFamily="34" charset="-122"/>
+                <a:cs typeface="Segoe UI" pitchFamily="34" charset="-120"/>
               </a:rPr>
               <a:t>Nobody invoices Mark for staying at home. Each surveillance test is bought at a cost per activity by the ICB that funds his pathway, paid direct to the supplier that processes it. The hospital loses nothing when he stops travelling in: the money follows the completed test, not the building, and the phlebotomy slot he used four times a year goes to a patient who needs an in-person appointment. His consultant's review is unchanged, and still where the clinical value sits.</a:t>
             </a:r>
@@ -8664,14 +8901,53 @@
       </p:sp>
       <p:sp>
         <p:nvSpPr>
-          <p:cNvPr id="13" name="Text 10"/>
-          <p:cNvSpPr/>
-          <p:nvPr/>
-        </p:nvSpPr>
-        <p:spPr>
-          <a:xfrm>
-            <a:off x="731520" y="4211828"/>
-            <a:ext cx="10728655" cy="320040"/>
+          <p:cNvPr id="14" name="Text 10"/>
+          <p:cNvSpPr/>
+          <p:nvPr/>
+        </p:nvSpPr>
+        <p:spPr>
+          <a:xfrm>
+            <a:off x="731520" y="4287012"/>
+            <a:ext cx="10728655" cy="329184"/>
+          </a:xfrm>
+          <a:prstGeom prst="rect">
+            <a:avLst/>
+          </a:prstGeom>
+          <a:noFill/>
+          <a:ln/>
+        </p:spPr>
+        <p:txBody>
+          <a:bodyPr wrap="square" lIns="0" tIns="0" rIns="0" bIns="0" rtlCol="0" anchor="b"/>
+          <a:lstStyle/>
+          <a:p>
+            <a:pPr indent="0" marL="0">
+              <a:buNone/>
+            </a:pPr>
+            <a:r>
+              <a:rPr lang="en-US" sz="850" i="1" dirty="0">
+                <a:solidFill>
+                  <a:srgbClr val="7E8B97"/>
+                </a:solidFill>
+                <a:latin typeface="Segoe UI" pitchFamily="34" charset="0"/>
+                <a:ea typeface="Segoe UI" pitchFamily="34" charset="-122"/>
+                <a:cs typeface="Segoe UI" pitchFamily="34" charset="-120"/>
+              </a:rPr>
+              <a:t>Commercial positions are agreed in principle and remain subject to the live procurement. See the Money Loop and How Commissioners Buy pages of the operating model.</a:t>
+            </a:r>
+            <a:endParaRPr lang="en-US" sz="850" dirty="0"/>
+          </a:p>
+        </p:txBody>
+      </p:sp>
+      <p:sp>
+        <p:nvSpPr>
+          <p:cNvPr id="15" name="Text 11"/>
+          <p:cNvSpPr/>
+          <p:nvPr/>
+        </p:nvSpPr>
+        <p:spPr>
+          <a:xfrm>
+            <a:off x="457200" y="6455664"/>
+            <a:ext cx="4206240" cy="274320"/>
           </a:xfrm>
           <a:prstGeom prst="rect">
             <a:avLst/>
@@ -8687,15 +8963,15 @@
               <a:buNone/>
             </a:pPr>
             <a:r>
-              <a:rPr lang="en-US" sz="850" i="1" dirty="0">
+              <a:rPr lang="en-US" sz="850" dirty="0">
                 <a:solidFill>
                   <a:srgbClr val="7E8B97"/>
                 </a:solidFill>
-                <a:latin typeface="Arial" pitchFamily="34" charset="0"/>
-                <a:ea typeface="Arial" pitchFamily="34" charset="-122"/>
-                <a:cs typeface="Arial" pitchFamily="34" charset="-120"/>
-              </a:rPr>
-              <a:t>Commercial positions are agreed in principle and remain subject to the live procurement. See the Money Loop and How Commissioners Buy pages of the operating model.</a:t>
+                <a:latin typeface="Segoe UI" pitchFamily="34" charset="0"/>
+                <a:ea typeface="Segoe UI" pitchFamily="34" charset="-122"/>
+                <a:cs typeface="Segoe UI" pitchFamily="34" charset="-120"/>
+              </a:rPr>
+              <a:t>Mark  ·  Hearts and Minds</a:t>
             </a:r>
             <a:endParaRPr lang="en-US" sz="850" dirty="0"/>
           </a:p>
@@ -8703,14 +8979,14 @@
       </p:sp>
       <p:sp>
         <p:nvSpPr>
-          <p:cNvPr id="14" name="Text 11"/>
-          <p:cNvSpPr/>
-          <p:nvPr/>
-        </p:nvSpPr>
-        <p:spPr>
-          <a:xfrm>
-            <a:off x="457200" y="6473952"/>
-            <a:ext cx="3108960" cy="274320"/>
+          <p:cNvPr id="16" name="Text 12"/>
+          <p:cNvSpPr/>
+          <p:nvPr/>
+        </p:nvSpPr>
+        <p:spPr>
+          <a:xfrm>
+            <a:off x="4754880" y="6455664"/>
+            <a:ext cx="6430975" cy="274320"/>
           </a:xfrm>
           <a:prstGeom prst="rect">
             <a:avLst/>
@@ -8722,34 +8998,34 @@
           <a:bodyPr wrap="square" lIns="0" tIns="0" rIns="0" bIns="0" rtlCol="0" anchor="ctr"/>
           <a:lstStyle/>
           <a:p>
-            <a:pPr indent="0" marL="0">
-              <a:buNone/>
-            </a:pPr>
-            <a:r>
-              <a:rPr lang="en-US" sz="850" dirty="0">
+            <a:pPr algn="r" indent="0" marL="0">
+              <a:buNone/>
+            </a:pPr>
+            <a:r>
+              <a:rPr lang="en-US" sz="800" dirty="0">
                 <a:solidFill>
                   <a:srgbClr val="7E8B97"/>
                 </a:solidFill>
-                <a:latin typeface="Arial" pitchFamily="34" charset="0"/>
-                <a:ea typeface="Arial" pitchFamily="34" charset="-122"/>
-                <a:cs typeface="Arial" pitchFamily="34" charset="-120"/>
-              </a:rPr>
-              <a:t>Mark  ·  Hearts and Minds</a:t>
-            </a:r>
-            <a:endParaRPr lang="en-US" sz="850" dirty="0"/>
-          </a:p>
-        </p:txBody>
-      </p:sp>
-      <p:sp>
-        <p:nvSpPr>
-          <p:cNvPr id="15" name="Text 12"/>
-          <p:cNvSpPr/>
-          <p:nvPr/>
-        </p:nvSpPr>
-        <p:spPr>
-          <a:xfrm>
-            <a:off x="3657600" y="6473952"/>
-            <a:ext cx="7528255" cy="274320"/>
+                <a:latin typeface="Segoe UI" pitchFamily="34" charset="0"/>
+                <a:ea typeface="Segoe UI" pitchFamily="34" charset="-122"/>
+                <a:cs typeface="Segoe UI" pitchFamily="34" charset="-120"/>
+              </a:rPr>
+              <a:t>Commercial positions are agreed in principle and remain subject to the live procurement.</a:t>
+            </a:r>
+            <a:endParaRPr lang="en-US" sz="800" dirty="0"/>
+          </a:p>
+        </p:txBody>
+      </p:sp>
+      <p:sp>
+        <p:nvSpPr>
+          <p:cNvPr id="17" name="Text 13"/>
+          <p:cNvSpPr/>
+          <p:nvPr/>
+        </p:nvSpPr>
+        <p:spPr>
+          <a:xfrm>
+            <a:off x="11323015" y="6455664"/>
+            <a:ext cx="411480" cy="274320"/>
           </a:xfrm>
           <a:prstGeom prst="rect">
             <a:avLst/>
@@ -8765,52 +9041,13 @@
               <a:buNone/>
             </a:pPr>
             <a:r>
-              <a:rPr lang="en-US" sz="800" dirty="0">
+              <a:rPr lang="en-US" sz="850" b="1" dirty="0">
                 <a:solidFill>
                   <a:srgbClr val="7E8B97"/>
                 </a:solidFill>
-                <a:latin typeface="Arial" pitchFamily="34" charset="0"/>
-                <a:ea typeface="Arial" pitchFamily="34" charset="-122"/>
-                <a:cs typeface="Arial" pitchFamily="34" charset="-120"/>
-              </a:rPr>
-              <a:t>Commercial positions are agreed in principle and remain subject to the live procurement.</a:t>
-            </a:r>
-            <a:endParaRPr lang="en-US" sz="800" dirty="0"/>
-          </a:p>
-        </p:txBody>
-      </p:sp>
-      <p:sp>
-        <p:nvSpPr>
-          <p:cNvPr id="16" name="Text 13"/>
-          <p:cNvSpPr/>
-          <p:nvPr/>
-        </p:nvSpPr>
-        <p:spPr>
-          <a:xfrm>
-            <a:off x="11368735" y="6473952"/>
-            <a:ext cx="365760" cy="274320"/>
-          </a:xfrm>
-          <a:prstGeom prst="rect">
-            <a:avLst/>
-          </a:prstGeom>
-          <a:noFill/>
-          <a:ln/>
-        </p:spPr>
-        <p:txBody>
-          <a:bodyPr wrap="square" lIns="0" tIns="0" rIns="0" bIns="0" rtlCol="0" anchor="ctr"/>
-          <a:lstStyle/>
-          <a:p>
-            <a:pPr algn="r" indent="0" marL="0">
-              <a:buNone/>
-            </a:pPr>
-            <a:r>
-              <a:rPr lang="en-US" sz="850" b="1" dirty="0">
-                <a:solidFill>
-                  <a:srgbClr val="7E8B97"/>
-                </a:solidFill>
-                <a:latin typeface="Arial" pitchFamily="34" charset="0"/>
-                <a:ea typeface="Arial" pitchFamily="34" charset="-122"/>
-                <a:cs typeface="Arial" pitchFamily="34" charset="-120"/>
+                <a:latin typeface="Segoe UI" pitchFamily="34" charset="0"/>
+                <a:ea typeface="Segoe UI" pitchFamily="34" charset="-122"/>
+                <a:cs typeface="Segoe UI" pitchFamily="34" charset="-120"/>
               </a:rPr>
               <a:t>8</a:t>
             </a:r>
